--- a/3испсп/технологии программирования/лекции/2.pptx
+++ b/3испсп/технологии программирования/лекции/2.pptx
@@ -6,22 +6,27 @@
   </p:sldMasterIdLst>
   <p:sldIdLst>
     <p:sldId id="256" r:id="rId2"/>
-    <p:sldId id="272" r:id="rId3"/>
-    <p:sldId id="257" r:id="rId4"/>
-    <p:sldId id="258" r:id="rId5"/>
-    <p:sldId id="267" r:id="rId6"/>
-    <p:sldId id="259" r:id="rId7"/>
-    <p:sldId id="260" r:id="rId8"/>
-    <p:sldId id="268" r:id="rId9"/>
-    <p:sldId id="261" r:id="rId10"/>
-    <p:sldId id="263" r:id="rId11"/>
-    <p:sldId id="262" r:id="rId12"/>
-    <p:sldId id="264" r:id="rId13"/>
-    <p:sldId id="269" r:id="rId14"/>
-    <p:sldId id="271" r:id="rId15"/>
-    <p:sldId id="265" r:id="rId16"/>
-    <p:sldId id="270" r:id="rId17"/>
-    <p:sldId id="266" r:id="rId18"/>
+    <p:sldId id="262" r:id="rId3"/>
+    <p:sldId id="263" r:id="rId4"/>
+    <p:sldId id="265" r:id="rId5"/>
+    <p:sldId id="264" r:id="rId6"/>
+    <p:sldId id="261" r:id="rId7"/>
+    <p:sldId id="257" r:id="rId8"/>
+    <p:sldId id="266" r:id="rId9"/>
+    <p:sldId id="267" r:id="rId10"/>
+    <p:sldId id="268" r:id="rId11"/>
+    <p:sldId id="269" r:id="rId12"/>
+    <p:sldId id="270" r:id="rId13"/>
+    <p:sldId id="271" r:id="rId14"/>
+    <p:sldId id="272" r:id="rId15"/>
+    <p:sldId id="258" r:id="rId16"/>
+    <p:sldId id="274" r:id="rId17"/>
+    <p:sldId id="275" r:id="rId18"/>
+    <p:sldId id="276" r:id="rId19"/>
+    <p:sldId id="280" r:id="rId20"/>
+    <p:sldId id="277" r:id="rId21"/>
+    <p:sldId id="278" r:id="rId22"/>
+    <p:sldId id="279" r:id="rId23"/>
   </p:sldIdLst>
   <p:sldSz cx="9144000" cy="6858000" type="screen4x3"/>
   <p:notesSz cx="6858000" cy="9144000"/>
@@ -120,22 +125,6 @@
       </a:defRPr>
     </a:lvl9pPr>
   </p:defaultTextStyle>
-  <p:extLst>
-    <p:ext uri="{EFAFB233-063F-42B5-8137-9DF3F51BA10A}">
-      <p15:sldGuideLst xmlns="" xmlns:p15="http://schemas.microsoft.com/office/powerpoint/2012/main">
-        <p15:guide id="1" orient="horz" pos="2160">
-          <p15:clr>
-            <a:srgbClr val="A4A3A4"/>
-          </p15:clr>
-        </p15:guide>
-        <p15:guide id="2" pos="2880">
-          <p15:clr>
-            <a:srgbClr val="A4A3A4"/>
-          </p15:clr>
-        </p15:guide>
-      </p15:sldGuideLst>
-    </p:ext>
-  </p:extLst>
 </p:presentation>
 </file>
 
@@ -318,10 +307,10 @@
           <a:bodyPr/>
           <a:lstStyle/>
           <a:p>
-            <a:fld id="{1705624D-BBC2-4E86-AC22-75474281F825}" type="datetimeFigureOut">
+            <a:fld id="{829CC5B7-A91B-431A-81BA-289E7AE4BB3B}" type="datetimeFigureOut">
               <a:rPr lang="ru-RU" smtClean="0"/>
               <a:pPr/>
-              <a:t>19.02.2026</a:t>
+              <a:t>24.02.2026</a:t>
             </a:fld>
             <a:endParaRPr lang="ru-RU"/>
           </a:p>
@@ -361,7 +350,7 @@
           <a:bodyPr/>
           <a:lstStyle/>
           <a:p>
-            <a:fld id="{D52B047D-B034-4B57-AD9F-839D370ABAE6}" type="slidenum">
+            <a:fld id="{482C422A-F566-485C-8DC6-0021ABE64B94}" type="slidenum">
               <a:rPr lang="ru-RU" smtClean="0"/>
               <a:pPr/>
               <a:t>‹#›</a:t>
@@ -485,10 +474,10 @@
           <a:bodyPr/>
           <a:lstStyle/>
           <a:p>
-            <a:fld id="{1705624D-BBC2-4E86-AC22-75474281F825}" type="datetimeFigureOut">
+            <a:fld id="{829CC5B7-A91B-431A-81BA-289E7AE4BB3B}" type="datetimeFigureOut">
               <a:rPr lang="ru-RU" smtClean="0"/>
               <a:pPr/>
-              <a:t>19.02.2026</a:t>
+              <a:t>24.02.2026</a:t>
             </a:fld>
             <a:endParaRPr lang="ru-RU"/>
           </a:p>
@@ -528,7 +517,7 @@
           <a:bodyPr/>
           <a:lstStyle/>
           <a:p>
-            <a:fld id="{D52B047D-B034-4B57-AD9F-839D370ABAE6}" type="slidenum">
+            <a:fld id="{482C422A-F566-485C-8DC6-0021ABE64B94}" type="slidenum">
               <a:rPr lang="ru-RU" smtClean="0"/>
               <a:pPr/>
               <a:t>‹#›</a:t>
@@ -662,10 +651,10 @@
           <a:bodyPr/>
           <a:lstStyle/>
           <a:p>
-            <a:fld id="{1705624D-BBC2-4E86-AC22-75474281F825}" type="datetimeFigureOut">
+            <a:fld id="{829CC5B7-A91B-431A-81BA-289E7AE4BB3B}" type="datetimeFigureOut">
               <a:rPr lang="ru-RU" smtClean="0"/>
               <a:pPr/>
-              <a:t>19.02.2026</a:t>
+              <a:t>24.02.2026</a:t>
             </a:fld>
             <a:endParaRPr lang="ru-RU"/>
           </a:p>
@@ -705,7 +694,7 @@
           <a:bodyPr/>
           <a:lstStyle/>
           <a:p>
-            <a:fld id="{D52B047D-B034-4B57-AD9F-839D370ABAE6}" type="slidenum">
+            <a:fld id="{482C422A-F566-485C-8DC6-0021ABE64B94}" type="slidenum">
               <a:rPr lang="ru-RU" smtClean="0"/>
               <a:pPr/>
               <a:t>‹#›</a:t>
@@ -829,10 +818,10 @@
           <a:bodyPr/>
           <a:lstStyle/>
           <a:p>
-            <a:fld id="{1705624D-BBC2-4E86-AC22-75474281F825}" type="datetimeFigureOut">
+            <a:fld id="{829CC5B7-A91B-431A-81BA-289E7AE4BB3B}" type="datetimeFigureOut">
               <a:rPr lang="ru-RU" smtClean="0"/>
               <a:pPr/>
-              <a:t>19.02.2026</a:t>
+              <a:t>24.02.2026</a:t>
             </a:fld>
             <a:endParaRPr lang="ru-RU"/>
           </a:p>
@@ -872,7 +861,7 @@
           <a:bodyPr/>
           <a:lstStyle/>
           <a:p>
-            <a:fld id="{D52B047D-B034-4B57-AD9F-839D370ABAE6}" type="slidenum">
+            <a:fld id="{482C422A-F566-485C-8DC6-0021ABE64B94}" type="slidenum">
               <a:rPr lang="ru-RU" smtClean="0"/>
               <a:pPr/>
               <a:t>‹#›</a:t>
@@ -1072,10 +1061,10 @@
           <a:bodyPr/>
           <a:lstStyle/>
           <a:p>
-            <a:fld id="{1705624D-BBC2-4E86-AC22-75474281F825}" type="datetimeFigureOut">
+            <a:fld id="{829CC5B7-A91B-431A-81BA-289E7AE4BB3B}" type="datetimeFigureOut">
               <a:rPr lang="ru-RU" smtClean="0"/>
               <a:pPr/>
-              <a:t>19.02.2026</a:t>
+              <a:t>24.02.2026</a:t>
             </a:fld>
             <a:endParaRPr lang="ru-RU"/>
           </a:p>
@@ -1115,7 +1104,7 @@
           <a:bodyPr/>
           <a:lstStyle/>
           <a:p>
-            <a:fld id="{D52B047D-B034-4B57-AD9F-839D370ABAE6}" type="slidenum">
+            <a:fld id="{482C422A-F566-485C-8DC6-0021ABE64B94}" type="slidenum">
               <a:rPr lang="ru-RU" smtClean="0"/>
               <a:pPr/>
               <a:t>‹#›</a:t>
@@ -1357,10 +1346,10 @@
           <a:bodyPr/>
           <a:lstStyle/>
           <a:p>
-            <a:fld id="{1705624D-BBC2-4E86-AC22-75474281F825}" type="datetimeFigureOut">
+            <a:fld id="{829CC5B7-A91B-431A-81BA-289E7AE4BB3B}" type="datetimeFigureOut">
               <a:rPr lang="ru-RU" smtClean="0"/>
               <a:pPr/>
-              <a:t>19.02.2026</a:t>
+              <a:t>24.02.2026</a:t>
             </a:fld>
             <a:endParaRPr lang="ru-RU"/>
           </a:p>
@@ -1400,7 +1389,7 @@
           <a:bodyPr/>
           <a:lstStyle/>
           <a:p>
-            <a:fld id="{D52B047D-B034-4B57-AD9F-839D370ABAE6}" type="slidenum">
+            <a:fld id="{482C422A-F566-485C-8DC6-0021ABE64B94}" type="slidenum">
               <a:rPr lang="ru-RU" smtClean="0"/>
               <a:pPr/>
               <a:t>‹#›</a:t>
@@ -1776,10 +1765,10 @@
           <a:bodyPr/>
           <a:lstStyle/>
           <a:p>
-            <a:fld id="{1705624D-BBC2-4E86-AC22-75474281F825}" type="datetimeFigureOut">
+            <a:fld id="{829CC5B7-A91B-431A-81BA-289E7AE4BB3B}" type="datetimeFigureOut">
               <a:rPr lang="ru-RU" smtClean="0"/>
               <a:pPr/>
-              <a:t>19.02.2026</a:t>
+              <a:t>24.02.2026</a:t>
             </a:fld>
             <a:endParaRPr lang="ru-RU"/>
           </a:p>
@@ -1819,7 +1808,7 @@
           <a:bodyPr/>
           <a:lstStyle/>
           <a:p>
-            <a:fld id="{D52B047D-B034-4B57-AD9F-839D370ABAE6}" type="slidenum">
+            <a:fld id="{482C422A-F566-485C-8DC6-0021ABE64B94}" type="slidenum">
               <a:rPr lang="ru-RU" smtClean="0"/>
               <a:pPr/>
               <a:t>‹#›</a:t>
@@ -1891,10 +1880,10 @@
           <a:bodyPr/>
           <a:lstStyle/>
           <a:p>
-            <a:fld id="{1705624D-BBC2-4E86-AC22-75474281F825}" type="datetimeFigureOut">
+            <a:fld id="{829CC5B7-A91B-431A-81BA-289E7AE4BB3B}" type="datetimeFigureOut">
               <a:rPr lang="ru-RU" smtClean="0"/>
               <a:pPr/>
-              <a:t>19.02.2026</a:t>
+              <a:t>24.02.2026</a:t>
             </a:fld>
             <a:endParaRPr lang="ru-RU"/>
           </a:p>
@@ -1934,7 +1923,7 @@
           <a:bodyPr/>
           <a:lstStyle/>
           <a:p>
-            <a:fld id="{D52B047D-B034-4B57-AD9F-839D370ABAE6}" type="slidenum">
+            <a:fld id="{482C422A-F566-485C-8DC6-0021ABE64B94}" type="slidenum">
               <a:rPr lang="ru-RU" smtClean="0"/>
               <a:pPr/>
               <a:t>‹#›</a:t>
@@ -1983,10 +1972,10 @@
           <a:bodyPr/>
           <a:lstStyle/>
           <a:p>
-            <a:fld id="{1705624D-BBC2-4E86-AC22-75474281F825}" type="datetimeFigureOut">
+            <a:fld id="{829CC5B7-A91B-431A-81BA-289E7AE4BB3B}" type="datetimeFigureOut">
               <a:rPr lang="ru-RU" smtClean="0"/>
               <a:pPr/>
-              <a:t>19.02.2026</a:t>
+              <a:t>24.02.2026</a:t>
             </a:fld>
             <a:endParaRPr lang="ru-RU"/>
           </a:p>
@@ -2026,7 +2015,7 @@
           <a:bodyPr/>
           <a:lstStyle/>
           <a:p>
-            <a:fld id="{D52B047D-B034-4B57-AD9F-839D370ABAE6}" type="slidenum">
+            <a:fld id="{482C422A-F566-485C-8DC6-0021ABE64B94}" type="slidenum">
               <a:rPr lang="ru-RU" smtClean="0"/>
               <a:pPr/>
               <a:t>‹#›</a:t>
@@ -2257,10 +2246,10 @@
           <a:bodyPr/>
           <a:lstStyle/>
           <a:p>
-            <a:fld id="{1705624D-BBC2-4E86-AC22-75474281F825}" type="datetimeFigureOut">
+            <a:fld id="{829CC5B7-A91B-431A-81BA-289E7AE4BB3B}" type="datetimeFigureOut">
               <a:rPr lang="ru-RU" smtClean="0"/>
               <a:pPr/>
-              <a:t>19.02.2026</a:t>
+              <a:t>24.02.2026</a:t>
             </a:fld>
             <a:endParaRPr lang="ru-RU"/>
           </a:p>
@@ -2300,7 +2289,7 @@
           <a:bodyPr/>
           <a:lstStyle/>
           <a:p>
-            <a:fld id="{D52B047D-B034-4B57-AD9F-839D370ABAE6}" type="slidenum">
+            <a:fld id="{482C422A-F566-485C-8DC6-0021ABE64B94}" type="slidenum">
               <a:rPr lang="ru-RU" smtClean="0"/>
               <a:pPr/>
               <a:t>‹#›</a:t>
@@ -2507,10 +2496,10 @@
           <a:bodyPr/>
           <a:lstStyle/>
           <a:p>
-            <a:fld id="{1705624D-BBC2-4E86-AC22-75474281F825}" type="datetimeFigureOut">
+            <a:fld id="{829CC5B7-A91B-431A-81BA-289E7AE4BB3B}" type="datetimeFigureOut">
               <a:rPr lang="ru-RU" smtClean="0"/>
               <a:pPr/>
-              <a:t>19.02.2026</a:t>
+              <a:t>24.02.2026</a:t>
             </a:fld>
             <a:endParaRPr lang="ru-RU"/>
           </a:p>
@@ -2550,7 +2539,7 @@
           <a:bodyPr/>
           <a:lstStyle/>
           <a:p>
-            <a:fld id="{D52B047D-B034-4B57-AD9F-839D370ABAE6}" type="slidenum">
+            <a:fld id="{482C422A-F566-485C-8DC6-0021ABE64B94}" type="slidenum">
               <a:rPr lang="ru-RU" smtClean="0"/>
               <a:pPr/>
               <a:t>‹#›</a:t>
@@ -2717,10 +2706,10 @@
             </a:lvl1pPr>
           </a:lstStyle>
           <a:p>
-            <a:fld id="{1705624D-BBC2-4E86-AC22-75474281F825}" type="datetimeFigureOut">
+            <a:fld id="{829CC5B7-A91B-431A-81BA-289E7AE4BB3B}" type="datetimeFigureOut">
               <a:rPr lang="ru-RU" smtClean="0"/>
               <a:pPr/>
-              <a:t>19.02.2026</a:t>
+              <a:t>24.02.2026</a:t>
             </a:fld>
             <a:endParaRPr lang="ru-RU"/>
           </a:p>
@@ -2796,7 +2785,7 @@
             </a:lvl1pPr>
           </a:lstStyle>
           <a:p>
-            <a:fld id="{D52B047D-B034-4B57-AD9F-839D370ABAE6}" type="slidenum">
+            <a:fld id="{482C422A-F566-485C-8DC6-0021ABE64B94}" type="slidenum">
               <a:rPr lang="ru-RU" smtClean="0"/>
               <a:pPr/>
               <a:t>‹#›</a:t>
@@ -3103,12 +3092,14 @@
         </p:nvSpPr>
         <p:spPr/>
         <p:txBody>
-          <a:bodyPr/>
+          <a:bodyPr>
+            <a:normAutofit fontScale="90000"/>
+          </a:bodyPr>
           <a:lstStyle/>
           <a:p>
             <a:r>
               <a:rPr lang="ru-RU" dirty="0" smtClean="0"/>
-              <a:t>Базовые операторы и типы</a:t>
+              <a:t>ОБЪЕКТНО-ОРИЕНТИРОВАННОЕ ПРОГРАММИРОВАНИЕ</a:t>
             </a:r>
             <a:endParaRPr lang="ru-RU" dirty="0"/>
           </a:p>
@@ -3147,8 +3138,8 @@
         </p:nvSpPr>
         <p:spPr>
           <a:xfrm>
-            <a:off x="-3674" y="0"/>
-            <a:ext cx="9144000" cy="1754326"/>
+            <a:off x="0" y="0"/>
+            <a:ext cx="9144000" cy="1569660"/>
           </a:xfrm>
           <a:prstGeom prst="rect">
             <a:avLst/>
@@ -3162,173 +3153,53 @@
           <a:p>
             <a:pPr algn="just"/>
             <a:r>
-              <a:rPr lang="ru-RU" dirty="0">
-                <a:latin typeface="Times New Roman" panose="02020603050405020304" pitchFamily="18" charset="0"/>
-                <a:cs typeface="Times New Roman" panose="02020603050405020304" pitchFamily="18" charset="0"/>
-              </a:rPr>
-              <a:t>Условные конструкции - один из базовых компонентов многих языков программирования, которые направляют работу программы по одному из путей в зависимости от определенных условий. Одной из таких конструкций в языке программирования C# является конструкция </a:t>
-            </a:r>
-            <a:r>
-              <a:rPr lang="ru-RU" dirty="0" err="1">
-                <a:latin typeface="Times New Roman" panose="02020603050405020304" pitchFamily="18" charset="0"/>
-                <a:cs typeface="Times New Roman" panose="02020603050405020304" pitchFamily="18" charset="0"/>
-              </a:rPr>
-              <a:t>if</a:t>
-            </a:r>
-            <a:r>
-              <a:rPr lang="ru-RU" dirty="0">
-                <a:latin typeface="Times New Roman" panose="02020603050405020304" pitchFamily="18" charset="0"/>
-                <a:cs typeface="Times New Roman" panose="02020603050405020304" pitchFamily="18" charset="0"/>
-              </a:rPr>
-              <a:t>..</a:t>
-            </a:r>
-            <a:r>
-              <a:rPr lang="ru-RU" dirty="0" err="1">
-                <a:latin typeface="Times New Roman" panose="02020603050405020304" pitchFamily="18" charset="0"/>
-                <a:cs typeface="Times New Roman" panose="02020603050405020304" pitchFamily="18" charset="0"/>
-              </a:rPr>
-              <a:t>else</a:t>
-            </a:r>
-            <a:endParaRPr lang="ru-RU" dirty="0">
-              <a:latin typeface="Times New Roman" panose="02020603050405020304" pitchFamily="18" charset="0"/>
-              <a:cs typeface="Times New Roman" panose="02020603050405020304" pitchFamily="18" charset="0"/>
+              <a:rPr lang="ru-RU" sz="1600" dirty="0" smtClean="0">
+                <a:latin typeface="Times New Roman" pitchFamily="18" charset="0"/>
+                <a:cs typeface="Times New Roman" pitchFamily="18" charset="0"/>
+              </a:rPr>
+              <a:t>Если константы принадлежат только типу, то поля могут принадлежать как типу, так и экземпляру типа. Для управления принадлежностью используется ключевое слово </a:t>
+            </a:r>
+            <a:r>
+              <a:rPr lang="ru-RU" sz="1600" dirty="0" err="1" smtClean="0">
+                <a:latin typeface="Times New Roman" pitchFamily="18" charset="0"/>
+                <a:cs typeface="Times New Roman" pitchFamily="18" charset="0"/>
+              </a:rPr>
+              <a:t>static</a:t>
+            </a:r>
+            <a:r>
+              <a:rPr lang="ru-RU" sz="1600" dirty="0" smtClean="0">
+                <a:latin typeface="Times New Roman" pitchFamily="18" charset="0"/>
+                <a:cs typeface="Times New Roman" pitchFamily="18" charset="0"/>
+              </a:rPr>
+              <a:t>. Если его указать, то поле будет принадлежать типу, доступ к нему можно будет получить только через имя типа. Такие поля называют статическими.</a:t>
+            </a:r>
+          </a:p>
+          <a:p>
+            <a:pPr algn="just"/>
+            <a:r>
+              <a:rPr lang="ru-RU" sz="1600" dirty="0" smtClean="0">
+                <a:latin typeface="Times New Roman" pitchFamily="18" charset="0"/>
+                <a:cs typeface="Times New Roman" pitchFamily="18" charset="0"/>
+              </a:rPr>
+              <a:t>Важно помнить: если вы меняете значение статического поля в одном месте вашей программы, то во всех других местах, где оно используется, оно тоже изменится.</a:t>
+            </a:r>
+            <a:endParaRPr lang="ru-RU" sz="1600" dirty="0">
+              <a:latin typeface="Times New Roman" pitchFamily="18" charset="0"/>
+              <a:cs typeface="Times New Roman" pitchFamily="18" charset="0"/>
             </a:endParaRPr>
-          </a:p>
-          <a:p>
-            <a:pPr algn="just"/>
-            <a:r>
-              <a:rPr lang="ru-RU" dirty="0">
-                <a:latin typeface="Times New Roman" panose="02020603050405020304" pitchFamily="18" charset="0"/>
-                <a:cs typeface="Times New Roman" panose="02020603050405020304" pitchFamily="18" charset="0"/>
-              </a:rPr>
-              <a:t>Конструкция </a:t>
-            </a:r>
-            <a:r>
-              <a:rPr lang="ru-RU" dirty="0" err="1">
-                <a:latin typeface="Times New Roman" panose="02020603050405020304" pitchFamily="18" charset="0"/>
-                <a:cs typeface="Times New Roman" panose="02020603050405020304" pitchFamily="18" charset="0"/>
-              </a:rPr>
-              <a:t>if</a:t>
-            </a:r>
-            <a:r>
-              <a:rPr lang="ru-RU" dirty="0">
-                <a:latin typeface="Times New Roman" panose="02020603050405020304" pitchFamily="18" charset="0"/>
-                <a:cs typeface="Times New Roman" panose="02020603050405020304" pitchFamily="18" charset="0"/>
-              </a:rPr>
-              <a:t>/</a:t>
-            </a:r>
-            <a:r>
-              <a:rPr lang="ru-RU" dirty="0" err="1">
-                <a:latin typeface="Times New Roman" panose="02020603050405020304" pitchFamily="18" charset="0"/>
-                <a:cs typeface="Times New Roman" panose="02020603050405020304" pitchFamily="18" charset="0"/>
-              </a:rPr>
-              <a:t>else</a:t>
-            </a:r>
-            <a:r>
-              <a:rPr lang="ru-RU" dirty="0">
-                <a:latin typeface="Times New Roman" panose="02020603050405020304" pitchFamily="18" charset="0"/>
-                <a:cs typeface="Times New Roman" panose="02020603050405020304" pitchFamily="18" charset="0"/>
-              </a:rPr>
-              <a:t> проверяет истинность некоторого условия и в зависимости от результатов проверки выполняет определенный код.</a:t>
-            </a:r>
           </a:p>
         </p:txBody>
       </p:sp>
       <p:pic>
         <p:nvPicPr>
-          <p:cNvPr id="4" name="Рисунок 3"/>
-          <p:cNvPicPr>
-            <a:picLocks noChangeAspect="1"/>
-          </p:cNvPicPr>
-          <p:nvPr/>
-        </p:nvPicPr>
-        <p:blipFill>
-          <a:blip r:embed="rId2"/>
-          <a:stretch>
-            <a:fillRect/>
-          </a:stretch>
-        </p:blipFill>
-        <p:spPr>
-          <a:xfrm>
-            <a:off x="0" y="1785926"/>
-            <a:ext cx="5158652" cy="3430283"/>
-          </a:xfrm>
-          <a:prstGeom prst="rect">
-            <a:avLst/>
-          </a:prstGeom>
-        </p:spPr>
-      </p:pic>
-      <p:pic>
-        <p:nvPicPr>
-          <p:cNvPr id="5" name="Рисунок 4"/>
-          <p:cNvPicPr>
-            <a:picLocks noChangeAspect="1"/>
-          </p:cNvPicPr>
-          <p:nvPr/>
-        </p:nvPicPr>
-        <p:blipFill>
-          <a:blip r:embed="rId3"/>
-          <a:stretch>
-            <a:fillRect/>
-          </a:stretch>
-        </p:blipFill>
-        <p:spPr>
-          <a:xfrm>
-            <a:off x="3115761" y="5194741"/>
-            <a:ext cx="2905125" cy="1304925"/>
-          </a:xfrm>
-          <a:prstGeom prst="rect">
-            <a:avLst/>
-          </a:prstGeom>
-        </p:spPr>
-      </p:pic>
-      <p:sp>
-        <p:nvSpPr>
-          <p:cNvPr id="6" name="Прямоугольник 5"/>
-          <p:cNvSpPr/>
-          <p:nvPr/>
-        </p:nvSpPr>
-        <p:spPr>
-          <a:xfrm>
-            <a:off x="3764321" y="6488668"/>
-            <a:ext cx="1608004" cy="369332"/>
-          </a:xfrm>
-          <a:prstGeom prst="rect">
-            <a:avLst/>
-          </a:prstGeom>
-        </p:spPr>
-        <p:txBody>
-          <a:bodyPr wrap="none">
-            <a:spAutoFit/>
-          </a:bodyPr>
-          <a:lstStyle/>
-          <a:p>
-            <a:r>
-              <a:rPr lang="ru-RU" b="1" dirty="0" smtClean="0"/>
-              <a:t>Чему равно </a:t>
-            </a:r>
-            <a:r>
-              <a:rPr lang="en-US" b="1" dirty="0" smtClean="0"/>
-              <a:t>z</a:t>
-            </a:r>
-            <a:r>
-              <a:rPr lang="ru-RU" b="1" dirty="0" smtClean="0"/>
-              <a:t>?</a:t>
-            </a:r>
-            <a:endParaRPr lang="ru-RU" b="1" dirty="0"/>
-          </a:p>
-        </p:txBody>
-      </p:sp>
-      <p:pic>
-        <p:nvPicPr>
-          <p:cNvPr id="8193" name="Picture 1"/>
+          <p:cNvPr id="25602" name="Picture 2"/>
           <p:cNvPicPr>
             <a:picLocks noChangeAspect="1" noChangeArrowheads="1"/>
           </p:cNvPicPr>
           <p:nvPr/>
         </p:nvPicPr>
         <p:blipFill>
-          <a:blip r:embed="rId4"/>
+          <a:blip r:embed="rId2"/>
           <a:srcRect/>
           <a:stretch>
             <a:fillRect/>
@@ -3336,8 +3207,8 @@
         </p:blipFill>
         <p:spPr bwMode="auto">
           <a:xfrm>
-            <a:off x="5214942" y="2000240"/>
-            <a:ext cx="3929057" cy="3038475"/>
+            <a:off x="2714612" y="1500174"/>
+            <a:ext cx="3681407" cy="1891725"/>
           </a:xfrm>
           <a:prstGeom prst="rect">
             <a:avLst/>
@@ -3352,12 +3223,185 @@
           <a:effectLst/>
         </p:spPr>
       </p:pic>
+      <p:sp>
+        <p:nvSpPr>
+          <p:cNvPr id="5" name="Прямоугольник 4"/>
+          <p:cNvSpPr/>
+          <p:nvPr/>
+        </p:nvSpPr>
+        <p:spPr>
+          <a:xfrm>
+            <a:off x="0" y="3318570"/>
+            <a:ext cx="4572000" cy="3539430"/>
+          </a:xfrm>
+          <a:prstGeom prst="rect">
+            <a:avLst/>
+          </a:prstGeom>
+        </p:spPr>
+        <p:txBody>
+          <a:bodyPr>
+            <a:spAutoFit/>
+          </a:bodyPr>
+          <a:lstStyle/>
+          <a:p>
+            <a:pPr algn="just"/>
+            <a:r>
+              <a:rPr lang="ru-RU" sz="1600" dirty="0" smtClean="0">
+                <a:latin typeface="Times New Roman" pitchFamily="18" charset="0"/>
+                <a:cs typeface="Times New Roman" pitchFamily="18" charset="0"/>
+              </a:rPr>
+              <a:t>В C# ключевое слово </a:t>
+            </a:r>
+            <a:r>
+              <a:rPr lang="ru-RU" sz="1600" dirty="0" err="1" smtClean="0">
+                <a:latin typeface="Times New Roman" pitchFamily="18" charset="0"/>
+                <a:cs typeface="Times New Roman" pitchFamily="18" charset="0"/>
+              </a:rPr>
+              <a:t>readonly</a:t>
+            </a:r>
+            <a:r>
+              <a:rPr lang="ru-RU" sz="1600" dirty="0" smtClean="0">
+                <a:latin typeface="Times New Roman" pitchFamily="18" charset="0"/>
+                <a:cs typeface="Times New Roman" pitchFamily="18" charset="0"/>
+              </a:rPr>
+              <a:t> применяется к полям класса и означает: поле можно инициализировать только при объявлении или в конструкторе, а после — оно становится неизменяемым.</a:t>
+            </a:r>
+          </a:p>
+          <a:p>
+            <a:pPr algn="just"/>
+            <a:r>
+              <a:rPr lang="ru-RU" sz="1600" dirty="0" smtClean="0">
+                <a:latin typeface="Times New Roman" pitchFamily="18" charset="0"/>
+                <a:cs typeface="Times New Roman" pitchFamily="18" charset="0"/>
+              </a:rPr>
+              <a:t>Основные правила</a:t>
+            </a:r>
+          </a:p>
+          <a:p>
+            <a:pPr algn="just"/>
+            <a:r>
+              <a:rPr lang="ru-RU" sz="1600" dirty="0" err="1" smtClean="0">
+                <a:latin typeface="Times New Roman" pitchFamily="18" charset="0"/>
+                <a:cs typeface="Times New Roman" pitchFamily="18" charset="0"/>
+              </a:rPr>
+              <a:t>readonly‑поле</a:t>
+            </a:r>
+            <a:r>
+              <a:rPr lang="ru-RU" sz="1600" dirty="0" smtClean="0">
+                <a:latin typeface="Times New Roman" pitchFamily="18" charset="0"/>
+                <a:cs typeface="Times New Roman" pitchFamily="18" charset="0"/>
+              </a:rPr>
+              <a:t> можно задать:</a:t>
+            </a:r>
+          </a:p>
+          <a:p>
+            <a:pPr algn="just"/>
+            <a:r>
+              <a:rPr lang="ru-RU" sz="1600" dirty="0" smtClean="0">
+                <a:latin typeface="Times New Roman" pitchFamily="18" charset="0"/>
+                <a:cs typeface="Times New Roman" pitchFamily="18" charset="0"/>
+              </a:rPr>
+              <a:t>прямо при объявлении;</a:t>
+            </a:r>
+          </a:p>
+          <a:p>
+            <a:pPr algn="just"/>
+            <a:r>
+              <a:rPr lang="ru-RU" sz="1600" dirty="0" smtClean="0">
+                <a:latin typeface="Times New Roman" pitchFamily="18" charset="0"/>
+                <a:cs typeface="Times New Roman" pitchFamily="18" charset="0"/>
+              </a:rPr>
+              <a:t>в конструкторе класса (в том числе в блоке инициализации);</a:t>
+            </a:r>
+          </a:p>
+          <a:p>
+            <a:pPr algn="just"/>
+            <a:r>
+              <a:rPr lang="ru-RU" sz="1600" dirty="0" smtClean="0">
+                <a:latin typeface="Times New Roman" pitchFamily="18" charset="0"/>
+                <a:cs typeface="Times New Roman" pitchFamily="18" charset="0"/>
+              </a:rPr>
+              <a:t>после выхода из конструктора изменить значение нельзя;</a:t>
+            </a:r>
+          </a:p>
+          <a:p>
+            <a:pPr algn="just"/>
+            <a:r>
+              <a:rPr lang="ru-RU" sz="1600" dirty="0" smtClean="0">
+                <a:latin typeface="Times New Roman" pitchFamily="18" charset="0"/>
+                <a:cs typeface="Times New Roman" pitchFamily="18" charset="0"/>
+              </a:rPr>
+              <a:t>действует на уровне экземпляра (для </a:t>
+            </a:r>
+            <a:r>
+              <a:rPr lang="ru-RU" sz="1600" dirty="0" err="1" smtClean="0">
+                <a:latin typeface="Times New Roman" pitchFamily="18" charset="0"/>
+                <a:cs typeface="Times New Roman" pitchFamily="18" charset="0"/>
+              </a:rPr>
+              <a:t>static</a:t>
+            </a:r>
+            <a:r>
+              <a:rPr lang="ru-RU" sz="1600" dirty="0" smtClean="0">
+                <a:latin typeface="Times New Roman" pitchFamily="18" charset="0"/>
+                <a:cs typeface="Times New Roman" pitchFamily="18" charset="0"/>
+              </a:rPr>
+              <a:t> </a:t>
+            </a:r>
+            <a:r>
+              <a:rPr lang="ru-RU" sz="1600" dirty="0" err="1" smtClean="0">
+                <a:latin typeface="Times New Roman" pitchFamily="18" charset="0"/>
+                <a:cs typeface="Times New Roman" pitchFamily="18" charset="0"/>
+              </a:rPr>
+              <a:t>readonly</a:t>
+            </a:r>
+            <a:r>
+              <a:rPr lang="ru-RU" sz="1600" dirty="0" smtClean="0">
+                <a:latin typeface="Times New Roman" pitchFamily="18" charset="0"/>
+                <a:cs typeface="Times New Roman" pitchFamily="18" charset="0"/>
+              </a:rPr>
+              <a:t> — на уровне типа).</a:t>
+            </a:r>
+            <a:endParaRPr lang="ru-RU" sz="1600" dirty="0">
+              <a:latin typeface="Times New Roman" pitchFamily="18" charset="0"/>
+              <a:cs typeface="Times New Roman" pitchFamily="18" charset="0"/>
+            </a:endParaRPr>
+          </a:p>
+        </p:txBody>
+      </p:sp>
+      <p:pic>
+        <p:nvPicPr>
+          <p:cNvPr id="25603" name="Picture 3"/>
+          <p:cNvPicPr>
+            <a:picLocks noChangeAspect="1" noChangeArrowheads="1"/>
+          </p:cNvPicPr>
+          <p:nvPr/>
+        </p:nvPicPr>
+        <p:blipFill>
+          <a:blip r:embed="rId3"/>
+          <a:srcRect/>
+          <a:stretch>
+            <a:fillRect/>
+          </a:stretch>
+        </p:blipFill>
+        <p:spPr bwMode="auto">
+          <a:xfrm>
+            <a:off x="4643438" y="3429000"/>
+            <a:ext cx="4500562" cy="3429000"/>
+          </a:xfrm>
+          <a:prstGeom prst="rect">
+            <a:avLst/>
+          </a:prstGeom>
+          <a:noFill/>
+          <a:ln w="9525">
+            <a:noFill/>
+            <a:miter lim="800000"/>
+            <a:headEnd/>
+            <a:tailEnd/>
+          </a:ln>
+          <a:effectLst/>
+        </p:spPr>
+      </p:pic>
     </p:spTree>
-    <p:extLst>
-      <p:ext uri="{BB962C8B-B14F-4D97-AF65-F5344CB8AC3E}">
-        <p14:creationId xmlns="" xmlns:p14="http://schemas.microsoft.com/office/powerpoint/2010/main" val="115848474"/>
-      </p:ext>
-    </p:extLst>
   </p:cSld>
   <p:clrMapOvr>
     <a:masterClrMapping/>
@@ -3382,328 +3426,42 @@
           <a:chExt cx="0" cy="0"/>
         </a:xfrm>
       </p:grpSpPr>
-      <p:sp>
-        <p:nvSpPr>
-          <p:cNvPr id="4" name="Прямоугольник 3"/>
-          <p:cNvSpPr/>
-          <p:nvPr/>
-        </p:nvSpPr>
-        <p:spPr>
-          <a:xfrm>
-            <a:off x="0" y="-2250"/>
-            <a:ext cx="9144000" cy="2308324"/>
-          </a:xfrm>
-          <a:prstGeom prst="rect">
-            <a:avLst/>
-          </a:prstGeom>
-        </p:spPr>
-        <p:txBody>
-          <a:bodyPr wrap="square">
-            <a:spAutoFit/>
-          </a:bodyPr>
-          <a:lstStyle/>
-          <a:p>
-            <a:pPr algn="just"/>
-            <a:r>
-              <a:rPr lang="ru-RU" dirty="0" err="1">
-                <a:latin typeface="Times New Roman" panose="02020603050405020304" pitchFamily="18" charset="0"/>
-                <a:cs typeface="Times New Roman" panose="02020603050405020304" pitchFamily="18" charset="0"/>
-              </a:rPr>
-              <a:t>Pattern</a:t>
-            </a:r>
-            <a:r>
-              <a:rPr lang="ru-RU" dirty="0">
-                <a:latin typeface="Times New Roman" panose="02020603050405020304" pitchFamily="18" charset="0"/>
-                <a:cs typeface="Times New Roman" panose="02020603050405020304" pitchFamily="18" charset="0"/>
-              </a:rPr>
-              <a:t> </a:t>
-            </a:r>
-            <a:r>
-              <a:rPr lang="ru-RU" dirty="0" err="1">
-                <a:latin typeface="Times New Roman" panose="02020603050405020304" pitchFamily="18" charset="0"/>
-                <a:cs typeface="Times New Roman" panose="02020603050405020304" pitchFamily="18" charset="0"/>
-              </a:rPr>
-              <a:t>matching</a:t>
-            </a:r>
-            <a:r>
-              <a:rPr lang="ru-RU" dirty="0">
-                <a:latin typeface="Times New Roman" panose="02020603050405020304" pitchFamily="18" charset="0"/>
-                <a:cs typeface="Times New Roman" panose="02020603050405020304" pitchFamily="18" charset="0"/>
-              </a:rPr>
-              <a:t> (сопоставление с образцом) — это способ проверять не просто значения, а структуру и свойства данных. В контексте </a:t>
-            </a:r>
-            <a:r>
-              <a:rPr lang="ru-RU" dirty="0" err="1">
-                <a:latin typeface="Times New Roman" panose="02020603050405020304" pitchFamily="18" charset="0"/>
-                <a:cs typeface="Times New Roman" panose="02020603050405020304" pitchFamily="18" charset="0"/>
-              </a:rPr>
-              <a:t>switch</a:t>
-            </a:r>
-            <a:r>
-              <a:rPr lang="ru-RU" dirty="0">
-                <a:latin typeface="Times New Roman" panose="02020603050405020304" pitchFamily="18" charset="0"/>
-                <a:cs typeface="Times New Roman" panose="02020603050405020304" pitchFamily="18" charset="0"/>
-              </a:rPr>
-              <a:t> — это расширенная версия привычного оператора </a:t>
-            </a:r>
-            <a:r>
-              <a:rPr lang="ru-RU" dirty="0" err="1">
-                <a:latin typeface="Times New Roman" panose="02020603050405020304" pitchFamily="18" charset="0"/>
-                <a:cs typeface="Times New Roman" panose="02020603050405020304" pitchFamily="18" charset="0"/>
-              </a:rPr>
-              <a:t>switch</a:t>
-            </a:r>
-            <a:r>
-              <a:rPr lang="ru-RU" dirty="0">
-                <a:latin typeface="Times New Roman" panose="02020603050405020304" pitchFamily="18" charset="0"/>
-                <a:cs typeface="Times New Roman" panose="02020603050405020304" pitchFamily="18" charset="0"/>
-              </a:rPr>
-              <a:t>, которая умеет:</a:t>
-            </a:r>
-          </a:p>
-          <a:p>
-            <a:pPr algn="just"/>
-            <a:r>
-              <a:rPr lang="ru-RU" dirty="0">
-                <a:latin typeface="Times New Roman" panose="02020603050405020304" pitchFamily="18" charset="0"/>
-                <a:cs typeface="Times New Roman" panose="02020603050405020304" pitchFamily="18" charset="0"/>
-              </a:rPr>
-              <a:t>    проверять тип объекта;</a:t>
-            </a:r>
-          </a:p>
-          <a:p>
-            <a:pPr algn="just"/>
-            <a:r>
-              <a:rPr lang="ru-RU" dirty="0">
-                <a:latin typeface="Times New Roman" panose="02020603050405020304" pitchFamily="18" charset="0"/>
-                <a:cs typeface="Times New Roman" panose="02020603050405020304" pitchFamily="18" charset="0"/>
-              </a:rPr>
-              <a:t>    извлекать из него данные;</a:t>
-            </a:r>
-          </a:p>
-          <a:p>
-            <a:pPr algn="just"/>
-            <a:r>
-              <a:rPr lang="ru-RU" dirty="0">
-                <a:latin typeface="Times New Roman" panose="02020603050405020304" pitchFamily="18" charset="0"/>
-                <a:cs typeface="Times New Roman" panose="02020603050405020304" pitchFamily="18" charset="0"/>
-              </a:rPr>
-              <a:t>    проверять значения </a:t>
-            </a:r>
-            <a:r>
-              <a:rPr lang="ru-RU" dirty="0" smtClean="0">
-                <a:latin typeface="Times New Roman" panose="02020603050405020304" pitchFamily="18" charset="0"/>
-                <a:cs typeface="Times New Roman" panose="02020603050405020304" pitchFamily="18" charset="0"/>
-              </a:rPr>
-              <a:t>свойств</a:t>
-            </a:r>
-          </a:p>
-          <a:p>
-            <a:pPr algn="just"/>
-            <a:r>
-              <a:rPr lang="ru-RU" dirty="0" smtClean="0">
-                <a:latin typeface="Times New Roman" panose="02020603050405020304" pitchFamily="18" charset="0"/>
-                <a:cs typeface="Times New Roman" panose="02020603050405020304" pitchFamily="18" charset="0"/>
-              </a:rPr>
-              <a:t>Проще </a:t>
-            </a:r>
-            <a:r>
-              <a:rPr lang="ru-RU" dirty="0">
-                <a:latin typeface="Times New Roman" panose="02020603050405020304" pitchFamily="18" charset="0"/>
-                <a:cs typeface="Times New Roman" panose="02020603050405020304" pitchFamily="18" charset="0"/>
-              </a:rPr>
-              <a:t>говоря, это как «умный переключатель», который понимает не только «если равно 5», но и «если это строка длиной больше </a:t>
-            </a:r>
-            <a:r>
-              <a:rPr lang="ru-RU" dirty="0" smtClean="0">
-                <a:latin typeface="Times New Roman" panose="02020603050405020304" pitchFamily="18" charset="0"/>
-                <a:cs typeface="Times New Roman" panose="02020603050405020304" pitchFamily="18" charset="0"/>
-              </a:rPr>
-              <a:t>10».</a:t>
-            </a:r>
-            <a:endParaRPr lang="ru-RU" dirty="0">
-              <a:latin typeface="Times New Roman" panose="02020603050405020304" pitchFamily="18" charset="0"/>
-              <a:cs typeface="Times New Roman" panose="02020603050405020304" pitchFamily="18" charset="0"/>
-            </a:endParaRPr>
-          </a:p>
-        </p:txBody>
-      </p:sp>
       <p:pic>
         <p:nvPicPr>
-          <p:cNvPr id="7" name="Рисунок 6"/>
+          <p:cNvPr id="26626" name="Picture 2"/>
           <p:cNvPicPr>
-            <a:picLocks noChangeAspect="1"/>
+            <a:picLocks noChangeAspect="1" noChangeArrowheads="1"/>
           </p:cNvPicPr>
           <p:nvPr/>
         </p:nvPicPr>
         <p:blipFill>
           <a:blip r:embed="rId2"/>
+          <a:srcRect/>
           <a:stretch>
             <a:fillRect/>
           </a:stretch>
         </p:blipFill>
-        <p:spPr>
-          <a:xfrm>
-            <a:off x="714348" y="2357430"/>
-            <a:ext cx="3119292" cy="2362073"/>
+        <p:spPr bwMode="auto">
+          <a:xfrm>
+            <a:off x="0" y="2071679"/>
+            <a:ext cx="9144000" cy="3143272"/>
           </a:xfrm>
           <a:prstGeom prst="rect">
             <a:avLst/>
           </a:prstGeom>
+          <a:noFill/>
+          <a:ln w="9525">
+            <a:noFill/>
+            <a:miter lim="800000"/>
+            <a:headEnd/>
+            <a:tailEnd/>
+          </a:ln>
+          <a:effectLst/>
         </p:spPr>
       </p:pic>
-      <p:sp>
-        <p:nvSpPr>
-          <p:cNvPr id="8" name="Прямоугольник 7"/>
-          <p:cNvSpPr/>
-          <p:nvPr/>
-        </p:nvSpPr>
-        <p:spPr>
-          <a:xfrm>
-            <a:off x="4572000" y="2357430"/>
-            <a:ext cx="4572000" cy="2308324"/>
-          </a:xfrm>
-          <a:prstGeom prst="rect">
-            <a:avLst/>
-          </a:prstGeom>
-        </p:spPr>
-        <p:txBody>
-          <a:bodyPr>
-            <a:spAutoFit/>
-          </a:bodyPr>
-          <a:lstStyle/>
-          <a:p>
-            <a:pPr algn="just"/>
-            <a:r>
-              <a:rPr lang="ru-RU" dirty="0" err="1">
-                <a:latin typeface="Times New Roman" panose="02020603050405020304" pitchFamily="18" charset="0"/>
-                <a:cs typeface="Times New Roman" panose="02020603050405020304" pitchFamily="18" charset="0"/>
-              </a:rPr>
-              <a:t>Pattern</a:t>
-            </a:r>
-            <a:r>
-              <a:rPr lang="ru-RU" dirty="0">
-                <a:latin typeface="Times New Roman" panose="02020603050405020304" pitchFamily="18" charset="0"/>
-                <a:cs typeface="Times New Roman" panose="02020603050405020304" pitchFamily="18" charset="0"/>
-              </a:rPr>
-              <a:t> </a:t>
-            </a:r>
-            <a:r>
-              <a:rPr lang="ru-RU" dirty="0" err="1">
-                <a:latin typeface="Times New Roman" panose="02020603050405020304" pitchFamily="18" charset="0"/>
-                <a:cs typeface="Times New Roman" panose="02020603050405020304" pitchFamily="18" charset="0"/>
-              </a:rPr>
-              <a:t>matching</a:t>
-            </a:r>
-            <a:r>
-              <a:rPr lang="ru-RU" dirty="0">
-                <a:latin typeface="Times New Roman" panose="02020603050405020304" pitchFamily="18" charset="0"/>
-                <a:cs typeface="Times New Roman" panose="02020603050405020304" pitchFamily="18" charset="0"/>
-              </a:rPr>
-              <a:t> в </a:t>
-            </a:r>
-            <a:r>
-              <a:rPr lang="ru-RU" dirty="0" err="1">
-                <a:latin typeface="Times New Roman" panose="02020603050405020304" pitchFamily="18" charset="0"/>
-                <a:cs typeface="Times New Roman" panose="02020603050405020304" pitchFamily="18" charset="0"/>
-              </a:rPr>
-              <a:t>switch</a:t>
-            </a:r>
-            <a:r>
-              <a:rPr lang="ru-RU" dirty="0">
-                <a:latin typeface="Times New Roman" panose="02020603050405020304" pitchFamily="18" charset="0"/>
-                <a:cs typeface="Times New Roman" panose="02020603050405020304" pitchFamily="18" charset="0"/>
-              </a:rPr>
-              <a:t> делает код:</a:t>
-            </a:r>
-          </a:p>
-          <a:p>
-            <a:pPr algn="just"/>
-            <a:r>
-              <a:rPr lang="ru-RU" dirty="0">
-                <a:latin typeface="Times New Roman" panose="02020603050405020304" pitchFamily="18" charset="0"/>
-                <a:cs typeface="Times New Roman" panose="02020603050405020304" pitchFamily="18" charset="0"/>
-              </a:rPr>
-              <a:t>    короче — заменяет длинные цепочки </a:t>
-            </a:r>
-            <a:r>
-              <a:rPr lang="ru-RU" dirty="0" err="1">
-                <a:latin typeface="Times New Roman" panose="02020603050405020304" pitchFamily="18" charset="0"/>
-                <a:cs typeface="Times New Roman" panose="02020603050405020304" pitchFamily="18" charset="0"/>
-              </a:rPr>
-              <a:t>if‑else</a:t>
-            </a:r>
-            <a:r>
-              <a:rPr lang="ru-RU" dirty="0">
-                <a:latin typeface="Times New Roman" panose="02020603050405020304" pitchFamily="18" charset="0"/>
-                <a:cs typeface="Times New Roman" panose="02020603050405020304" pitchFamily="18" charset="0"/>
-              </a:rPr>
-              <a:t>;</a:t>
-            </a:r>
-          </a:p>
-          <a:p>
-            <a:pPr algn="just"/>
-            <a:r>
-              <a:rPr lang="ru-RU" dirty="0">
-                <a:latin typeface="Times New Roman" panose="02020603050405020304" pitchFamily="18" charset="0"/>
-                <a:cs typeface="Times New Roman" panose="02020603050405020304" pitchFamily="18" charset="0"/>
-              </a:rPr>
-              <a:t>    </a:t>
-            </a:r>
-            <a:r>
-              <a:rPr lang="ru-RU" dirty="0" err="1">
-                <a:latin typeface="Times New Roman" panose="02020603050405020304" pitchFamily="18" charset="0"/>
-                <a:cs typeface="Times New Roman" panose="02020603050405020304" pitchFamily="18" charset="0"/>
-              </a:rPr>
-              <a:t>читаемее</a:t>
-            </a:r>
-            <a:r>
-              <a:rPr lang="ru-RU" dirty="0">
-                <a:latin typeface="Times New Roman" panose="02020603050405020304" pitchFamily="18" charset="0"/>
-                <a:cs typeface="Times New Roman" panose="02020603050405020304" pitchFamily="18" charset="0"/>
-              </a:rPr>
-              <a:t> — логика видна сразу;</a:t>
-            </a:r>
-          </a:p>
-          <a:p>
-            <a:pPr algn="just"/>
-            <a:r>
-              <a:rPr lang="ru-RU" dirty="0">
-                <a:latin typeface="Times New Roman" panose="02020603050405020304" pitchFamily="18" charset="0"/>
-                <a:cs typeface="Times New Roman" panose="02020603050405020304" pitchFamily="18" charset="0"/>
-              </a:rPr>
-              <a:t>    безопаснее — меньше проверок на </a:t>
-            </a:r>
-            <a:r>
-              <a:rPr lang="ru-RU" dirty="0" err="1">
-                <a:latin typeface="Times New Roman" panose="02020603050405020304" pitchFamily="18" charset="0"/>
-                <a:cs typeface="Times New Roman" panose="02020603050405020304" pitchFamily="18" charset="0"/>
-              </a:rPr>
-              <a:t>null</a:t>
-            </a:r>
-            <a:r>
-              <a:rPr lang="ru-RU" dirty="0">
-                <a:latin typeface="Times New Roman" panose="02020603050405020304" pitchFamily="18" charset="0"/>
-                <a:cs typeface="Times New Roman" panose="02020603050405020304" pitchFamily="18" charset="0"/>
-              </a:rPr>
-              <a:t> и приведение типов;</a:t>
-            </a:r>
-          </a:p>
-          <a:p>
-            <a:pPr algn="just"/>
-            <a:r>
-              <a:rPr lang="ru-RU" dirty="0">
-                <a:latin typeface="Times New Roman" panose="02020603050405020304" pitchFamily="18" charset="0"/>
-                <a:cs typeface="Times New Roman" panose="02020603050405020304" pitchFamily="18" charset="0"/>
-              </a:rPr>
-              <a:t>    гибче — можно проверять сложные условия в одной строке.</a:t>
-            </a:r>
-          </a:p>
-        </p:txBody>
-      </p:sp>
       <p:pic>
         <p:nvPicPr>
-          <p:cNvPr id="5" name="Picture 2"/>
+          <p:cNvPr id="26627" name="Picture 3"/>
           <p:cNvPicPr>
             <a:picLocks noChangeAspect="1" noChangeArrowheads="1"/>
           </p:cNvPicPr>
@@ -3718,8 +3476,8 @@
         </p:blipFill>
         <p:spPr bwMode="auto">
           <a:xfrm>
-            <a:off x="285720" y="4786323"/>
-            <a:ext cx="8582025" cy="1571636"/>
+            <a:off x="0" y="0"/>
+            <a:ext cx="9144000" cy="2085975"/>
           </a:xfrm>
           <a:prstGeom prst="rect">
             <a:avLst/>
@@ -3734,6 +3492,72 @@
           <a:effectLst/>
         </p:spPr>
       </p:pic>
+      <p:pic>
+        <p:nvPicPr>
+          <p:cNvPr id="26628" name="Picture 4"/>
+          <p:cNvPicPr>
+            <a:picLocks noChangeAspect="1" noChangeArrowheads="1"/>
+          </p:cNvPicPr>
+          <p:nvPr/>
+        </p:nvPicPr>
+        <p:blipFill>
+          <a:blip r:embed="rId4"/>
+          <a:srcRect/>
+          <a:stretch>
+            <a:fillRect/>
+          </a:stretch>
+        </p:blipFill>
+        <p:spPr bwMode="auto">
+          <a:xfrm>
+            <a:off x="214282" y="5143512"/>
+            <a:ext cx="4943475" cy="1190625"/>
+          </a:xfrm>
+          <a:prstGeom prst="rect">
+            <a:avLst/>
+          </a:prstGeom>
+          <a:noFill/>
+          <a:ln w="9525">
+            <a:noFill/>
+            <a:miter lim="800000"/>
+            <a:headEnd/>
+            <a:tailEnd/>
+          </a:ln>
+          <a:effectLst/>
+        </p:spPr>
+      </p:pic>
+      <p:pic>
+        <p:nvPicPr>
+          <p:cNvPr id="26629" name="Picture 5"/>
+          <p:cNvPicPr>
+            <a:picLocks noChangeAspect="1" noChangeArrowheads="1"/>
+          </p:cNvPicPr>
+          <p:nvPr/>
+        </p:nvPicPr>
+        <p:blipFill>
+          <a:blip r:embed="rId5"/>
+          <a:srcRect/>
+          <a:stretch>
+            <a:fillRect/>
+          </a:stretch>
+        </p:blipFill>
+        <p:spPr bwMode="auto">
+          <a:xfrm>
+            <a:off x="5572132" y="4971793"/>
+            <a:ext cx="2557455" cy="1886207"/>
+          </a:xfrm>
+          <a:prstGeom prst="rect">
+            <a:avLst/>
+          </a:prstGeom>
+          <a:noFill/>
+          <a:ln w="9525">
+            <a:noFill/>
+            <a:miter lim="800000"/>
+            <a:headEnd/>
+            <a:tailEnd/>
+          </a:ln>
+          <a:effectLst/>
+        </p:spPr>
+      </p:pic>
       <p:sp>
         <p:nvSpPr>
           <p:cNvPr id="6" name="Прямоугольник 5"/>
@@ -3742,82 +3566,25 @@
         </p:nvSpPr>
         <p:spPr>
           <a:xfrm>
-            <a:off x="0" y="6211669"/>
-            <a:ext cx="9144000" cy="646331"/>
+            <a:off x="1571604" y="6286520"/>
+            <a:ext cx="2252283" cy="369332"/>
           </a:xfrm>
           <a:prstGeom prst="rect">
             <a:avLst/>
           </a:prstGeom>
         </p:spPr>
         <p:txBody>
-          <a:bodyPr wrap="square">
+          <a:bodyPr wrap="none">
             <a:spAutoFit/>
           </a:bodyPr>
           <a:lstStyle/>
           <a:p>
-            <a:pPr algn="just"/>
             <a:r>
               <a:rPr lang="ru-RU" dirty="0" smtClean="0">
                 <a:latin typeface="Times New Roman" pitchFamily="18" charset="0"/>
                 <a:cs typeface="Times New Roman" pitchFamily="18" charset="0"/>
               </a:rPr>
-              <a:t>В операторе </a:t>
-            </a:r>
-            <a:r>
-              <a:rPr lang="ru-RU" dirty="0" err="1" smtClean="0">
-                <a:latin typeface="Times New Roman" pitchFamily="18" charset="0"/>
-                <a:cs typeface="Times New Roman" pitchFamily="18" charset="0"/>
-              </a:rPr>
-              <a:t>if</a:t>
-            </a:r>
-            <a:r>
-              <a:rPr lang="ru-RU" dirty="0" smtClean="0">
-                <a:latin typeface="Times New Roman" pitchFamily="18" charset="0"/>
-                <a:cs typeface="Times New Roman" pitchFamily="18" charset="0"/>
-              </a:rPr>
-              <a:t> из возможностей </a:t>
-            </a:r>
-            <a:r>
-              <a:rPr lang="ru-RU" dirty="0" err="1" smtClean="0">
-                <a:latin typeface="Times New Roman" pitchFamily="18" charset="0"/>
-                <a:cs typeface="Times New Roman" pitchFamily="18" charset="0"/>
-              </a:rPr>
-              <a:t>pattern</a:t>
-            </a:r>
-            <a:r>
-              <a:rPr lang="ru-RU" dirty="0" smtClean="0">
-                <a:latin typeface="Times New Roman" pitchFamily="18" charset="0"/>
-                <a:cs typeface="Times New Roman" pitchFamily="18" charset="0"/>
-              </a:rPr>
-              <a:t> </a:t>
-            </a:r>
-            <a:r>
-              <a:rPr lang="ru-RU" dirty="0" err="1" smtClean="0">
-                <a:latin typeface="Times New Roman" pitchFamily="18" charset="0"/>
-                <a:cs typeface="Times New Roman" pitchFamily="18" charset="0"/>
-              </a:rPr>
-              <a:t>matching'а</a:t>
-            </a:r>
-            <a:r>
-              <a:rPr lang="ru-RU" dirty="0" smtClean="0">
-                <a:latin typeface="Times New Roman" pitchFamily="18" charset="0"/>
-                <a:cs typeface="Times New Roman" pitchFamily="18" charset="0"/>
-              </a:rPr>
-              <a:t> чаще всего применяются is-выражения (выражения, с оператором </a:t>
-            </a:r>
-            <a:r>
-              <a:rPr lang="ru-RU" dirty="0" err="1" smtClean="0">
-                <a:latin typeface="Times New Roman" pitchFamily="18" charset="0"/>
-                <a:cs typeface="Times New Roman" pitchFamily="18" charset="0"/>
-              </a:rPr>
-              <a:t>is</a:t>
-            </a:r>
-            <a:r>
-              <a:rPr lang="ru-RU" dirty="0" smtClean="0">
-                <a:latin typeface="Times New Roman" pitchFamily="18" charset="0"/>
-                <a:cs typeface="Times New Roman" pitchFamily="18" charset="0"/>
-              </a:rPr>
-              <a:t>).</a:t>
+              <a:t>Методы расширения</a:t>
             </a:r>
             <a:endParaRPr lang="ru-RU" dirty="0">
               <a:latin typeface="Times New Roman" pitchFamily="18" charset="0"/>
@@ -3827,11 +3594,6 @@
         </p:txBody>
       </p:sp>
     </p:spTree>
-    <p:extLst>
-      <p:ext uri="{BB962C8B-B14F-4D97-AF65-F5344CB8AC3E}">
-        <p14:creationId xmlns="" xmlns:p14="http://schemas.microsoft.com/office/powerpoint/2010/main" val="9482386"/>
-      </p:ext>
-    </p:extLst>
   </p:cSld>
   <p:clrMapOvr>
     <a:masterClrMapping/>
@@ -3858,232 +3620,104 @@
       </p:grpSpPr>
       <p:pic>
         <p:nvPicPr>
-          <p:cNvPr id="3" name="Рисунок 2"/>
+          <p:cNvPr id="27650" name="Picture 2"/>
           <p:cNvPicPr>
-            <a:picLocks noChangeAspect="1"/>
+            <a:picLocks noChangeAspect="1" noChangeArrowheads="1"/>
           </p:cNvPicPr>
           <p:nvPr/>
         </p:nvPicPr>
         <p:blipFill>
           <a:blip r:embed="rId2"/>
+          <a:srcRect/>
           <a:stretch>
             <a:fillRect/>
           </a:stretch>
         </p:blipFill>
-        <p:spPr>
-          <a:xfrm>
-            <a:off x="179512" y="260648"/>
-            <a:ext cx="4572000" cy="1323975"/>
+        <p:spPr bwMode="auto">
+          <a:xfrm>
+            <a:off x="1357290" y="0"/>
+            <a:ext cx="5823979" cy="3071810"/>
           </a:xfrm>
           <a:prstGeom prst="rect">
             <a:avLst/>
           </a:prstGeom>
+          <a:noFill/>
+          <a:ln w="9525">
+            <a:noFill/>
+            <a:miter lim="800000"/>
+            <a:headEnd/>
+            <a:tailEnd/>
+          </a:ln>
+          <a:effectLst/>
         </p:spPr>
       </p:pic>
       <p:pic>
         <p:nvPicPr>
-          <p:cNvPr id="4" name="Рисунок 3"/>
+          <p:cNvPr id="27653" name="Picture 5"/>
           <p:cNvPicPr>
-            <a:picLocks noChangeAspect="1"/>
+            <a:picLocks noChangeAspect="1" noChangeArrowheads="1"/>
           </p:cNvPicPr>
           <p:nvPr/>
         </p:nvPicPr>
         <p:blipFill>
           <a:blip r:embed="rId3"/>
+          <a:srcRect/>
           <a:stretch>
             <a:fillRect/>
           </a:stretch>
         </p:blipFill>
-        <p:spPr>
-          <a:xfrm>
-            <a:off x="6084168" y="260648"/>
-            <a:ext cx="2447925" cy="1857375"/>
+        <p:spPr bwMode="auto">
+          <a:xfrm>
+            <a:off x="0" y="3322522"/>
+            <a:ext cx="5572164" cy="3535478"/>
           </a:xfrm>
           <a:prstGeom prst="rect">
             <a:avLst/>
           </a:prstGeom>
+          <a:noFill/>
+          <a:ln w="9525">
+            <a:noFill/>
+            <a:miter lim="800000"/>
+            <a:headEnd/>
+            <a:tailEnd/>
+          </a:ln>
+          <a:effectLst/>
         </p:spPr>
       </p:pic>
       <p:pic>
         <p:nvPicPr>
-          <p:cNvPr id="5" name="Рисунок 4"/>
+          <p:cNvPr id="27651" name="Picture 3"/>
           <p:cNvPicPr>
-            <a:picLocks noChangeAspect="1"/>
+            <a:picLocks noChangeAspect="1" noChangeArrowheads="1"/>
           </p:cNvPicPr>
           <p:nvPr/>
         </p:nvPicPr>
         <p:blipFill>
           <a:blip r:embed="rId4"/>
+          <a:srcRect/>
           <a:stretch>
             <a:fillRect/>
           </a:stretch>
         </p:blipFill>
-        <p:spPr>
-          <a:xfrm>
-            <a:off x="169224" y="2060847"/>
-            <a:ext cx="3394664" cy="2405667"/>
+        <p:spPr bwMode="auto">
+          <a:xfrm>
+            <a:off x="3571868" y="4357694"/>
+            <a:ext cx="5572132" cy="2032072"/>
           </a:xfrm>
           <a:prstGeom prst="rect">
             <a:avLst/>
           </a:prstGeom>
+          <a:noFill/>
+          <a:ln w="9525">
+            <a:noFill/>
+            <a:miter lim="800000"/>
+            <a:headEnd/>
+            <a:tailEnd/>
+          </a:ln>
+          <a:effectLst/>
         </p:spPr>
       </p:pic>
-      <p:pic>
-        <p:nvPicPr>
-          <p:cNvPr id="6" name="Рисунок 5"/>
-          <p:cNvPicPr>
-            <a:picLocks noChangeAspect="1"/>
-          </p:cNvPicPr>
-          <p:nvPr/>
-        </p:nvPicPr>
-        <p:blipFill>
-          <a:blip r:embed="rId5"/>
-          <a:stretch>
-            <a:fillRect/>
-          </a:stretch>
-        </p:blipFill>
-        <p:spPr>
-          <a:xfrm>
-            <a:off x="4499992" y="2726432"/>
-            <a:ext cx="3653595" cy="1584176"/>
-          </a:xfrm>
-          <a:prstGeom prst="rect">
-            <a:avLst/>
-          </a:prstGeom>
-        </p:spPr>
-      </p:pic>
-      <p:sp>
-        <p:nvSpPr>
-          <p:cNvPr id="7" name="Прямоугольник 6"/>
-          <p:cNvSpPr/>
-          <p:nvPr/>
-        </p:nvSpPr>
-        <p:spPr>
-          <a:xfrm>
-            <a:off x="4211960" y="4365104"/>
-            <a:ext cx="4572000" cy="1200329"/>
-          </a:xfrm>
-          <a:prstGeom prst="rect">
-            <a:avLst/>
-          </a:prstGeom>
-        </p:spPr>
-        <p:txBody>
-          <a:bodyPr>
-            <a:spAutoFit/>
-          </a:bodyPr>
-          <a:lstStyle/>
-          <a:p>
-            <a:pPr algn="just"/>
-            <a:r>
-              <a:rPr lang="ru-RU" dirty="0">
-                <a:latin typeface="Times New Roman" pitchFamily="18" charset="0"/>
-                <a:cs typeface="Times New Roman" pitchFamily="18" charset="0"/>
-              </a:rPr>
-              <a:t>Стоит отметить, что переменная, которая определяется в объявлении цикла, должна по типу соответствовать типу элементов перебираемой коллекции.</a:t>
-            </a:r>
-          </a:p>
-        </p:txBody>
-      </p:sp>
-      <p:pic>
-        <p:nvPicPr>
-          <p:cNvPr id="8" name="Рисунок 7"/>
-          <p:cNvPicPr>
-            <a:picLocks noChangeAspect="1"/>
-          </p:cNvPicPr>
-          <p:nvPr/>
-        </p:nvPicPr>
-        <p:blipFill>
-          <a:blip r:embed="rId6"/>
-          <a:stretch>
-            <a:fillRect/>
-          </a:stretch>
-        </p:blipFill>
-        <p:spPr>
-          <a:xfrm>
-            <a:off x="169224" y="4781550"/>
-            <a:ext cx="3476625" cy="2076450"/>
-          </a:xfrm>
-          <a:prstGeom prst="rect">
-            <a:avLst/>
-          </a:prstGeom>
-        </p:spPr>
-      </p:pic>
-      <p:sp>
-        <p:nvSpPr>
-          <p:cNvPr id="9" name="Прямоугольник 8"/>
-          <p:cNvSpPr/>
-          <p:nvPr/>
-        </p:nvSpPr>
-        <p:spPr>
-          <a:xfrm>
-            <a:off x="3660576" y="6143644"/>
-            <a:ext cx="5483424" cy="461665"/>
-          </a:xfrm>
-          <a:prstGeom prst="rect">
-            <a:avLst/>
-          </a:prstGeom>
-          <a:solidFill>
-            <a:schemeClr val="accent3">
-              <a:lumMod val="20000"/>
-              <a:lumOff val="80000"/>
-            </a:schemeClr>
-          </a:solidFill>
-        </p:spPr>
-        <p:txBody>
-          <a:bodyPr wrap="none">
-            <a:spAutoFit/>
-          </a:bodyPr>
-          <a:lstStyle/>
-          <a:p>
-            <a:pPr algn="just"/>
-            <a:r>
-              <a:rPr lang="ru-RU" sz="2400" b="1" dirty="0" smtClean="0">
-                <a:latin typeface="Times New Roman" pitchFamily="18" charset="0"/>
-                <a:cs typeface="Times New Roman" pitchFamily="18" charset="0"/>
-              </a:rPr>
-              <a:t>Что делает оператор </a:t>
-            </a:r>
-            <a:r>
-              <a:rPr lang="en-US" sz="2400" b="1" dirty="0" smtClean="0">
-                <a:latin typeface="Times New Roman" pitchFamily="18" charset="0"/>
-                <a:cs typeface="Times New Roman" pitchFamily="18" charset="0"/>
-              </a:rPr>
-              <a:t>break </a:t>
-            </a:r>
-            <a:r>
-              <a:rPr lang="ru-RU" sz="2400" b="1" dirty="0" smtClean="0">
-                <a:latin typeface="Times New Roman" pitchFamily="18" charset="0"/>
-                <a:cs typeface="Times New Roman" pitchFamily="18" charset="0"/>
-              </a:rPr>
-              <a:t>и </a:t>
-            </a:r>
-            <a:r>
-              <a:rPr lang="en-US" sz="2400" b="1" dirty="0" smtClean="0">
-                <a:latin typeface="Times New Roman" pitchFamily="18" charset="0"/>
-                <a:cs typeface="Times New Roman" pitchFamily="18" charset="0"/>
-              </a:rPr>
-              <a:t>continue</a:t>
-            </a:r>
-            <a:r>
-              <a:rPr lang="ru-RU" sz="2400" b="1" dirty="0" smtClean="0">
-                <a:latin typeface="Times New Roman" pitchFamily="18" charset="0"/>
-                <a:cs typeface="Times New Roman" pitchFamily="18" charset="0"/>
-              </a:rPr>
-              <a:t>?</a:t>
-            </a:r>
-            <a:endParaRPr lang="ru-RU" sz="2400" b="1" dirty="0">
-              <a:latin typeface="Times New Roman" pitchFamily="18" charset="0"/>
-              <a:cs typeface="Times New Roman" pitchFamily="18" charset="0"/>
-            </a:endParaRPr>
-          </a:p>
-        </p:txBody>
-      </p:sp>
     </p:spTree>
-    <p:extLst>
-      <p:ext uri="{BB962C8B-B14F-4D97-AF65-F5344CB8AC3E}">
-        <p14:creationId xmlns="" xmlns:p14="http://schemas.microsoft.com/office/powerpoint/2010/main" val="964502395"/>
-      </p:ext>
-    </p:extLst>
   </p:cSld>
   <p:clrMapOvr>
     <a:masterClrMapping/>
@@ -4116,8 +3750,8 @@
         </p:nvSpPr>
         <p:spPr>
           <a:xfrm>
-            <a:off x="0" y="1168679"/>
-            <a:ext cx="9144000" cy="1938992"/>
+            <a:off x="0" y="0"/>
+            <a:ext cx="9144000" cy="1754326"/>
           </a:xfrm>
           <a:prstGeom prst="rect">
             <a:avLst/>
@@ -4131,55 +3765,76 @@
           <a:p>
             <a:pPr algn="just"/>
             <a:r>
-              <a:rPr lang="ru-RU" sz="2400" dirty="0" smtClean="0">
-                <a:latin typeface="Times New Roman" pitchFamily="18" charset="0"/>
-                <a:cs typeface="Times New Roman" pitchFamily="18" charset="0"/>
-              </a:rPr>
-              <a:t>При вызове внутри метода оператор </a:t>
-            </a:r>
-            <a:r>
-              <a:rPr lang="ru-RU" sz="2400" dirty="0" err="1" smtClean="0">
-                <a:latin typeface="Times New Roman" pitchFamily="18" charset="0"/>
-                <a:cs typeface="Times New Roman" pitchFamily="18" charset="0"/>
-              </a:rPr>
-              <a:t>return</a:t>
-            </a:r>
-            <a:r>
-              <a:rPr lang="ru-RU" sz="2400" dirty="0" smtClean="0">
-                <a:latin typeface="Times New Roman" pitchFamily="18" charset="0"/>
-                <a:cs typeface="Times New Roman" pitchFamily="18" charset="0"/>
-              </a:rPr>
-              <a:t> перерывает его выполнение и возвращает управление вызвавшему коду. Если сигнатура метода, в котором был вызван оператор </a:t>
-            </a:r>
-            <a:r>
-              <a:rPr lang="ru-RU" sz="2400" dirty="0" err="1" smtClean="0">
-                <a:latin typeface="Times New Roman" pitchFamily="18" charset="0"/>
-                <a:cs typeface="Times New Roman" pitchFamily="18" charset="0"/>
-              </a:rPr>
-              <a:t>return</a:t>
-            </a:r>
-            <a:r>
-              <a:rPr lang="ru-RU" sz="2400" dirty="0" smtClean="0">
-                <a:latin typeface="Times New Roman" pitchFamily="18" charset="0"/>
-                <a:cs typeface="Times New Roman" pitchFamily="18" charset="0"/>
-              </a:rPr>
-              <a:t>, предполагает возврат значения, то после </a:t>
-            </a:r>
-            <a:r>
-              <a:rPr lang="ru-RU" sz="2400" dirty="0" err="1" smtClean="0">
-                <a:latin typeface="Times New Roman" pitchFamily="18" charset="0"/>
-                <a:cs typeface="Times New Roman" pitchFamily="18" charset="0"/>
-              </a:rPr>
-              <a:t>return</a:t>
-            </a:r>
-            <a:r>
-              <a:rPr lang="ru-RU" sz="2400" dirty="0" smtClean="0">
-                <a:latin typeface="Times New Roman" pitchFamily="18" charset="0"/>
-                <a:cs typeface="Times New Roman" pitchFamily="18" charset="0"/>
-              </a:rPr>
-              <a:t> необходимо поставить значение или переменную соответствующего типа.</a:t>
-            </a:r>
-            <a:endParaRPr lang="ru-RU" sz="2400" dirty="0">
+              <a:rPr lang="ru-RU" b="1" dirty="0" smtClean="0">
+                <a:latin typeface="Times New Roman" pitchFamily="18" charset="0"/>
+                <a:cs typeface="Times New Roman" pitchFamily="18" charset="0"/>
+              </a:rPr>
+              <a:t>Свойства </a:t>
+            </a:r>
+            <a:r>
+              <a:rPr lang="ru-RU" dirty="0" smtClean="0">
+                <a:latin typeface="Times New Roman" pitchFamily="18" charset="0"/>
+                <a:cs typeface="Times New Roman" pitchFamily="18" charset="0"/>
+              </a:rPr>
+              <a:t>представляют собой элементы конструкции типа, предоставляющие механизм для управляемого доступа к полям.</a:t>
+            </a:r>
+            <a:r>
+              <a:rPr lang="en-US" dirty="0" smtClean="0">
+                <a:latin typeface="Times New Roman" pitchFamily="18" charset="0"/>
+                <a:cs typeface="Times New Roman" pitchFamily="18" charset="0"/>
+              </a:rPr>
+              <a:t> </a:t>
+            </a:r>
+            <a:r>
+              <a:rPr lang="ru-RU" dirty="0" smtClean="0">
+                <a:latin typeface="Times New Roman" pitchFamily="18" charset="0"/>
+                <a:cs typeface="Times New Roman" pitchFamily="18" charset="0"/>
+              </a:rPr>
+              <a:t>Если мы хотим ограничить доступ к свойству объекта, т.е. сделать невозможным задание значений свойствам после объявления экземпляра типа, то можно создать приватный </a:t>
+            </a:r>
+            <a:r>
+              <a:rPr lang="ru-RU" dirty="0" err="1" smtClean="0">
+                <a:latin typeface="Times New Roman" pitchFamily="18" charset="0"/>
+                <a:cs typeface="Times New Roman" pitchFamily="18" charset="0"/>
+              </a:rPr>
+              <a:t>setter</a:t>
+            </a:r>
+            <a:r>
+              <a:rPr lang="ru-RU" dirty="0" smtClean="0">
+                <a:latin typeface="Times New Roman" pitchFamily="18" charset="0"/>
+                <a:cs typeface="Times New Roman" pitchFamily="18" charset="0"/>
+              </a:rPr>
+              <a:t>. Для этого перед методом </a:t>
+            </a:r>
+            <a:r>
+              <a:rPr lang="ru-RU" dirty="0" err="1" smtClean="0">
+                <a:latin typeface="Times New Roman" pitchFamily="18" charset="0"/>
+                <a:cs typeface="Times New Roman" pitchFamily="18" charset="0"/>
+              </a:rPr>
+              <a:t>set</a:t>
+            </a:r>
+            <a:r>
+              <a:rPr lang="ru-RU" dirty="0" smtClean="0">
+                <a:latin typeface="Times New Roman" pitchFamily="18" charset="0"/>
+                <a:cs typeface="Times New Roman" pitchFamily="18" charset="0"/>
+              </a:rPr>
+              <a:t> необходимо поставить ключевое слово </a:t>
+            </a:r>
+            <a:r>
+              <a:rPr lang="ru-RU" dirty="0" err="1" smtClean="0">
+                <a:latin typeface="Times New Roman" pitchFamily="18" charset="0"/>
+                <a:cs typeface="Times New Roman" pitchFamily="18" charset="0"/>
+              </a:rPr>
+              <a:t>private</a:t>
+            </a:r>
+            <a:r>
+              <a:rPr lang="ru-RU" dirty="0" smtClean="0">
+                <a:latin typeface="Times New Roman" pitchFamily="18" charset="0"/>
+                <a:cs typeface="Times New Roman" pitchFamily="18" charset="0"/>
+              </a:rPr>
+              <a:t>. Значение, в этом случае, можно будет задать только внутри класса, в том числе и в конструкторе.</a:t>
+            </a:r>
+            <a:endParaRPr lang="ru-RU" dirty="0">
               <a:latin typeface="Times New Roman" pitchFamily="18" charset="0"/>
               <a:cs typeface="Times New Roman" pitchFamily="18" charset="0"/>
             </a:endParaRPr>
@@ -4188,7 +3843,7 @@
       </p:sp>
       <p:pic>
         <p:nvPicPr>
-          <p:cNvPr id="27650" name="Picture 2"/>
+          <p:cNvPr id="28675" name="Picture 3"/>
           <p:cNvPicPr>
             <a:picLocks noChangeAspect="1" noChangeArrowheads="1"/>
           </p:cNvPicPr>
@@ -4203,8 +3858,8 @@
         </p:blipFill>
         <p:spPr bwMode="auto">
           <a:xfrm>
-            <a:off x="0" y="3311819"/>
-            <a:ext cx="4000496" cy="3546181"/>
+            <a:off x="0" y="1643050"/>
+            <a:ext cx="6105525" cy="4714908"/>
           </a:xfrm>
           <a:prstGeom prst="rect">
             <a:avLst/>
@@ -4221,7 +3876,7 @@
       </p:pic>
       <p:pic>
         <p:nvPicPr>
-          <p:cNvPr id="27651" name="Picture 3"/>
+          <p:cNvPr id="28674" name="Picture 2"/>
           <p:cNvPicPr>
             <a:picLocks noChangeAspect="1" noChangeArrowheads="1"/>
           </p:cNvPicPr>
@@ -4236,8 +3891,8 @@
         </p:blipFill>
         <p:spPr bwMode="auto">
           <a:xfrm>
-            <a:off x="4286248" y="4026199"/>
-            <a:ext cx="4857752" cy="1857388"/>
+            <a:off x="4500562" y="3071810"/>
+            <a:ext cx="4643438" cy="2388730"/>
           </a:xfrm>
           <a:prstGeom prst="rect">
             <a:avLst/>
@@ -4260,8 +3915,8 @@
         </p:nvSpPr>
         <p:spPr>
           <a:xfrm>
-            <a:off x="0" y="0"/>
-            <a:ext cx="9144000" cy="1015663"/>
+            <a:off x="0" y="6286520"/>
+            <a:ext cx="9144000" cy="369332"/>
           </a:xfrm>
           <a:prstGeom prst="rect">
             <a:avLst/>
@@ -4275,43 +3930,14 @@
           <a:p>
             <a:pPr algn="ctr"/>
             <a:r>
-              <a:rPr lang="ru-RU" sz="2400" b="1" dirty="0" smtClean="0">
-                <a:latin typeface="Times New Roman" pitchFamily="18" charset="0"/>
-                <a:cs typeface="Times New Roman" pitchFamily="18" charset="0"/>
-              </a:rPr>
-              <a:t>Более подробно про методы:</a:t>
-            </a:r>
-            <a:endParaRPr lang="en-US" sz="2400" b="1" dirty="0" smtClean="0">
-              <a:latin typeface="Times New Roman" pitchFamily="18" charset="0"/>
-              <a:cs typeface="Times New Roman" pitchFamily="18" charset="0"/>
-            </a:endParaRPr>
-          </a:p>
-          <a:p>
-            <a:pPr algn="ctr"/>
-            <a:r>
-              <a:rPr lang="en-US" b="1" dirty="0" smtClean="0">
+              <a:rPr lang="en-US" dirty="0" smtClean="0">
                 <a:latin typeface="Times New Roman" pitchFamily="18" charset="0"/>
                 <a:cs typeface="Times New Roman" pitchFamily="18" charset="0"/>
                 <a:hlinkClick r:id="rId4"/>
               </a:rPr>
-              <a:t>https://csharp.webdelphi.ru/metody-v-c/?ysclid=mltadf7lj3811591999</a:t>
-            </a:r>
-            <a:endParaRPr lang="en-US" b="1" dirty="0" smtClean="0">
-              <a:latin typeface="Times New Roman" pitchFamily="18" charset="0"/>
-              <a:cs typeface="Times New Roman" pitchFamily="18" charset="0"/>
-            </a:endParaRPr>
-          </a:p>
-          <a:p>
-            <a:pPr algn="ctr"/>
-            <a:r>
-              <a:rPr lang="en-US" b="1" dirty="0" smtClean="0">
-                <a:latin typeface="Times New Roman" pitchFamily="18" charset="0"/>
-                <a:cs typeface="Times New Roman" pitchFamily="18" charset="0"/>
-                <a:hlinkClick r:id="rId5"/>
-              </a:rPr>
-              <a:t>https://metanit.com/sharp/tutorial/2.34.php?ysclid=mltajfq52f115470918</a:t>
-            </a:r>
-            <a:endParaRPr lang="ru-RU" b="1" dirty="0" smtClean="0">
+              <a:t>https://metanit.com/sharp/tutorial/3.4.php?ysclid=mluqvmd9ho914585276</a:t>
+            </a:r>
+            <a:endParaRPr lang="en-US" dirty="0" smtClean="0">
               <a:latin typeface="Times New Roman" pitchFamily="18" charset="0"/>
               <a:cs typeface="Times New Roman" pitchFamily="18" charset="0"/>
             </a:endParaRPr>
@@ -4343,6 +3969,84 @@
           <a:chExt cx="0" cy="0"/>
         </a:xfrm>
       </p:grpSpPr>
+      <p:sp>
+        <p:nvSpPr>
+          <p:cNvPr id="2" name="Прямоугольник 1"/>
+          <p:cNvSpPr/>
+          <p:nvPr/>
+        </p:nvSpPr>
+        <p:spPr>
+          <a:xfrm>
+            <a:off x="0" y="357166"/>
+            <a:ext cx="9144000" cy="1569660"/>
+          </a:xfrm>
+          <a:prstGeom prst="rect">
+            <a:avLst/>
+          </a:prstGeom>
+        </p:spPr>
+        <p:txBody>
+          <a:bodyPr wrap="square">
+            <a:spAutoFit/>
+          </a:bodyPr>
+          <a:lstStyle/>
+          <a:p>
+            <a:pPr algn="just"/>
+            <a:r>
+              <a:rPr lang="ru-RU" sz="2400" dirty="0" smtClean="0">
+                <a:latin typeface="Times New Roman" pitchFamily="18" charset="0"/>
+                <a:cs typeface="Times New Roman" pitchFamily="18" charset="0"/>
+              </a:rPr>
+              <a:t>Ключевое слово </a:t>
+            </a:r>
+            <a:r>
+              <a:rPr lang="ru-RU" sz="2400" dirty="0" err="1" smtClean="0">
+                <a:latin typeface="Times New Roman" pitchFamily="18" charset="0"/>
+                <a:cs typeface="Times New Roman" pitchFamily="18" charset="0"/>
+              </a:rPr>
+              <a:t>this</a:t>
+            </a:r>
+            <a:r>
+              <a:rPr lang="ru-RU" sz="2400" dirty="0" smtClean="0">
+                <a:latin typeface="Times New Roman" pitchFamily="18" charset="0"/>
+                <a:cs typeface="Times New Roman" pitchFamily="18" charset="0"/>
+              </a:rPr>
+              <a:t> используется для доступа к текущему экземпляру класса. Например, рассмотрим класс </a:t>
+            </a:r>
+            <a:r>
+              <a:rPr lang="ru-RU" sz="2400" dirty="0" err="1" smtClean="0">
+                <a:latin typeface="Times New Roman" pitchFamily="18" charset="0"/>
+                <a:cs typeface="Times New Roman" pitchFamily="18" charset="0"/>
+              </a:rPr>
+              <a:t>Shape</a:t>
+            </a:r>
+            <a:r>
+              <a:rPr lang="ru-RU" sz="2400" dirty="0" smtClean="0">
+                <a:latin typeface="Times New Roman" pitchFamily="18" charset="0"/>
+                <a:cs typeface="Times New Roman" pitchFamily="18" charset="0"/>
+              </a:rPr>
+              <a:t>, который содержит закрытое поле, отвечающее за хранение цвета с именем </a:t>
+            </a:r>
+            <a:r>
+              <a:rPr lang="ru-RU" sz="2400" dirty="0" err="1" smtClean="0">
+                <a:latin typeface="Times New Roman" pitchFamily="18" charset="0"/>
+                <a:cs typeface="Times New Roman" pitchFamily="18" charset="0"/>
+              </a:rPr>
+              <a:t>color</a:t>
+            </a:r>
+            <a:r>
+              <a:rPr lang="ru-RU" sz="2400" dirty="0" smtClean="0">
+                <a:latin typeface="Times New Roman" pitchFamily="18" charset="0"/>
+                <a:cs typeface="Times New Roman" pitchFamily="18" charset="0"/>
+              </a:rPr>
+              <a:t>, без приставки в виде символа подчеркивания.</a:t>
+            </a:r>
+            <a:endParaRPr lang="ru-RU" sz="2400" dirty="0">
+              <a:latin typeface="Times New Roman" pitchFamily="18" charset="0"/>
+              <a:cs typeface="Times New Roman" pitchFamily="18" charset="0"/>
+            </a:endParaRPr>
+          </a:p>
+        </p:txBody>
+      </p:sp>
       <p:pic>
         <p:nvPicPr>
           <p:cNvPr id="29698" name="Picture 2"/>
@@ -4360,8 +4064,8 @@
         </p:blipFill>
         <p:spPr bwMode="auto">
           <a:xfrm>
-            <a:off x="0" y="642918"/>
-            <a:ext cx="8981594" cy="5643577"/>
+            <a:off x="238125" y="2000240"/>
+            <a:ext cx="8905875" cy="2409825"/>
           </a:xfrm>
           <a:prstGeom prst="rect">
             <a:avLst/>
@@ -4403,7 +4107,7 @@
       </p:grpSpPr>
       <p:pic>
         <p:nvPicPr>
-          <p:cNvPr id="1027" name="Picture 3"/>
+          <p:cNvPr id="2050" name="Picture 2"/>
           <p:cNvPicPr>
             <a:picLocks noChangeAspect="1" noChangeArrowheads="1"/>
           </p:cNvPicPr>
@@ -4418,8 +4122,8 @@
         </p:blipFill>
         <p:spPr bwMode="auto">
           <a:xfrm>
-            <a:off x="0" y="5191642"/>
-            <a:ext cx="4143372" cy="1666357"/>
+            <a:off x="41492" y="1000108"/>
+            <a:ext cx="5673516" cy="5857892"/>
           </a:xfrm>
           <a:prstGeom prst="rect">
             <a:avLst/>
@@ -4434,9 +4138,41 @@
           <a:effectLst/>
         </p:spPr>
       </p:pic>
+      <p:sp>
+        <p:nvSpPr>
+          <p:cNvPr id="3" name="Прямоугольник 2"/>
+          <p:cNvSpPr/>
+          <p:nvPr/>
+        </p:nvSpPr>
+        <p:spPr>
+          <a:xfrm>
+            <a:off x="2786050" y="0"/>
+            <a:ext cx="4142994" cy="646331"/>
+          </a:xfrm>
+          <a:prstGeom prst="rect">
+            <a:avLst/>
+          </a:prstGeom>
+        </p:spPr>
+        <p:txBody>
+          <a:bodyPr wrap="none">
+            <a:spAutoFit/>
+          </a:bodyPr>
+          <a:lstStyle/>
+          <a:p>
+            <a:r>
+              <a:rPr lang="ru-RU" sz="3600" b="1" dirty="0" smtClean="0">
+                <a:latin typeface="Times New Roman" pitchFamily="18" charset="0"/>
+                <a:cs typeface="Times New Roman" pitchFamily="18" charset="0"/>
+              </a:rPr>
+              <a:t>НАСЛЕДОВАНИЕ</a:t>
+            </a:r>
+            <a:endParaRPr lang="ru-RU" sz="3600" b="1" dirty="0"/>
+          </a:p>
+        </p:txBody>
+      </p:sp>
       <p:pic>
         <p:nvPicPr>
-          <p:cNvPr id="1028" name="Picture 4"/>
+          <p:cNvPr id="4" name="Picture 2"/>
           <p:cNvPicPr>
             <a:picLocks noChangeAspect="1" noChangeArrowheads="1"/>
           </p:cNvPicPr>
@@ -4451,8 +4187,8 @@
         </p:blipFill>
         <p:spPr bwMode="auto">
           <a:xfrm>
-            <a:off x="5214942" y="5074592"/>
-            <a:ext cx="3214678" cy="1783408"/>
+            <a:off x="5786446" y="1076325"/>
+            <a:ext cx="3357554" cy="5781675"/>
           </a:xfrm>
           <a:prstGeom prst="rect">
             <a:avLst/>
@@ -4467,76 +4203,6 @@
           <a:effectLst/>
         </p:spPr>
       </p:pic>
-      <p:pic>
-        <p:nvPicPr>
-          <p:cNvPr id="5121" name="Picture 1"/>
-          <p:cNvPicPr>
-            <a:picLocks noChangeAspect="1" noChangeArrowheads="1"/>
-          </p:cNvPicPr>
-          <p:nvPr/>
-        </p:nvPicPr>
-        <p:blipFill>
-          <a:blip r:embed="rId4"/>
-          <a:srcRect/>
-          <a:stretch>
-            <a:fillRect/>
-          </a:stretch>
-        </p:blipFill>
-        <p:spPr bwMode="auto">
-          <a:xfrm>
-            <a:off x="285720" y="500042"/>
-            <a:ext cx="8296393" cy="4541407"/>
-          </a:xfrm>
-          <a:prstGeom prst="rect">
-            <a:avLst/>
-          </a:prstGeom>
-          <a:noFill/>
-          <a:ln w="9525">
-            <a:noFill/>
-            <a:miter lim="800000"/>
-            <a:headEnd/>
-            <a:tailEnd/>
-          </a:ln>
-          <a:effectLst/>
-        </p:spPr>
-      </p:pic>
-      <p:sp>
-        <p:nvSpPr>
-          <p:cNvPr id="7" name="Прямоугольник 6"/>
-          <p:cNvSpPr/>
-          <p:nvPr/>
-        </p:nvSpPr>
-        <p:spPr>
-          <a:xfrm>
-            <a:off x="0" y="0"/>
-            <a:ext cx="9144000" cy="369332"/>
-          </a:xfrm>
-          <a:prstGeom prst="rect">
-            <a:avLst/>
-          </a:prstGeom>
-        </p:spPr>
-        <p:txBody>
-          <a:bodyPr wrap="square">
-            <a:spAutoFit/>
-          </a:bodyPr>
-          <a:lstStyle/>
-          <a:p>
-            <a:pPr algn="ctr"/>
-            <a:r>
-              <a:rPr lang="en-US" b="1" dirty="0" smtClean="0">
-                <a:latin typeface="Times New Roman" pitchFamily="18" charset="0"/>
-                <a:cs typeface="Times New Roman" pitchFamily="18" charset="0"/>
-                <a:hlinkClick r:id="rId5"/>
-              </a:rPr>
-              <a:t>https://metanit.com/sharp/tutorial/20.5.php?ysclid=mltaxjsvxf405846068</a:t>
-            </a:r>
-            <a:endParaRPr lang="en-US" b="1" dirty="0" smtClean="0">
-              <a:latin typeface="Times New Roman" pitchFamily="18" charset="0"/>
-              <a:cs typeface="Times New Roman" pitchFamily="18" charset="0"/>
-            </a:endParaRPr>
-          </a:p>
-        </p:txBody>
-      </p:sp>
     </p:spTree>
   </p:cSld>
   <p:clrMapOvr>
@@ -4562,9 +4228,106 @@
           <a:chExt cx="0" cy="0"/>
         </a:xfrm>
       </p:grpSpPr>
+      <p:sp>
+        <p:nvSpPr>
+          <p:cNvPr id="2" name="Прямоугольник 1"/>
+          <p:cNvSpPr/>
+          <p:nvPr/>
+        </p:nvSpPr>
+        <p:spPr>
+          <a:xfrm>
+            <a:off x="0" y="0"/>
+            <a:ext cx="9144000" cy="1200329"/>
+          </a:xfrm>
+          <a:prstGeom prst="rect">
+            <a:avLst/>
+          </a:prstGeom>
+        </p:spPr>
+        <p:txBody>
+          <a:bodyPr wrap="square">
+            <a:spAutoFit/>
+          </a:bodyPr>
+          <a:lstStyle/>
+          <a:p>
+            <a:pPr algn="ctr"/>
+            <a:r>
+              <a:rPr lang="ru-RU" sz="3600" b="1" dirty="0" smtClean="0">
+                <a:latin typeface="Times New Roman" pitchFamily="18" charset="0"/>
+                <a:cs typeface="Times New Roman" pitchFamily="18" charset="0"/>
+              </a:rPr>
+              <a:t>Переопределение методов в классе наследнике</a:t>
+            </a:r>
+            <a:r>
+              <a:rPr lang="en-US" sz="3600" b="1" dirty="0" smtClean="0">
+                <a:latin typeface="Times New Roman" pitchFamily="18" charset="0"/>
+                <a:cs typeface="Times New Roman" pitchFamily="18" charset="0"/>
+              </a:rPr>
+              <a:t>: </a:t>
+            </a:r>
+            <a:r>
+              <a:rPr lang="ru-RU" sz="3600" b="1" dirty="0" smtClean="0">
+                <a:latin typeface="Times New Roman" pitchFamily="18" charset="0"/>
+                <a:cs typeface="Times New Roman" pitchFamily="18" charset="0"/>
+              </a:rPr>
+              <a:t>ПОЛИМОРФИЗМ</a:t>
+            </a:r>
+          </a:p>
+        </p:txBody>
+      </p:sp>
+      <p:sp>
+        <p:nvSpPr>
+          <p:cNvPr id="3" name="Прямоугольник 2"/>
+          <p:cNvSpPr/>
+          <p:nvPr/>
+        </p:nvSpPr>
+        <p:spPr>
+          <a:xfrm>
+            <a:off x="5000628" y="1285860"/>
+            <a:ext cx="4143372" cy="1323439"/>
+          </a:xfrm>
+          <a:prstGeom prst="rect">
+            <a:avLst/>
+          </a:prstGeom>
+          <a:solidFill>
+            <a:schemeClr val="bg2"/>
+          </a:solidFill>
+          <a:ln>
+            <a:solidFill>
+              <a:schemeClr val="tx1"/>
+            </a:solidFill>
+          </a:ln>
+        </p:spPr>
+        <p:txBody>
+          <a:bodyPr wrap="square">
+            <a:spAutoFit/>
+          </a:bodyPr>
+          <a:lstStyle/>
+          <a:p>
+            <a:pPr algn="just"/>
+            <a:r>
+              <a:rPr lang="ru-RU" sz="1600" b="1" dirty="0" err="1" smtClean="0">
+                <a:latin typeface="Times New Roman" pitchFamily="18" charset="0"/>
+                <a:cs typeface="Times New Roman" pitchFamily="18" charset="0"/>
+              </a:rPr>
+              <a:t>Virtual</a:t>
+            </a:r>
+            <a:r>
+              <a:rPr lang="ru-RU" sz="1600" dirty="0" smtClean="0">
+                <a:latin typeface="Times New Roman" pitchFamily="18" charset="0"/>
+                <a:cs typeface="Times New Roman" pitchFamily="18" charset="0"/>
+              </a:rPr>
+              <a:t> в C# — ключевое слово, которым помечают методы и свойства в базовом классе, чтобы сделать их доступными для переопределения. Такие методы и свойства называют виртуальными.</a:t>
+            </a:r>
+            <a:endParaRPr lang="ru-RU" sz="1600" dirty="0">
+              <a:latin typeface="Times New Roman" pitchFamily="18" charset="0"/>
+              <a:cs typeface="Times New Roman" pitchFamily="18" charset="0"/>
+            </a:endParaRPr>
+          </a:p>
+        </p:txBody>
+      </p:sp>
       <p:pic>
         <p:nvPicPr>
-          <p:cNvPr id="28674" name="Picture 2"/>
+          <p:cNvPr id="4" name="Picture 3"/>
           <p:cNvPicPr>
             <a:picLocks noChangeAspect="1" noChangeArrowheads="1"/>
           </p:cNvPicPr>
@@ -4579,8 +4342,8 @@
         </p:blipFill>
         <p:spPr bwMode="auto">
           <a:xfrm>
-            <a:off x="0" y="428604"/>
-            <a:ext cx="9144000" cy="5749614"/>
+            <a:off x="500034" y="1714488"/>
+            <a:ext cx="3738559" cy="3721756"/>
           </a:xfrm>
           <a:prstGeom prst="rect">
             <a:avLst/>
@@ -4595,6 +4358,168 @@
           <a:effectLst/>
         </p:spPr>
       </p:pic>
+      <p:sp>
+        <p:nvSpPr>
+          <p:cNvPr id="5" name="Прямоугольник 4"/>
+          <p:cNvSpPr/>
+          <p:nvPr/>
+        </p:nvSpPr>
+        <p:spPr>
+          <a:xfrm>
+            <a:off x="857224" y="5429264"/>
+            <a:ext cx="2927212" cy="369332"/>
+          </a:xfrm>
+          <a:prstGeom prst="rect">
+            <a:avLst/>
+          </a:prstGeom>
+        </p:spPr>
+        <p:txBody>
+          <a:bodyPr wrap="none">
+            <a:spAutoFit/>
+          </a:bodyPr>
+          <a:lstStyle/>
+          <a:p>
+            <a:r>
+              <a:rPr lang="ru-RU" b="1" dirty="0" smtClean="0"/>
+              <a:t>Переопределение методов</a:t>
+            </a:r>
+            <a:endParaRPr lang="ru-RU" b="1" dirty="0"/>
+          </a:p>
+        </p:txBody>
+      </p:sp>
+      <p:sp>
+        <p:nvSpPr>
+          <p:cNvPr id="6" name="Прямоугольник 5"/>
+          <p:cNvSpPr/>
+          <p:nvPr/>
+        </p:nvSpPr>
+        <p:spPr>
+          <a:xfrm>
+            <a:off x="5000628" y="3500438"/>
+            <a:ext cx="4143372" cy="1815882"/>
+          </a:xfrm>
+          <a:prstGeom prst="rect">
+            <a:avLst/>
+          </a:prstGeom>
+          <a:solidFill>
+            <a:schemeClr val="bg2"/>
+          </a:solidFill>
+          <a:ln>
+            <a:solidFill>
+              <a:schemeClr val="tx1"/>
+            </a:solidFill>
+          </a:ln>
+        </p:spPr>
+        <p:txBody>
+          <a:bodyPr wrap="square">
+            <a:spAutoFit/>
+          </a:bodyPr>
+          <a:lstStyle/>
+          <a:p>
+            <a:pPr algn="just"/>
+            <a:r>
+              <a:rPr lang="ru-RU" sz="1600" b="1" dirty="0" err="1" smtClean="0">
+                <a:latin typeface="Times New Roman" pitchFamily="18" charset="0"/>
+                <a:cs typeface="Times New Roman" pitchFamily="18" charset="0"/>
+              </a:rPr>
+              <a:t>Override</a:t>
+            </a:r>
+            <a:r>
+              <a:rPr lang="ru-RU" sz="1600" dirty="0" smtClean="0">
+                <a:latin typeface="Times New Roman" pitchFamily="18" charset="0"/>
+                <a:cs typeface="Times New Roman" pitchFamily="18" charset="0"/>
+              </a:rPr>
+              <a:t> — модификатор для переопределения виртуальных методов, свойств и событий базового класса. </a:t>
+            </a:r>
+          </a:p>
+          <a:p>
+            <a:pPr algn="just"/>
+            <a:r>
+              <a:rPr lang="ru-RU" sz="1600" dirty="0" smtClean="0">
+                <a:latin typeface="Times New Roman" pitchFamily="18" charset="0"/>
+                <a:cs typeface="Times New Roman" pitchFamily="18" charset="0"/>
+              </a:rPr>
+              <a:t>Переопределённый метод в классе-наследнике должен иметь тот же набор параметров, что и виртуальный метод в базовом классе.</a:t>
+            </a:r>
+          </a:p>
+        </p:txBody>
+      </p:sp>
+      <p:cxnSp>
+        <p:nvCxnSpPr>
+          <p:cNvPr id="7" name="Прямая со стрелкой 6"/>
+          <p:cNvCxnSpPr>
+            <a:stCxn id="3" idx="1"/>
+          </p:cNvCxnSpPr>
+          <p:nvPr/>
+        </p:nvCxnSpPr>
+        <p:spPr>
+          <a:xfrm rot="10800000" flipV="1">
+            <a:off x="2071670" y="1947580"/>
+            <a:ext cx="2928958" cy="52660"/>
+          </a:xfrm>
+          <a:prstGeom prst="straightConnector1">
+            <a:avLst/>
+          </a:prstGeom>
+          <a:ln w="25400">
+            <a:solidFill>
+              <a:srgbClr val="FF0000"/>
+            </a:solidFill>
+            <a:tailEnd type="arrow"/>
+          </a:ln>
+        </p:spPr>
+        <p:style>
+          <a:lnRef idx="1">
+            <a:schemeClr val="accent1"/>
+          </a:lnRef>
+          <a:fillRef idx="0">
+            <a:schemeClr val="accent1"/>
+          </a:fillRef>
+          <a:effectRef idx="0">
+            <a:schemeClr val="accent1"/>
+          </a:effectRef>
+          <a:fontRef idx="minor">
+            <a:schemeClr val="tx1"/>
+          </a:fontRef>
+        </p:style>
+      </p:cxnSp>
+      <p:cxnSp>
+        <p:nvCxnSpPr>
+          <p:cNvPr id="8" name="Прямая со стрелкой 7"/>
+          <p:cNvCxnSpPr>
+            <a:stCxn id="6" idx="1"/>
+          </p:cNvCxnSpPr>
+          <p:nvPr/>
+        </p:nvCxnSpPr>
+        <p:spPr>
+          <a:xfrm rot="10800000">
+            <a:off x="2143108" y="3500439"/>
+            <a:ext cx="2857520" cy="907941"/>
+          </a:xfrm>
+          <a:prstGeom prst="straightConnector1">
+            <a:avLst/>
+          </a:prstGeom>
+          <a:ln w="25400">
+            <a:solidFill>
+              <a:srgbClr val="FF0000"/>
+            </a:solidFill>
+            <a:tailEnd type="arrow"/>
+          </a:ln>
+        </p:spPr>
+        <p:style>
+          <a:lnRef idx="1">
+            <a:schemeClr val="accent1"/>
+          </a:lnRef>
+          <a:fillRef idx="0">
+            <a:schemeClr val="accent1"/>
+          </a:fillRef>
+          <a:effectRef idx="0">
+            <a:schemeClr val="accent1"/>
+          </a:effectRef>
+          <a:fontRef idx="minor">
+            <a:schemeClr val="tx1"/>
+          </a:fontRef>
+        </p:style>
+      </p:cxnSp>
     </p:spTree>
   </p:cSld>
   <p:clrMapOvr>
@@ -4622,56 +4547,78 @@
       </p:grpSpPr>
       <p:sp>
         <p:nvSpPr>
-          <p:cNvPr id="11" name="Прямоугольник 10"/>
+          <p:cNvPr id="2" name="Прямоугольник 1"/>
           <p:cNvSpPr/>
           <p:nvPr/>
         </p:nvSpPr>
         <p:spPr>
           <a:xfrm>
-            <a:off x="0" y="3500438"/>
-            <a:ext cx="9144000" cy="3357562"/>
+            <a:off x="0" y="0"/>
+            <a:ext cx="9144000" cy="1477328"/>
           </a:xfrm>
           <a:prstGeom prst="rect">
             <a:avLst/>
           </a:prstGeom>
-          <a:solidFill>
-            <a:schemeClr val="accent3">
-              <a:lumMod val="20000"/>
-              <a:lumOff val="80000"/>
-            </a:schemeClr>
-          </a:solidFill>
-          <a:ln>
-            <a:noFill/>
-          </a:ln>
-        </p:spPr>
-        <p:style>
-          <a:lnRef idx="2">
-            <a:schemeClr val="accent1">
-              <a:shade val="50000"/>
-            </a:schemeClr>
-          </a:lnRef>
-          <a:fillRef idx="1">
-            <a:schemeClr val="accent1"/>
-          </a:fillRef>
-          <a:effectRef idx="0">
-            <a:schemeClr val="accent1"/>
-          </a:effectRef>
-          <a:fontRef idx="minor">
-            <a:schemeClr val="lt1"/>
-          </a:fontRef>
-        </p:style>
-        <p:txBody>
-          <a:bodyPr rtlCol="0" anchor="ctr"/>
+        </p:spPr>
+        <p:txBody>
+          <a:bodyPr wrap="square">
+            <a:spAutoFit/>
+          </a:bodyPr>
           <a:lstStyle/>
           <a:p>
-            <a:pPr algn="ctr"/>
-            <a:endParaRPr lang="ru-RU"/>
+            <a:pPr algn="just"/>
+            <a:r>
+              <a:rPr lang="ru-RU" b="1" dirty="0" smtClean="0">
+                <a:latin typeface="Times New Roman" pitchFamily="18" charset="0"/>
+                <a:cs typeface="Times New Roman" pitchFamily="18" charset="0"/>
+              </a:rPr>
+              <a:t>Абстрактные классы </a:t>
+            </a:r>
+            <a:r>
+              <a:rPr lang="ru-RU" dirty="0" smtClean="0">
+                <a:latin typeface="Times New Roman" pitchFamily="18" charset="0"/>
+                <a:cs typeface="Times New Roman" pitchFamily="18" charset="0"/>
+              </a:rPr>
+              <a:t>- это специальный вид классов с неполной реализацией, который используется в организации иерархий наследования. Разработчик не может создавать объекты таких классов. Их назначение - быть базовыми для каких-либо других классов проекта. Для объявления того, что класс является абстрактным, при объявлении класса перед ключевым словом </a:t>
+            </a:r>
+            <a:r>
+              <a:rPr lang="ru-RU" dirty="0" err="1" smtClean="0">
+                <a:latin typeface="Times New Roman" pitchFamily="18" charset="0"/>
+                <a:cs typeface="Times New Roman" pitchFamily="18" charset="0"/>
+              </a:rPr>
+              <a:t>class</a:t>
+            </a:r>
+            <a:r>
+              <a:rPr lang="ru-RU" dirty="0" smtClean="0">
+                <a:latin typeface="Times New Roman" pitchFamily="18" charset="0"/>
+                <a:cs typeface="Times New Roman" pitchFamily="18" charset="0"/>
+              </a:rPr>
+              <a:t> необходимо поставить </a:t>
+            </a:r>
+            <a:r>
+              <a:rPr lang="ru-RU" dirty="0" err="1" smtClean="0">
+                <a:latin typeface="Times New Roman" pitchFamily="18" charset="0"/>
+                <a:cs typeface="Times New Roman" pitchFamily="18" charset="0"/>
+              </a:rPr>
+              <a:t>abstract</a:t>
+            </a:r>
+            <a:r>
+              <a:rPr lang="ru-RU" dirty="0" smtClean="0">
+                <a:latin typeface="Times New Roman" pitchFamily="18" charset="0"/>
+                <a:cs typeface="Times New Roman" pitchFamily="18" charset="0"/>
+              </a:rPr>
+              <a:t>.</a:t>
+            </a:r>
+            <a:endParaRPr lang="ru-RU" dirty="0">
+              <a:latin typeface="Times New Roman" pitchFamily="18" charset="0"/>
+              <a:cs typeface="Times New Roman" pitchFamily="18" charset="0"/>
+            </a:endParaRPr>
           </a:p>
         </p:txBody>
       </p:sp>
       <p:pic>
         <p:nvPicPr>
-          <p:cNvPr id="2051" name="Picture 3"/>
+          <p:cNvPr id="33794" name="Picture 2"/>
           <p:cNvPicPr>
             <a:picLocks noChangeAspect="1" noChangeArrowheads="1"/>
           </p:cNvPicPr>
@@ -4686,8 +4633,8 @@
         </p:blipFill>
         <p:spPr bwMode="auto">
           <a:xfrm>
-            <a:off x="714348" y="1071546"/>
-            <a:ext cx="804866" cy="2390881"/>
+            <a:off x="214282" y="1714488"/>
+            <a:ext cx="3552825" cy="2009775"/>
           </a:xfrm>
           <a:prstGeom prst="rect">
             <a:avLst/>
@@ -4704,14 +4651,14 @@
       </p:pic>
       <p:sp>
         <p:nvSpPr>
-          <p:cNvPr id="4" name="Прямоугольник 3"/>
+          <p:cNvPr id="5" name="Прямоугольник 4"/>
           <p:cNvSpPr/>
           <p:nvPr/>
         </p:nvSpPr>
         <p:spPr>
           <a:xfrm>
-            <a:off x="0" y="500042"/>
-            <a:ext cx="2428860" cy="646331"/>
+            <a:off x="3857620" y="1785926"/>
+            <a:ext cx="5286380" cy="1815882"/>
           </a:xfrm>
           <a:prstGeom prst="rect">
             <a:avLst/>
@@ -4725,20 +4672,67 @@
           <a:p>
             <a:pPr algn="just"/>
             <a:r>
-              <a:rPr lang="ru-RU" dirty="0" smtClean="0">
-                <a:latin typeface="Times New Roman" pitchFamily="18" charset="0"/>
-                <a:cs typeface="Times New Roman" pitchFamily="18" charset="0"/>
-              </a:rPr>
-              <a:t>Выберите допустимые названия переменных</a:t>
-            </a:r>
-            <a:endParaRPr lang="ru-RU" dirty="0"/>
+              <a:rPr lang="ru-RU" sz="1600" dirty="0" smtClean="0">
+                <a:latin typeface="Times New Roman" pitchFamily="18" charset="0"/>
+                <a:cs typeface="Times New Roman" pitchFamily="18" charset="0"/>
+              </a:rPr>
+              <a:t>абстрактный класс </a:t>
+            </a:r>
+            <a:r>
+              <a:rPr lang="ru-RU" sz="1600" dirty="0" err="1" smtClean="0">
+                <a:latin typeface="Times New Roman" pitchFamily="18" charset="0"/>
+                <a:cs typeface="Times New Roman" pitchFamily="18" charset="0"/>
+              </a:rPr>
+              <a:t>Shape</a:t>
+            </a:r>
+            <a:r>
+              <a:rPr lang="ru-RU" sz="1600" dirty="0" smtClean="0">
+                <a:latin typeface="Times New Roman" pitchFamily="18" charset="0"/>
+                <a:cs typeface="Times New Roman" pitchFamily="18" charset="0"/>
+              </a:rPr>
+              <a:t>, который имеет закрытое свойство, конструктор, и абстрактный метод </a:t>
+            </a:r>
+            <a:r>
+              <a:rPr lang="ru-RU" sz="1600" dirty="0" err="1" smtClean="0">
+                <a:latin typeface="Times New Roman" pitchFamily="18" charset="0"/>
+                <a:cs typeface="Times New Roman" pitchFamily="18" charset="0"/>
+              </a:rPr>
+              <a:t>Square</a:t>
+            </a:r>
+            <a:r>
+              <a:rPr lang="ru-RU" sz="1600" dirty="0" smtClean="0">
+                <a:latin typeface="Times New Roman" pitchFamily="18" charset="0"/>
+                <a:cs typeface="Times New Roman" pitchFamily="18" charset="0"/>
+              </a:rPr>
+              <a:t> для вычисления площади фигуры. Предполагается, что все наследники класса </a:t>
+            </a:r>
+            <a:r>
+              <a:rPr lang="ru-RU" sz="1600" dirty="0" err="1" smtClean="0">
+                <a:latin typeface="Times New Roman" pitchFamily="18" charset="0"/>
+                <a:cs typeface="Times New Roman" pitchFamily="18" charset="0"/>
+              </a:rPr>
+              <a:t>Shape</a:t>
+            </a:r>
+            <a:r>
+              <a:rPr lang="ru-RU" sz="1600" dirty="0" smtClean="0">
+                <a:latin typeface="Times New Roman" pitchFamily="18" charset="0"/>
+                <a:cs typeface="Times New Roman" pitchFamily="18" charset="0"/>
+              </a:rPr>
+              <a:t>, будут эту площадь вычислять в соответствии с определенными правилами. Так как для абстрактной фигуры это сделать невозможно, то и реализации у этого метода нет.</a:t>
+            </a:r>
+            <a:endParaRPr lang="ru-RU" sz="1600" dirty="0">
+              <a:latin typeface="Times New Roman" pitchFamily="18" charset="0"/>
+              <a:cs typeface="Times New Roman" pitchFamily="18" charset="0"/>
+            </a:endParaRPr>
           </a:p>
         </p:txBody>
       </p:sp>
       <p:pic>
         <p:nvPicPr>
-          <p:cNvPr id="5" name="Рисунок 4"/>
-          <p:cNvPicPr/>
+          <p:cNvPr id="33796" name="Picture 4"/>
+          <p:cNvPicPr>
+            <a:picLocks noChangeAspect="1" noChangeArrowheads="1"/>
+          </p:cNvPicPr>
           <p:nvPr/>
         </p:nvPicPr>
         <p:blipFill>
@@ -4750,8 +4744,8 @@
         </p:blipFill>
         <p:spPr bwMode="auto">
           <a:xfrm>
-            <a:off x="2714612" y="714357"/>
-            <a:ext cx="2857519" cy="2357454"/>
+            <a:off x="0" y="3743325"/>
+            <a:ext cx="4429125" cy="3114675"/>
           </a:xfrm>
           <a:prstGeom prst="rect">
             <a:avLst/>
@@ -4763,45 +4757,103 @@
             <a:headEnd/>
             <a:tailEnd/>
           </a:ln>
+          <a:effectLst/>
         </p:spPr>
       </p:pic>
       <p:sp>
         <p:nvSpPr>
-          <p:cNvPr id="6" name="Прямоугольник 5"/>
+          <p:cNvPr id="8" name="Прямоугольник 7"/>
           <p:cNvSpPr/>
           <p:nvPr/>
         </p:nvSpPr>
         <p:spPr>
           <a:xfrm>
-            <a:off x="4214810" y="357166"/>
-            <a:ext cx="2928958" cy="461665"/>
+            <a:off x="4572000" y="3786190"/>
+            <a:ext cx="4572000" cy="1754326"/>
           </a:xfrm>
           <a:prstGeom prst="rect">
             <a:avLst/>
           </a:prstGeom>
         </p:spPr>
         <p:txBody>
-          <a:bodyPr wrap="square">
+          <a:bodyPr>
             <a:spAutoFit/>
           </a:bodyPr>
           <a:lstStyle/>
           <a:p>
             <a:pPr algn="just"/>
             <a:r>
-              <a:rPr lang="ru-RU" sz="2400" b="1" dirty="0" smtClean="0">
-                <a:latin typeface="Times New Roman" pitchFamily="18" charset="0"/>
-                <a:cs typeface="Times New Roman" pitchFamily="18" charset="0"/>
-              </a:rPr>
-              <a:t>Что вернут коды?</a:t>
-            </a:r>
-            <a:endParaRPr lang="ru-RU" sz="2400" b="1" dirty="0"/>
-          </a:p>
-        </p:txBody>
-      </p:sp>
+              <a:rPr lang="ru-RU" dirty="0" smtClean="0">
+                <a:latin typeface="Times New Roman" pitchFamily="18" charset="0"/>
+                <a:cs typeface="Times New Roman" pitchFamily="18" charset="0"/>
+              </a:rPr>
+              <a:t>Ключевое слово </a:t>
+            </a:r>
+            <a:r>
+              <a:rPr lang="ru-RU" dirty="0" err="1" smtClean="0">
+                <a:latin typeface="Times New Roman" pitchFamily="18" charset="0"/>
+                <a:cs typeface="Times New Roman" pitchFamily="18" charset="0"/>
+              </a:rPr>
+              <a:t>base</a:t>
+            </a:r>
+            <a:r>
+              <a:rPr lang="ru-RU" dirty="0" smtClean="0">
+                <a:latin typeface="Times New Roman" pitchFamily="18" charset="0"/>
+                <a:cs typeface="Times New Roman" pitchFamily="18" charset="0"/>
+              </a:rPr>
+              <a:t> используется для обращения к базовому классу. Оно применяется в случаях, когда необходимо вызвать конструктор базового класса и для обращения к методам базового класса, которые были переопределены в текущем.</a:t>
+            </a:r>
+            <a:endParaRPr lang="ru-RU" dirty="0">
+              <a:latin typeface="Times New Roman" pitchFamily="18" charset="0"/>
+              <a:cs typeface="Times New Roman" pitchFamily="18" charset="0"/>
+            </a:endParaRPr>
+          </a:p>
+        </p:txBody>
+      </p:sp>
+      <p:cxnSp>
+        <p:nvCxnSpPr>
+          <p:cNvPr id="10" name="Прямая со стрелкой 9"/>
+          <p:cNvCxnSpPr>
+            <a:stCxn id="8" idx="1"/>
+          </p:cNvCxnSpPr>
+          <p:nvPr/>
+        </p:nvCxnSpPr>
+        <p:spPr>
+          <a:xfrm rot="10800000" flipV="1">
+            <a:off x="1928794" y="4663352"/>
+            <a:ext cx="2643206" cy="551597"/>
+          </a:xfrm>
+          <a:prstGeom prst="straightConnector1">
+            <a:avLst/>
+          </a:prstGeom>
+          <a:ln w="19050">
+            <a:solidFill>
+              <a:srgbClr val="FF0000"/>
+            </a:solidFill>
+            <a:tailEnd type="arrow"/>
+          </a:ln>
+        </p:spPr>
+        <p:style>
+          <a:lnRef idx="1">
+            <a:schemeClr val="accent1"/>
+          </a:lnRef>
+          <a:fillRef idx="0">
+            <a:schemeClr val="accent1"/>
+          </a:fillRef>
+          <a:effectRef idx="0">
+            <a:schemeClr val="accent1"/>
+          </a:effectRef>
+          <a:fontRef idx="minor">
+            <a:schemeClr val="tx1"/>
+          </a:fontRef>
+        </p:style>
+      </p:cxnSp>
       <p:pic>
         <p:nvPicPr>
-          <p:cNvPr id="7" name="Рисунок 6"/>
-          <p:cNvPicPr/>
+          <p:cNvPr id="33798" name="Picture 6"/>
+          <p:cNvPicPr>
+            <a:picLocks noChangeAspect="1" noChangeArrowheads="1"/>
+          </p:cNvPicPr>
           <p:nvPr/>
         </p:nvPicPr>
         <p:blipFill>
@@ -4813,90 +4865,8 @@
         </p:blipFill>
         <p:spPr bwMode="auto">
           <a:xfrm>
-            <a:off x="5929322" y="714357"/>
-            <a:ext cx="3214678" cy="2214578"/>
-          </a:xfrm>
-          <a:prstGeom prst="rect">
-            <a:avLst/>
-          </a:prstGeom>
-          <a:noFill/>
-          <a:ln w="9525">
-            <a:noFill/>
-            <a:miter lim="800000"/>
-            <a:headEnd/>
-            <a:tailEnd/>
-          </a:ln>
-        </p:spPr>
-      </p:pic>
-      <p:sp>
-        <p:nvSpPr>
-          <p:cNvPr id="8" name="Прямоугольник 7"/>
-          <p:cNvSpPr/>
-          <p:nvPr/>
-        </p:nvSpPr>
-        <p:spPr>
-          <a:xfrm>
-            <a:off x="0" y="3571876"/>
-            <a:ext cx="3143240" cy="2585323"/>
-          </a:xfrm>
-          <a:prstGeom prst="rect">
-            <a:avLst/>
-          </a:prstGeom>
-        </p:spPr>
-        <p:txBody>
-          <a:bodyPr wrap="square">
-            <a:spAutoFit/>
-          </a:bodyPr>
-          <a:lstStyle/>
-          <a:p>
-            <a:pPr algn="just"/>
-            <a:r>
-              <a:rPr lang="ru-RU" dirty="0" smtClean="0">
-                <a:latin typeface="Times New Roman" pitchFamily="18" charset="0"/>
-                <a:cs typeface="Times New Roman" pitchFamily="18" charset="0"/>
-              </a:rPr>
-              <a:t>На вход построчно подается неизвестное количество строк в формате: число, знак операции, число, знак операции и т.д.</a:t>
-            </a:r>
-            <a:endParaRPr lang="en-US" dirty="0" smtClean="0">
-              <a:latin typeface="Times New Roman" pitchFamily="18" charset="0"/>
-              <a:cs typeface="Times New Roman" pitchFamily="18" charset="0"/>
-            </a:endParaRPr>
-          </a:p>
-          <a:p>
-            <a:pPr algn="just"/>
-            <a:r>
-              <a:rPr lang="ru-RU" dirty="0" smtClean="0">
-                <a:latin typeface="Times New Roman" pitchFamily="18" charset="0"/>
-                <a:cs typeface="Times New Roman" pitchFamily="18" charset="0"/>
-              </a:rPr>
-              <a:t>Выведите полученный результат, если он стал отрицательным, и прекратите выполнение программы.</a:t>
-            </a:r>
-            <a:endParaRPr lang="ru-RU" dirty="0">
-              <a:latin typeface="Times New Roman" pitchFamily="18" charset="0"/>
-              <a:cs typeface="Times New Roman" pitchFamily="18" charset="0"/>
-            </a:endParaRPr>
-          </a:p>
-        </p:txBody>
-      </p:sp>
-      <p:pic>
-        <p:nvPicPr>
-          <p:cNvPr id="2052" name="Picture 4"/>
-          <p:cNvPicPr>
-            <a:picLocks noChangeAspect="1" noChangeArrowheads="1"/>
-          </p:cNvPicPr>
-          <p:nvPr/>
-        </p:nvPicPr>
-        <p:blipFill>
-          <a:blip r:embed="rId5"/>
-          <a:srcRect/>
-          <a:stretch>
-            <a:fillRect/>
-          </a:stretch>
-        </p:blipFill>
-        <p:spPr bwMode="auto">
-          <a:xfrm>
-            <a:off x="3286116" y="3500438"/>
-            <a:ext cx="2571768" cy="3357562"/>
+            <a:off x="4786314" y="5619750"/>
+            <a:ext cx="4029075" cy="1238250"/>
           </a:xfrm>
           <a:prstGeom prst="rect">
             <a:avLst/>
@@ -4911,16 +4881,123 @@
           <a:effectLst/>
         </p:spPr>
       </p:pic>
+    </p:spTree>
+  </p:cSld>
+  <p:clrMapOvr>
+    <a:masterClrMapping/>
+  </p:clrMapOvr>
+</p:sld>
+</file>
+
+<file path=ppt/slides/slide18.xml><?xml version="1.0" encoding="utf-8"?>
+<p:sld xmlns:a="http://schemas.openxmlformats.org/drawingml/2006/main" xmlns:r="http://schemas.openxmlformats.org/officeDocument/2006/relationships" xmlns:p="http://schemas.openxmlformats.org/presentationml/2006/main">
+  <p:cSld>
+    <p:spTree>
+      <p:nvGrpSpPr>
+        <p:cNvPr id="1" name=""/>
+        <p:cNvGrpSpPr/>
+        <p:nvPr/>
+      </p:nvGrpSpPr>
+      <p:grpSpPr>
+        <a:xfrm>
+          <a:off x="0" y="0"/>
+          <a:ext cx="0" cy="0"/>
+          <a:chOff x="0" y="0"/>
+          <a:chExt cx="0" cy="0"/>
+        </a:xfrm>
+      </p:grpSpPr>
+      <p:sp>
+        <p:nvSpPr>
+          <p:cNvPr id="2" name="Прямоугольник 1"/>
+          <p:cNvSpPr/>
+          <p:nvPr/>
+        </p:nvSpPr>
+        <p:spPr>
+          <a:xfrm>
+            <a:off x="2786050" y="0"/>
+            <a:ext cx="3642472" cy="646331"/>
+          </a:xfrm>
+          <a:prstGeom prst="rect">
+            <a:avLst/>
+          </a:prstGeom>
+        </p:spPr>
+        <p:txBody>
+          <a:bodyPr wrap="none">
+            <a:spAutoFit/>
+          </a:bodyPr>
+          <a:lstStyle/>
+          <a:p>
+            <a:r>
+              <a:rPr lang="ru-RU" sz="3600" b="1" dirty="0" smtClean="0">
+                <a:latin typeface="Times New Roman" pitchFamily="18" charset="0"/>
+                <a:cs typeface="Times New Roman" pitchFamily="18" charset="0"/>
+              </a:rPr>
+              <a:t>ИНТЕРФЕЙСЫ</a:t>
+            </a:r>
+            <a:endParaRPr lang="ru-RU" sz="3600" b="1" dirty="0"/>
+          </a:p>
+        </p:txBody>
+      </p:sp>
+      <p:sp>
+        <p:nvSpPr>
+          <p:cNvPr id="4" name="Прямоугольник 3"/>
+          <p:cNvSpPr/>
+          <p:nvPr/>
+        </p:nvSpPr>
+        <p:spPr>
+          <a:xfrm>
+            <a:off x="0" y="571480"/>
+            <a:ext cx="9144000" cy="646331"/>
+          </a:xfrm>
+          <a:prstGeom prst="rect">
+            <a:avLst/>
+          </a:prstGeom>
+        </p:spPr>
+        <p:txBody>
+          <a:bodyPr wrap="square">
+            <a:spAutoFit/>
+          </a:bodyPr>
+          <a:lstStyle/>
+          <a:p>
+            <a:pPr algn="just"/>
+            <a:r>
+              <a:rPr lang="ru-RU" dirty="0" smtClean="0">
+                <a:latin typeface="Times New Roman" pitchFamily="18" charset="0"/>
+                <a:cs typeface="Times New Roman" pitchFamily="18" charset="0"/>
+              </a:rPr>
+              <a:t>Для объявления интерфейса используется ключевое слово </a:t>
+            </a:r>
+            <a:r>
+              <a:rPr lang="ru-RU" dirty="0" err="1" smtClean="0">
+                <a:latin typeface="Times New Roman" pitchFamily="18" charset="0"/>
+                <a:cs typeface="Times New Roman" pitchFamily="18" charset="0"/>
+              </a:rPr>
+              <a:t>interface</a:t>
+            </a:r>
+            <a:r>
+              <a:rPr lang="ru-RU" dirty="0" smtClean="0">
+                <a:latin typeface="Times New Roman" pitchFamily="18" charset="0"/>
+                <a:cs typeface="Times New Roman" pitchFamily="18" charset="0"/>
+              </a:rPr>
+              <a:t>, после которого следует его имя.</a:t>
+            </a:r>
+            <a:endParaRPr lang="ru-RU" dirty="0">
+              <a:latin typeface="Times New Roman" pitchFamily="18" charset="0"/>
+              <a:cs typeface="Times New Roman" pitchFamily="18" charset="0"/>
+            </a:endParaRPr>
+          </a:p>
+        </p:txBody>
+      </p:sp>
       <p:pic>
         <p:nvPicPr>
-          <p:cNvPr id="2053" name="Picture 5"/>
+          <p:cNvPr id="35842" name="Picture 2"/>
           <p:cNvPicPr>
             <a:picLocks noChangeAspect="1" noChangeArrowheads="1"/>
           </p:cNvPicPr>
           <p:nvPr/>
         </p:nvPicPr>
         <p:blipFill>
-          <a:blip r:embed="rId6"/>
+          <a:blip r:embed="rId2"/>
           <a:srcRect/>
           <a:stretch>
             <a:fillRect/>
@@ -4928,8 +5005,8 @@
         </p:blipFill>
         <p:spPr bwMode="auto">
           <a:xfrm>
-            <a:off x="6000760" y="3533775"/>
-            <a:ext cx="2924175" cy="3324225"/>
+            <a:off x="0" y="1142984"/>
+            <a:ext cx="4238625" cy="2219325"/>
           </a:xfrm>
           <a:prstGeom prst="rect">
             <a:avLst/>
@@ -4944,88 +5021,226 @@
           <a:effectLst/>
         </p:spPr>
       </p:pic>
-      <p:sp>
-        <p:nvSpPr>
-          <p:cNvPr id="12" name="Прямоугольник 11"/>
+      <p:pic>
+        <p:nvPicPr>
+          <p:cNvPr id="35843" name="Picture 3"/>
+          <p:cNvPicPr>
+            <a:picLocks noChangeAspect="1" noChangeArrowheads="1"/>
+          </p:cNvPicPr>
+          <p:nvPr/>
+        </p:nvPicPr>
+        <p:blipFill>
+          <a:blip r:embed="rId3"/>
+          <a:srcRect/>
+          <a:stretch>
+            <a:fillRect/>
+          </a:stretch>
+        </p:blipFill>
+        <p:spPr bwMode="auto">
+          <a:xfrm>
+            <a:off x="4352925" y="1142984"/>
+            <a:ext cx="4791075" cy="5324475"/>
+          </a:xfrm>
+          <a:prstGeom prst="rect">
+            <a:avLst/>
+          </a:prstGeom>
+          <a:noFill/>
+          <a:ln w="9525">
+            <a:noFill/>
+            <a:miter lim="800000"/>
+            <a:headEnd/>
+            <a:tailEnd/>
+          </a:ln>
+          <a:effectLst/>
+        </p:spPr>
+      </p:pic>
+      <p:pic>
+        <p:nvPicPr>
+          <p:cNvPr id="35846" name="Picture 6"/>
+          <p:cNvPicPr>
+            <a:picLocks noChangeAspect="1" noChangeArrowheads="1"/>
+          </p:cNvPicPr>
+          <p:nvPr/>
+        </p:nvPicPr>
+        <p:blipFill>
+          <a:blip r:embed="rId4"/>
+          <a:srcRect/>
+          <a:stretch>
+            <a:fillRect/>
+          </a:stretch>
+        </p:blipFill>
+        <p:spPr bwMode="auto">
+          <a:xfrm>
+            <a:off x="928662" y="3714752"/>
+            <a:ext cx="1952625" cy="2828925"/>
+          </a:xfrm>
+          <a:prstGeom prst="rect">
+            <a:avLst/>
+          </a:prstGeom>
+          <a:noFill/>
+          <a:ln w="9525">
+            <a:noFill/>
+            <a:miter lim="800000"/>
+            <a:headEnd/>
+            <a:tailEnd/>
+          </a:ln>
+          <a:effectLst/>
+        </p:spPr>
+      </p:pic>
+    </p:spTree>
+  </p:cSld>
+  <p:clrMapOvr>
+    <a:masterClrMapping/>
+  </p:clrMapOvr>
+</p:sld>
+</file>
+
+<file path=ppt/slides/slide19.xml><?xml version="1.0" encoding="utf-8"?>
+<p:sld xmlns:a="http://schemas.openxmlformats.org/drawingml/2006/main" xmlns:r="http://schemas.openxmlformats.org/officeDocument/2006/relationships" xmlns:p="http://schemas.openxmlformats.org/presentationml/2006/main">
+  <p:cSld>
+    <p:spTree>
+      <p:nvGrpSpPr>
+        <p:cNvPr id="1" name=""/>
+        <p:cNvGrpSpPr/>
+        <p:nvPr/>
+      </p:nvGrpSpPr>
+      <p:grpSpPr>
+        <a:xfrm>
+          <a:off x="0" y="0"/>
+          <a:ext cx="0" cy="0"/>
+          <a:chOff x="0" y="0"/>
+          <a:chExt cx="0" cy="0"/>
+        </a:xfrm>
+      </p:grpSpPr>
+      <p:pic>
+        <p:nvPicPr>
+          <p:cNvPr id="39939" name="Picture 3"/>
+          <p:cNvPicPr>
+            <a:picLocks noChangeAspect="1" noChangeArrowheads="1"/>
+          </p:cNvPicPr>
+          <p:nvPr/>
+        </p:nvPicPr>
+        <p:blipFill>
+          <a:blip r:embed="rId2"/>
+          <a:srcRect/>
+          <a:stretch>
+            <a:fillRect/>
+          </a:stretch>
+        </p:blipFill>
+        <p:spPr bwMode="auto">
+          <a:xfrm>
+            <a:off x="1" y="1"/>
+            <a:ext cx="4286247" cy="2928346"/>
+          </a:xfrm>
+          <a:prstGeom prst="rect">
+            <a:avLst/>
+          </a:prstGeom>
+          <a:noFill/>
+          <a:ln w="9525">
+            <a:noFill/>
+            <a:miter lim="800000"/>
+            <a:headEnd/>
+            <a:tailEnd/>
+          </a:ln>
+          <a:effectLst/>
+        </p:spPr>
+      </p:pic>
+      <p:pic>
+        <p:nvPicPr>
+          <p:cNvPr id="39940" name="Picture 4"/>
+          <p:cNvPicPr>
+            <a:picLocks noChangeAspect="1" noChangeArrowheads="1"/>
+          </p:cNvPicPr>
+          <p:nvPr/>
+        </p:nvPicPr>
+        <p:blipFill>
+          <a:blip r:embed="rId3"/>
+          <a:srcRect/>
+          <a:stretch>
+            <a:fillRect/>
+          </a:stretch>
+        </p:blipFill>
+        <p:spPr bwMode="auto">
+          <a:xfrm>
+            <a:off x="3643306" y="2734310"/>
+            <a:ext cx="5500694" cy="4123690"/>
+          </a:xfrm>
+          <a:prstGeom prst="rect">
+            <a:avLst/>
+          </a:prstGeom>
+          <a:noFill/>
+          <a:ln w="9525">
+            <a:noFill/>
+            <a:miter lim="800000"/>
+            <a:headEnd/>
+            <a:tailEnd/>
+          </a:ln>
+          <a:effectLst/>
+        </p:spPr>
+      </p:pic>
+      <p:pic>
+        <p:nvPicPr>
+          <p:cNvPr id="39941" name="Picture 5"/>
+          <p:cNvPicPr>
+            <a:picLocks noChangeAspect="1" noChangeArrowheads="1"/>
+          </p:cNvPicPr>
+          <p:nvPr/>
+        </p:nvPicPr>
+        <p:blipFill>
+          <a:blip r:embed="rId4"/>
+          <a:srcRect/>
+          <a:stretch>
+            <a:fillRect/>
+          </a:stretch>
+        </p:blipFill>
+        <p:spPr bwMode="auto">
+          <a:xfrm>
+            <a:off x="357158" y="3786190"/>
+            <a:ext cx="2993369" cy="2571768"/>
+          </a:xfrm>
+          <a:prstGeom prst="rect">
+            <a:avLst/>
+          </a:prstGeom>
+          <a:noFill/>
+          <a:ln w="9525">
+            <a:noFill/>
+            <a:miter lim="800000"/>
+            <a:headEnd/>
+            <a:tailEnd/>
+          </a:ln>
+          <a:effectLst/>
+        </p:spPr>
+      </p:pic>
+      <p:sp>
+        <p:nvSpPr>
+          <p:cNvPr id="6" name="Прямоугольник 5"/>
           <p:cNvSpPr/>
           <p:nvPr/>
         </p:nvSpPr>
         <p:spPr>
           <a:xfrm>
-            <a:off x="0" y="6072206"/>
-            <a:ext cx="3214678" cy="646331"/>
+            <a:off x="4429124" y="714356"/>
+            <a:ext cx="4572000" cy="830997"/>
           </a:xfrm>
           <a:prstGeom prst="rect">
             <a:avLst/>
           </a:prstGeom>
         </p:spPr>
         <p:txBody>
-          <a:bodyPr wrap="square">
+          <a:bodyPr>
             <a:spAutoFit/>
           </a:bodyPr>
           <a:lstStyle/>
           <a:p>
-            <a:pPr algn="ctr"/>
-            <a:r>
-              <a:rPr lang="en-US" b="1" dirty="0" smtClean="0">
-                <a:latin typeface="Times New Roman" pitchFamily="18" charset="0"/>
-                <a:cs typeface="Times New Roman" pitchFamily="18" charset="0"/>
-                <a:hlinkClick r:id="rId7"/>
-              </a:rPr>
-              <a:t>https://stepik.org/lesson/588411/step/6?unit=583364</a:t>
-            </a:r>
-            <a:endParaRPr lang="en-US" b="1" dirty="0" smtClean="0">
-              <a:latin typeface="Times New Roman" pitchFamily="18" charset="0"/>
-              <a:cs typeface="Times New Roman" pitchFamily="18" charset="0"/>
-            </a:endParaRPr>
-          </a:p>
-        </p:txBody>
-      </p:sp>
-      <p:sp>
-        <p:nvSpPr>
-          <p:cNvPr id="13" name="Прямоугольник 12"/>
-          <p:cNvSpPr/>
-          <p:nvPr/>
-        </p:nvSpPr>
-        <p:spPr>
-          <a:xfrm>
-            <a:off x="0" y="0"/>
-            <a:ext cx="9144000" cy="369332"/>
-          </a:xfrm>
-          <a:prstGeom prst="rect">
-            <a:avLst/>
-          </a:prstGeom>
-        </p:spPr>
-        <p:txBody>
-          <a:bodyPr wrap="square">
-            <a:spAutoFit/>
-          </a:bodyPr>
-          <a:lstStyle/>
-          <a:p>
-            <a:pPr algn="ctr"/>
-            <a:r>
-              <a:rPr lang="ru-RU" b="1" dirty="0" smtClean="0">
-                <a:latin typeface="Times New Roman" pitchFamily="18" charset="0"/>
-                <a:cs typeface="Times New Roman" pitchFamily="18" charset="0"/>
-              </a:rPr>
-              <a:t>Онлайн С</a:t>
-            </a:r>
-            <a:r>
-              <a:rPr lang="en-US" b="1" dirty="0" smtClean="0">
-                <a:latin typeface="Times New Roman" pitchFamily="18" charset="0"/>
-                <a:cs typeface="Times New Roman" pitchFamily="18" charset="0"/>
-              </a:rPr>
-              <a:t>#:</a:t>
-            </a:r>
-            <a:r>
-              <a:rPr lang="en-US" b="1" dirty="0" smtClean="0">
-                <a:latin typeface="Times New Roman" pitchFamily="18" charset="0"/>
-                <a:cs typeface="Times New Roman" pitchFamily="18" charset="0"/>
-                <a:hlinkClick r:id="rId8"/>
-              </a:rPr>
-              <a:t> https://www.online-compiler.com/en/compiler/csharp</a:t>
-            </a:r>
-            <a:endParaRPr lang="en-US" b="1" dirty="0" smtClean="0">
+            <a:pPr algn="just"/>
+            <a:r>
+              <a:rPr lang="ru-RU" sz="2400" b="1" dirty="0" smtClean="0">
+                <a:latin typeface="Times New Roman" pitchFamily="18" charset="0"/>
+                <a:cs typeface="Times New Roman" pitchFamily="18" charset="0"/>
+              </a:rPr>
+              <a:t>Практический пример для иллюстрации (краткий)</a:t>
+            </a:r>
+            <a:endParaRPr lang="ru-RU" sz="2400" dirty="0">
               <a:latin typeface="Times New Roman" pitchFamily="18" charset="0"/>
               <a:cs typeface="Times New Roman" pitchFamily="18" charset="0"/>
             </a:endParaRPr>
@@ -5057,29 +5272,156 @@
           <a:chExt cx="0" cy="0"/>
         </a:xfrm>
       </p:grpSpPr>
-      <p:sp>
-        <p:nvSpPr>
-          <p:cNvPr id="2" name="Заголовок 1"/>
-          <p:cNvSpPr>
-            <a:spLocks noGrp="1"/>
-          </p:cNvSpPr>
-          <p:nvPr>
-            <p:ph type="title"/>
-          </p:nvPr>
-        </p:nvSpPr>
-        <p:spPr/>
-        <p:txBody>
-          <a:bodyPr/>
-          <a:lstStyle/>
-          <a:p>
-            <a:r>
-              <a:rPr lang="ru-RU" dirty="0" smtClean="0"/>
-              <a:t>Теоретический материал</a:t>
-            </a:r>
-            <a:endParaRPr lang="ru-RU" dirty="0"/>
-          </a:p>
-        </p:txBody>
-      </p:sp>
+      <p:pic>
+        <p:nvPicPr>
+          <p:cNvPr id="1026" name="Picture 2" descr="https://ucarecdn.stepik.net/97b172aa-9da4-4b37-b3b5-3db999351974/"/>
+          <p:cNvPicPr>
+            <a:picLocks noChangeAspect="1" noChangeArrowheads="1"/>
+          </p:cNvPicPr>
+          <p:nvPr/>
+        </p:nvPicPr>
+        <p:blipFill>
+          <a:blip r:embed="rId2"/>
+          <a:srcRect/>
+          <a:stretch>
+            <a:fillRect/>
+          </a:stretch>
+        </p:blipFill>
+        <p:spPr bwMode="auto">
+          <a:xfrm>
+            <a:off x="1428728" y="0"/>
+            <a:ext cx="6257925" cy="3028950"/>
+          </a:xfrm>
+          <a:prstGeom prst="rect">
+            <a:avLst/>
+          </a:prstGeom>
+          <a:noFill/>
+        </p:spPr>
+      </p:pic>
+      <p:pic>
+        <p:nvPicPr>
+          <p:cNvPr id="1028" name="Picture 4"/>
+          <p:cNvPicPr>
+            <a:picLocks noChangeAspect="1" noChangeArrowheads="1"/>
+          </p:cNvPicPr>
+          <p:nvPr/>
+        </p:nvPicPr>
+        <p:blipFill>
+          <a:blip r:embed="rId3"/>
+          <a:srcRect l="4128"/>
+          <a:stretch>
+            <a:fillRect/>
+          </a:stretch>
+        </p:blipFill>
+        <p:spPr bwMode="auto">
+          <a:xfrm>
+            <a:off x="0" y="3267075"/>
+            <a:ext cx="4976843" cy="3590925"/>
+          </a:xfrm>
+          <a:prstGeom prst="rect">
+            <a:avLst/>
+          </a:prstGeom>
+          <a:noFill/>
+          <a:ln w="9525">
+            <a:noFill/>
+            <a:miter lim="800000"/>
+            <a:headEnd/>
+            <a:tailEnd/>
+          </a:ln>
+          <a:effectLst/>
+        </p:spPr>
+      </p:pic>
+      <p:pic>
+        <p:nvPicPr>
+          <p:cNvPr id="1029" name="Picture 5"/>
+          <p:cNvPicPr>
+            <a:picLocks noChangeAspect="1" noChangeArrowheads="1"/>
+          </p:cNvPicPr>
+          <p:nvPr/>
+        </p:nvPicPr>
+        <p:blipFill>
+          <a:blip r:embed="rId4"/>
+          <a:srcRect l="5357"/>
+          <a:stretch>
+            <a:fillRect/>
+          </a:stretch>
+        </p:blipFill>
+        <p:spPr bwMode="auto">
+          <a:xfrm>
+            <a:off x="5072066" y="4286256"/>
+            <a:ext cx="4071934" cy="600075"/>
+          </a:xfrm>
+          <a:prstGeom prst="rect">
+            <a:avLst/>
+          </a:prstGeom>
+          <a:noFill/>
+          <a:ln w="9525">
+            <a:noFill/>
+            <a:miter lim="800000"/>
+            <a:headEnd/>
+            <a:tailEnd/>
+          </a:ln>
+          <a:effectLst/>
+        </p:spPr>
+      </p:pic>
+    </p:spTree>
+  </p:cSld>
+  <p:clrMapOvr>
+    <a:masterClrMapping/>
+  </p:clrMapOvr>
+</p:sld>
+</file>
+
+<file path=ppt/slides/slide20.xml><?xml version="1.0" encoding="utf-8"?>
+<p:sld xmlns:a="http://schemas.openxmlformats.org/drawingml/2006/main" xmlns:r="http://schemas.openxmlformats.org/officeDocument/2006/relationships" xmlns:p="http://schemas.openxmlformats.org/presentationml/2006/main">
+  <p:cSld>
+    <p:spTree>
+      <p:nvGrpSpPr>
+        <p:cNvPr id="1" name=""/>
+        <p:cNvGrpSpPr/>
+        <p:nvPr/>
+      </p:nvGrpSpPr>
+      <p:grpSpPr>
+        <a:xfrm>
+          <a:off x="0" y="0"/>
+          <a:ext cx="0" cy="0"/>
+          <a:chOff x="0" y="0"/>
+          <a:chExt cx="0" cy="0"/>
+        </a:xfrm>
+      </p:grpSpPr>
+      <p:pic>
+        <p:nvPicPr>
+          <p:cNvPr id="36866" name="Picture 2"/>
+          <p:cNvPicPr>
+            <a:picLocks noChangeAspect="1" noChangeArrowheads="1"/>
+          </p:cNvPicPr>
+          <p:nvPr/>
+        </p:nvPicPr>
+        <p:blipFill>
+          <a:blip r:embed="rId2"/>
+          <a:srcRect/>
+          <a:stretch>
+            <a:fillRect/>
+          </a:stretch>
+        </p:blipFill>
+        <p:spPr bwMode="auto">
+          <a:xfrm>
+            <a:off x="357158" y="928670"/>
+            <a:ext cx="8191515" cy="5605494"/>
+          </a:xfrm>
+          <a:prstGeom prst="rect">
+            <a:avLst/>
+          </a:prstGeom>
+          <a:noFill/>
+          <a:ln w="9525">
+            <a:noFill/>
+            <a:miter lim="800000"/>
+            <a:headEnd/>
+            <a:tailEnd/>
+          </a:ln>
+          <a:effectLst/>
+        </p:spPr>
+      </p:pic>
       <p:sp>
         <p:nvSpPr>
           <p:cNvPr id="3" name="Прямоугольник 2"/>
@@ -5088,12 +5430,232 @@
         </p:nvSpPr>
         <p:spPr>
           <a:xfrm>
-            <a:off x="1" y="1428736"/>
-            <a:ext cx="9144000" cy="1384995"/>
+            <a:off x="1071538" y="0"/>
+            <a:ext cx="6754157" cy="646331"/>
           </a:xfrm>
           <a:prstGeom prst="rect">
             <a:avLst/>
           </a:prstGeom>
+        </p:spPr>
+        <p:txBody>
+          <a:bodyPr wrap="none">
+            <a:spAutoFit/>
+          </a:bodyPr>
+          <a:lstStyle/>
+          <a:p>
+            <a:r>
+              <a:rPr lang="ru-RU" sz="3600" b="1" dirty="0" smtClean="0">
+                <a:latin typeface="Times New Roman" pitchFamily="18" charset="0"/>
+                <a:cs typeface="Times New Roman" pitchFamily="18" charset="0"/>
+              </a:rPr>
+              <a:t>ОБРАБОТКА ИСКЛЮЧЕНИЙ</a:t>
+            </a:r>
+            <a:endParaRPr lang="ru-RU" sz="3600" b="1" dirty="0"/>
+          </a:p>
+        </p:txBody>
+      </p:sp>
+    </p:spTree>
+  </p:cSld>
+  <p:clrMapOvr>
+    <a:masterClrMapping/>
+  </p:clrMapOvr>
+</p:sld>
+</file>
+
+<file path=ppt/slides/slide21.xml><?xml version="1.0" encoding="utf-8"?>
+<p:sld xmlns:a="http://schemas.openxmlformats.org/drawingml/2006/main" xmlns:r="http://schemas.openxmlformats.org/officeDocument/2006/relationships" xmlns:p="http://schemas.openxmlformats.org/presentationml/2006/main">
+  <p:cSld>
+    <p:spTree>
+      <p:nvGrpSpPr>
+        <p:cNvPr id="1" name=""/>
+        <p:cNvGrpSpPr/>
+        <p:nvPr/>
+      </p:nvGrpSpPr>
+      <p:grpSpPr>
+        <a:xfrm>
+          <a:off x="0" y="0"/>
+          <a:ext cx="0" cy="0"/>
+          <a:chOff x="0" y="0"/>
+          <a:chExt cx="0" cy="0"/>
+        </a:xfrm>
+      </p:grpSpPr>
+      <p:pic>
+        <p:nvPicPr>
+          <p:cNvPr id="37890" name="Picture 2"/>
+          <p:cNvPicPr>
+            <a:picLocks noChangeAspect="1" noChangeArrowheads="1"/>
+          </p:cNvPicPr>
+          <p:nvPr/>
+        </p:nvPicPr>
+        <p:blipFill>
+          <a:blip r:embed="rId2"/>
+          <a:srcRect/>
+          <a:stretch>
+            <a:fillRect/>
+          </a:stretch>
+        </p:blipFill>
+        <p:spPr bwMode="auto">
+          <a:xfrm>
+            <a:off x="0" y="1"/>
+            <a:ext cx="6143625" cy="3571876"/>
+          </a:xfrm>
+          <a:prstGeom prst="rect">
+            <a:avLst/>
+          </a:prstGeom>
+          <a:noFill/>
+          <a:ln w="9525">
+            <a:noFill/>
+            <a:miter lim="800000"/>
+            <a:headEnd/>
+            <a:tailEnd/>
+          </a:ln>
+          <a:effectLst/>
+        </p:spPr>
+      </p:pic>
+      <p:pic>
+        <p:nvPicPr>
+          <p:cNvPr id="37891" name="Picture 3"/>
+          <p:cNvPicPr>
+            <a:picLocks noChangeAspect="1" noChangeArrowheads="1"/>
+          </p:cNvPicPr>
+          <p:nvPr/>
+        </p:nvPicPr>
+        <p:blipFill>
+          <a:blip r:embed="rId3"/>
+          <a:srcRect/>
+          <a:stretch>
+            <a:fillRect/>
+          </a:stretch>
+        </p:blipFill>
+        <p:spPr bwMode="auto">
+          <a:xfrm>
+            <a:off x="4410075" y="0"/>
+            <a:ext cx="4733925" cy="1800225"/>
+          </a:xfrm>
+          <a:prstGeom prst="rect">
+            <a:avLst/>
+          </a:prstGeom>
+          <a:noFill/>
+          <a:ln w="9525">
+            <a:noFill/>
+            <a:miter lim="800000"/>
+            <a:headEnd/>
+            <a:tailEnd/>
+          </a:ln>
+          <a:effectLst/>
+        </p:spPr>
+      </p:pic>
+      <p:pic>
+        <p:nvPicPr>
+          <p:cNvPr id="37892" name="Picture 4"/>
+          <p:cNvPicPr>
+            <a:picLocks noChangeAspect="1" noChangeArrowheads="1"/>
+          </p:cNvPicPr>
+          <p:nvPr/>
+        </p:nvPicPr>
+        <p:blipFill>
+          <a:blip r:embed="rId4"/>
+          <a:srcRect/>
+          <a:stretch>
+            <a:fillRect/>
+          </a:stretch>
+        </p:blipFill>
+        <p:spPr bwMode="auto">
+          <a:xfrm>
+            <a:off x="0" y="3609975"/>
+            <a:ext cx="7486650" cy="3248025"/>
+          </a:xfrm>
+          <a:prstGeom prst="rect">
+            <a:avLst/>
+          </a:prstGeom>
+          <a:noFill/>
+          <a:ln w="9525">
+            <a:noFill/>
+            <a:miter lim="800000"/>
+            <a:headEnd/>
+            <a:tailEnd/>
+          </a:ln>
+          <a:effectLst/>
+        </p:spPr>
+      </p:pic>
+      <p:pic>
+        <p:nvPicPr>
+          <p:cNvPr id="37893" name="Picture 5"/>
+          <p:cNvPicPr>
+            <a:picLocks noChangeAspect="1" noChangeArrowheads="1"/>
+          </p:cNvPicPr>
+          <p:nvPr/>
+        </p:nvPicPr>
+        <p:blipFill>
+          <a:blip r:embed="rId5"/>
+          <a:srcRect/>
+          <a:stretch>
+            <a:fillRect/>
+          </a:stretch>
+        </p:blipFill>
+        <p:spPr bwMode="auto">
+          <a:xfrm>
+            <a:off x="5715008" y="3500438"/>
+            <a:ext cx="3428992" cy="2411511"/>
+          </a:xfrm>
+          <a:prstGeom prst="rect">
+            <a:avLst/>
+          </a:prstGeom>
+          <a:noFill/>
+          <a:ln w="9525">
+            <a:noFill/>
+            <a:miter lim="800000"/>
+            <a:headEnd/>
+            <a:tailEnd/>
+          </a:ln>
+          <a:effectLst/>
+        </p:spPr>
+      </p:pic>
+    </p:spTree>
+  </p:cSld>
+  <p:clrMapOvr>
+    <a:masterClrMapping/>
+  </p:clrMapOvr>
+</p:sld>
+</file>
+
+<file path=ppt/slides/slide22.xml><?xml version="1.0" encoding="utf-8"?>
+<p:sld xmlns:a="http://schemas.openxmlformats.org/drawingml/2006/main" xmlns:r="http://schemas.openxmlformats.org/officeDocument/2006/relationships" xmlns:p="http://schemas.openxmlformats.org/presentationml/2006/main">
+  <p:cSld>
+    <p:spTree>
+      <p:nvGrpSpPr>
+        <p:cNvPr id="1" name=""/>
+        <p:cNvGrpSpPr/>
+        <p:nvPr/>
+      </p:nvGrpSpPr>
+      <p:grpSpPr>
+        <a:xfrm>
+          <a:off x="0" y="0"/>
+          <a:ext cx="0" cy="0"/>
+          <a:chOff x="0" y="0"/>
+          <a:chExt cx="0" cy="0"/>
+        </a:xfrm>
+      </p:grpSpPr>
+      <p:sp>
+        <p:nvSpPr>
+          <p:cNvPr id="3" name="Прямоугольник 2"/>
+          <p:cNvSpPr/>
+          <p:nvPr/>
+        </p:nvSpPr>
+        <p:spPr>
+          <a:xfrm>
+            <a:off x="0" y="2887682"/>
+            <a:ext cx="9144000" cy="3970318"/>
+          </a:xfrm>
+          <a:prstGeom prst="rect">
+            <a:avLst/>
+          </a:prstGeom>
+          <a:solidFill>
+            <a:schemeClr val="accent3">
+              <a:lumMod val="20000"/>
+              <a:lumOff val="80000"/>
+            </a:schemeClr>
+          </a:solidFill>
         </p:spPr>
         <p:txBody>
           <a:bodyPr wrap="square">
@@ -5103,51 +5665,617 @@
           <a:p>
             <a:pPr algn="just"/>
             <a:r>
-              <a:rPr lang="ru-RU" sz="2800" b="1" dirty="0" smtClean="0">
-                <a:latin typeface="Times New Roman" pitchFamily="18" charset="0"/>
-                <a:cs typeface="Times New Roman" pitchFamily="18" charset="0"/>
-              </a:rPr>
-              <a:t>Шпаргалка: </a:t>
-            </a:r>
-            <a:endParaRPr lang="en-US" sz="2800" b="1" dirty="0" smtClean="0">
+              <a:rPr lang="ru-RU" sz="1400" b="1" dirty="0" smtClean="0">
+                <a:latin typeface="Courier New" pitchFamily="49" charset="0"/>
+                <a:cs typeface="Courier New" pitchFamily="49" charset="0"/>
+              </a:rPr>
+              <a:t>Задан интерфейс </a:t>
+            </a:r>
+            <a:r>
+              <a:rPr lang="en-US" sz="1400" b="1" dirty="0" err="1" smtClean="0">
+                <a:latin typeface="Courier New" pitchFamily="49" charset="0"/>
+                <a:cs typeface="Courier New" pitchFamily="49" charset="0"/>
+              </a:rPr>
+              <a:t>IDrawable</a:t>
+            </a:r>
+            <a:r>
+              <a:rPr lang="en-US" sz="1400" b="1" dirty="0" smtClean="0">
+                <a:latin typeface="Courier New" pitchFamily="49" charset="0"/>
+                <a:cs typeface="Courier New" pitchFamily="49" charset="0"/>
+              </a:rPr>
+              <a:t> </a:t>
+            </a:r>
+            <a:r>
+              <a:rPr lang="ru-RU" sz="1400" b="1" dirty="0" smtClean="0">
+                <a:latin typeface="Courier New" pitchFamily="49" charset="0"/>
+                <a:cs typeface="Courier New" pitchFamily="49" charset="0"/>
+              </a:rPr>
+              <a:t>следующего вида:</a:t>
+            </a:r>
+          </a:p>
+          <a:p>
+            <a:pPr algn="just"/>
+            <a:r>
+              <a:rPr lang="en-US" sz="1400" dirty="0" smtClean="0">
+                <a:latin typeface="Courier New" pitchFamily="49" charset="0"/>
+                <a:cs typeface="Courier New" pitchFamily="49" charset="0"/>
+              </a:rPr>
+              <a:t>interface </a:t>
+            </a:r>
+            <a:r>
+              <a:rPr lang="en-US" sz="1400" dirty="0" err="1" smtClean="0">
+                <a:latin typeface="Courier New" pitchFamily="49" charset="0"/>
+                <a:cs typeface="Courier New" pitchFamily="49" charset="0"/>
+              </a:rPr>
+              <a:t>IDrawable</a:t>
+            </a:r>
+            <a:endParaRPr lang="en-US" sz="1400" dirty="0" smtClean="0">
+              <a:latin typeface="Courier New" pitchFamily="49" charset="0"/>
+              <a:cs typeface="Courier New" pitchFamily="49" charset="0"/>
+            </a:endParaRPr>
+          </a:p>
+          <a:p>
+            <a:pPr algn="just"/>
+            <a:r>
+              <a:rPr lang="en-US" sz="1400" dirty="0" smtClean="0">
+                <a:latin typeface="Courier New" pitchFamily="49" charset="0"/>
+                <a:cs typeface="Courier New" pitchFamily="49" charset="0"/>
+              </a:rPr>
+              <a:t>{</a:t>
+            </a:r>
+          </a:p>
+          <a:p>
+            <a:pPr algn="just"/>
+            <a:r>
+              <a:rPr lang="en-US" sz="1400" dirty="0" smtClean="0">
+                <a:latin typeface="Courier New" pitchFamily="49" charset="0"/>
+                <a:cs typeface="Courier New" pitchFamily="49" charset="0"/>
+              </a:rPr>
+              <a:t>    void Draw();</a:t>
+            </a:r>
+          </a:p>
+          <a:p>
+            <a:pPr algn="just"/>
+            <a:r>
+              <a:rPr lang="en-US" sz="1400" dirty="0" smtClean="0">
+                <a:latin typeface="Courier New" pitchFamily="49" charset="0"/>
+                <a:cs typeface="Courier New" pitchFamily="49" charset="0"/>
+              </a:rPr>
+              <a:t>}</a:t>
+            </a:r>
+          </a:p>
+          <a:p>
+            <a:pPr algn="just"/>
+            <a:r>
+              <a:rPr lang="ru-RU" sz="1400" b="1" dirty="0" smtClean="0">
+                <a:latin typeface="Courier New" pitchFamily="49" charset="0"/>
+                <a:cs typeface="Courier New" pitchFamily="49" charset="0"/>
+              </a:rPr>
+              <a:t>Напишите реализацию интерфейса с именем </a:t>
+            </a:r>
+            <a:r>
+              <a:rPr lang="en-US" sz="1400" b="1" dirty="0" smtClean="0">
+                <a:latin typeface="Courier New" pitchFamily="49" charset="0"/>
+                <a:cs typeface="Courier New" pitchFamily="49" charset="0"/>
+              </a:rPr>
+              <a:t>Figure, </a:t>
+            </a:r>
+            <a:r>
+              <a:rPr lang="ru-RU" sz="1400" b="1" dirty="0" smtClean="0">
+                <a:latin typeface="Courier New" pitchFamily="49" charset="0"/>
+                <a:cs typeface="Courier New" pitchFamily="49" charset="0"/>
+              </a:rPr>
+              <a:t>которая при вызове </a:t>
+            </a:r>
+            <a:r>
+              <a:rPr lang="en-US" sz="1400" b="1" dirty="0" smtClean="0">
+                <a:latin typeface="Courier New" pitchFamily="49" charset="0"/>
+                <a:cs typeface="Courier New" pitchFamily="49" charset="0"/>
+              </a:rPr>
+              <a:t>Draw </a:t>
+            </a:r>
+            <a:r>
+              <a:rPr lang="ru-RU" sz="1400" b="1" dirty="0" smtClean="0">
+                <a:latin typeface="Courier New" pitchFamily="49" charset="0"/>
+                <a:cs typeface="Courier New" pitchFamily="49" charset="0"/>
+              </a:rPr>
+              <a:t>выводит на консоль сообщение "</a:t>
+            </a:r>
+            <a:r>
+              <a:rPr lang="en-US" sz="1400" b="1" dirty="0" smtClean="0">
+                <a:latin typeface="Courier New" pitchFamily="49" charset="0"/>
+                <a:cs typeface="Courier New" pitchFamily="49" charset="0"/>
+              </a:rPr>
+              <a:t>Draw Figure".</a:t>
+            </a:r>
+          </a:p>
+          <a:p>
+            <a:pPr algn="just"/>
+            <a:r>
+              <a:rPr lang="en-US" sz="1400" dirty="0" smtClean="0">
+                <a:latin typeface="Courier New" pitchFamily="49" charset="0"/>
+                <a:cs typeface="Courier New" pitchFamily="49" charset="0"/>
+              </a:rPr>
+              <a:t>using System;</a:t>
+            </a:r>
+          </a:p>
+          <a:p>
+            <a:pPr algn="just"/>
+            <a:endParaRPr lang="en-US" sz="1400" dirty="0" smtClean="0">
+              <a:latin typeface="Courier New" pitchFamily="49" charset="0"/>
+              <a:cs typeface="Courier New" pitchFamily="49" charset="0"/>
+            </a:endParaRPr>
+          </a:p>
+          <a:p>
+            <a:pPr algn="just"/>
+            <a:r>
+              <a:rPr lang="en-US" sz="1400" dirty="0" err="1" smtClean="0">
+                <a:latin typeface="Courier New" pitchFamily="49" charset="0"/>
+                <a:cs typeface="Courier New" pitchFamily="49" charset="0"/>
+              </a:rPr>
+              <a:t>var</a:t>
+            </a:r>
+            <a:r>
+              <a:rPr lang="en-US" sz="1400" dirty="0" smtClean="0">
+                <a:latin typeface="Courier New" pitchFamily="49" charset="0"/>
+                <a:cs typeface="Courier New" pitchFamily="49" charset="0"/>
+              </a:rPr>
+              <a:t> </a:t>
+            </a:r>
+            <a:r>
+              <a:rPr lang="en-US" sz="1400" dirty="0" err="1" smtClean="0">
+                <a:latin typeface="Courier New" pitchFamily="49" charset="0"/>
+                <a:cs typeface="Courier New" pitchFamily="49" charset="0"/>
+              </a:rPr>
+              <a:t>fg</a:t>
+            </a:r>
+            <a:r>
+              <a:rPr lang="en-US" sz="1400" dirty="0" smtClean="0">
+                <a:latin typeface="Courier New" pitchFamily="49" charset="0"/>
+                <a:cs typeface="Courier New" pitchFamily="49" charset="0"/>
+              </a:rPr>
+              <a:t> = new Figure();</a:t>
+            </a:r>
+          </a:p>
+          <a:p>
+            <a:pPr algn="just"/>
+            <a:r>
+              <a:rPr lang="en-US" sz="1400" dirty="0" err="1" smtClean="0">
+                <a:latin typeface="Courier New" pitchFamily="49" charset="0"/>
+                <a:cs typeface="Courier New" pitchFamily="49" charset="0"/>
+              </a:rPr>
+              <a:t>fg.Draw</a:t>
+            </a:r>
+            <a:r>
+              <a:rPr lang="en-US" sz="1400" dirty="0" smtClean="0">
+                <a:latin typeface="Courier New" pitchFamily="49" charset="0"/>
+                <a:cs typeface="Courier New" pitchFamily="49" charset="0"/>
+              </a:rPr>
+              <a:t>();</a:t>
+            </a:r>
+          </a:p>
+          <a:p>
+            <a:pPr algn="just"/>
+            <a:endParaRPr lang="en-US" sz="1400" dirty="0" smtClean="0">
+              <a:latin typeface="Courier New" pitchFamily="49" charset="0"/>
+              <a:cs typeface="Courier New" pitchFamily="49" charset="0"/>
+            </a:endParaRPr>
+          </a:p>
+          <a:p>
+            <a:pPr algn="just"/>
+            <a:r>
+              <a:rPr lang="en-US" sz="1400" dirty="0" smtClean="0">
+                <a:latin typeface="Courier New" pitchFamily="49" charset="0"/>
+                <a:cs typeface="Courier New" pitchFamily="49" charset="0"/>
+              </a:rPr>
+              <a:t>// TODO: </a:t>
+            </a:r>
+            <a:r>
+              <a:rPr lang="ru-RU" sz="1400" dirty="0" smtClean="0">
+                <a:latin typeface="Courier New" pitchFamily="49" charset="0"/>
+                <a:cs typeface="Courier New" pitchFamily="49" charset="0"/>
+              </a:rPr>
+              <a:t>Реализовать класс </a:t>
+            </a:r>
+            <a:r>
+              <a:rPr lang="en-US" sz="1400" dirty="0" smtClean="0">
+                <a:latin typeface="Courier New" pitchFamily="49" charset="0"/>
+                <a:cs typeface="Courier New" pitchFamily="49" charset="0"/>
+              </a:rPr>
+              <a:t>Figure, </a:t>
+            </a:r>
+            <a:r>
+              <a:rPr lang="ru-RU" sz="1400" dirty="0" smtClean="0">
+                <a:latin typeface="Courier New" pitchFamily="49" charset="0"/>
+                <a:cs typeface="Courier New" pitchFamily="49" charset="0"/>
+              </a:rPr>
+              <a:t>имплементирующий </a:t>
+            </a:r>
+            <a:r>
+              <a:rPr lang="en-US" sz="1400" dirty="0" err="1" smtClean="0">
+                <a:latin typeface="Courier New" pitchFamily="49" charset="0"/>
+                <a:cs typeface="Courier New" pitchFamily="49" charset="0"/>
+              </a:rPr>
+              <a:t>IDrawable</a:t>
+            </a:r>
+            <a:endParaRPr lang="en-US" sz="1400" dirty="0" smtClean="0">
+              <a:latin typeface="Courier New" pitchFamily="49" charset="0"/>
+              <a:cs typeface="Courier New" pitchFamily="49" charset="0"/>
+            </a:endParaRPr>
+          </a:p>
+          <a:p>
+            <a:pPr algn="just"/>
+            <a:endParaRPr lang="en-US" sz="1400" dirty="0" smtClean="0">
+              <a:latin typeface="Courier New" pitchFamily="49" charset="0"/>
+              <a:cs typeface="Courier New" pitchFamily="49" charset="0"/>
+            </a:endParaRPr>
+          </a:p>
+          <a:p>
+            <a:pPr algn="just"/>
+            <a:r>
+              <a:rPr lang="en-US" sz="1400" dirty="0" smtClean="0">
+                <a:latin typeface="Courier New" pitchFamily="49" charset="0"/>
+                <a:cs typeface="Courier New" pitchFamily="49" charset="0"/>
+              </a:rPr>
+              <a:t>interface </a:t>
+            </a:r>
+            <a:r>
+              <a:rPr lang="en-US" sz="1400" dirty="0" err="1" smtClean="0">
+                <a:latin typeface="Courier New" pitchFamily="49" charset="0"/>
+                <a:cs typeface="Courier New" pitchFamily="49" charset="0"/>
+              </a:rPr>
+              <a:t>IDrawable</a:t>
+            </a:r>
+            <a:endParaRPr lang="en-US" sz="1400" dirty="0" smtClean="0">
+              <a:latin typeface="Courier New" pitchFamily="49" charset="0"/>
+              <a:cs typeface="Courier New" pitchFamily="49" charset="0"/>
+            </a:endParaRPr>
+          </a:p>
+          <a:p>
+            <a:pPr algn="just"/>
+            <a:r>
+              <a:rPr lang="en-US" sz="1400" dirty="0" smtClean="0">
+                <a:latin typeface="Courier New" pitchFamily="49" charset="0"/>
+                <a:cs typeface="Courier New" pitchFamily="49" charset="0"/>
+              </a:rPr>
+              <a:t>{</a:t>
+            </a:r>
+          </a:p>
+          <a:p>
+            <a:pPr algn="just"/>
+            <a:r>
+              <a:rPr lang="en-US" sz="1400" dirty="0" smtClean="0">
+                <a:latin typeface="Courier New" pitchFamily="49" charset="0"/>
+                <a:cs typeface="Courier New" pitchFamily="49" charset="0"/>
+              </a:rPr>
+              <a:t>    void Draw();</a:t>
+            </a:r>
+          </a:p>
+          <a:p>
+            <a:pPr algn="just"/>
+            <a:r>
+              <a:rPr lang="en-US" sz="1400" dirty="0" smtClean="0">
+                <a:latin typeface="Courier New" pitchFamily="49" charset="0"/>
+                <a:cs typeface="Courier New" pitchFamily="49" charset="0"/>
+              </a:rPr>
+              <a:t>}</a:t>
+            </a:r>
+            <a:endParaRPr lang="en-US" sz="1400" dirty="0">
+              <a:latin typeface="Courier New" pitchFamily="49" charset="0"/>
+              <a:cs typeface="Courier New" pitchFamily="49" charset="0"/>
+            </a:endParaRPr>
+          </a:p>
+        </p:txBody>
+      </p:sp>
+      <p:sp>
+        <p:nvSpPr>
+          <p:cNvPr id="4" name="Прямоугольник 3"/>
+          <p:cNvSpPr/>
+          <p:nvPr/>
+        </p:nvSpPr>
+        <p:spPr>
+          <a:xfrm>
+            <a:off x="0" y="0"/>
+            <a:ext cx="9144000" cy="2862322"/>
+          </a:xfrm>
+          <a:prstGeom prst="rect">
+            <a:avLst/>
+          </a:prstGeom>
+          <a:solidFill>
+            <a:schemeClr val="accent6">
+              <a:lumMod val="20000"/>
+              <a:lumOff val="80000"/>
+            </a:schemeClr>
+          </a:solidFill>
+        </p:spPr>
+        <p:txBody>
+          <a:bodyPr wrap="square">
+            <a:spAutoFit/>
+          </a:bodyPr>
+          <a:lstStyle/>
+          <a:p>
+            <a:pPr algn="just">
+              <a:buFont typeface="Arial" pitchFamily="34" charset="0"/>
+              <a:buChar char="•"/>
+            </a:pPr>
+            <a:r>
+              <a:rPr lang="ru-RU" dirty="0" smtClean="0">
+                <a:latin typeface="Times New Roman" pitchFamily="18" charset="0"/>
+                <a:cs typeface="Times New Roman" pitchFamily="18" charset="0"/>
+              </a:rPr>
+              <a:t>Создайте базовый класс </a:t>
+            </a:r>
+            <a:r>
+              <a:rPr lang="en-US" dirty="0" smtClean="0">
+                <a:latin typeface="Times New Roman" pitchFamily="18" charset="0"/>
+                <a:cs typeface="Times New Roman" pitchFamily="18" charset="0"/>
+              </a:rPr>
+              <a:t>Animal </a:t>
+            </a:r>
+            <a:r>
+              <a:rPr lang="ru-RU" dirty="0" smtClean="0">
+                <a:latin typeface="Times New Roman" pitchFamily="18" charset="0"/>
+                <a:cs typeface="Times New Roman" pitchFamily="18" charset="0"/>
+              </a:rPr>
+              <a:t>с методом </a:t>
+            </a:r>
+            <a:r>
+              <a:rPr lang="en-US" dirty="0" smtClean="0">
+                <a:latin typeface="Times New Roman" pitchFamily="18" charset="0"/>
+                <a:cs typeface="Times New Roman" pitchFamily="18" charset="0"/>
+              </a:rPr>
+              <a:t>Speak(). </a:t>
+            </a:r>
+            <a:r>
+              <a:rPr lang="ru-RU" dirty="0" smtClean="0">
+                <a:latin typeface="Times New Roman" pitchFamily="18" charset="0"/>
+                <a:cs typeface="Times New Roman" pitchFamily="18" charset="0"/>
+              </a:rPr>
+              <a:t>Наследуйте от него классы </a:t>
+            </a:r>
+            <a:r>
+              <a:rPr lang="en-US" dirty="0" smtClean="0">
+                <a:latin typeface="Times New Roman" pitchFamily="18" charset="0"/>
+                <a:cs typeface="Times New Roman" pitchFamily="18" charset="0"/>
+              </a:rPr>
+              <a:t>Dog </a:t>
+            </a:r>
+            <a:r>
+              <a:rPr lang="ru-RU" dirty="0" smtClean="0">
+                <a:latin typeface="Times New Roman" pitchFamily="18" charset="0"/>
+                <a:cs typeface="Times New Roman" pitchFamily="18" charset="0"/>
+              </a:rPr>
+              <a:t>и </a:t>
+            </a:r>
+            <a:r>
+              <a:rPr lang="en-US" dirty="0" smtClean="0">
+                <a:latin typeface="Times New Roman" pitchFamily="18" charset="0"/>
+                <a:cs typeface="Times New Roman" pitchFamily="18" charset="0"/>
+              </a:rPr>
+              <a:t>Cat, </a:t>
+            </a:r>
+            <a:r>
+              <a:rPr lang="ru-RU" dirty="0" smtClean="0">
+                <a:latin typeface="Times New Roman" pitchFamily="18" charset="0"/>
+                <a:cs typeface="Times New Roman" pitchFamily="18" charset="0"/>
+              </a:rPr>
+              <a:t>переопределив </a:t>
+            </a:r>
+            <a:r>
+              <a:rPr lang="en-US" dirty="0" smtClean="0">
+                <a:latin typeface="Times New Roman" pitchFamily="18" charset="0"/>
+                <a:cs typeface="Times New Roman" pitchFamily="18" charset="0"/>
+              </a:rPr>
+              <a:t>Speak() </a:t>
+            </a:r>
+            <a:r>
+              <a:rPr lang="ru-RU" dirty="0" smtClean="0">
+                <a:latin typeface="Times New Roman" pitchFamily="18" charset="0"/>
+                <a:cs typeface="Times New Roman" pitchFamily="18" charset="0"/>
+              </a:rPr>
+              <a:t>так, чтобы:</a:t>
+            </a:r>
+          </a:p>
+          <a:p>
+            <a:pPr algn="just"/>
+            <a:r>
+              <a:rPr lang="en-US" dirty="0" err="1" smtClean="0">
+                <a:latin typeface="Times New Roman" pitchFamily="18" charset="0"/>
+                <a:cs typeface="Times New Roman" pitchFamily="18" charset="0"/>
+              </a:rPr>
+              <a:t>Dog.Speak</a:t>
+            </a:r>
+            <a:r>
+              <a:rPr lang="en-US" dirty="0" smtClean="0">
+                <a:latin typeface="Times New Roman" pitchFamily="18" charset="0"/>
+                <a:cs typeface="Times New Roman" pitchFamily="18" charset="0"/>
+              </a:rPr>
+              <a:t>() </a:t>
+            </a:r>
+            <a:r>
+              <a:rPr lang="ru-RU" dirty="0" smtClean="0">
+                <a:latin typeface="Times New Roman" pitchFamily="18" charset="0"/>
+                <a:cs typeface="Times New Roman" pitchFamily="18" charset="0"/>
+              </a:rPr>
+              <a:t>выводил «Гав!»;</a:t>
+            </a:r>
+          </a:p>
+          <a:p>
+            <a:pPr algn="just"/>
+            <a:r>
+              <a:rPr lang="en-US" dirty="0" err="1" smtClean="0">
+                <a:latin typeface="Times New Roman" pitchFamily="18" charset="0"/>
+                <a:cs typeface="Times New Roman" pitchFamily="18" charset="0"/>
+              </a:rPr>
+              <a:t>Cat.Speak</a:t>
+            </a:r>
+            <a:r>
+              <a:rPr lang="en-US" dirty="0" smtClean="0">
+                <a:latin typeface="Times New Roman" pitchFamily="18" charset="0"/>
+                <a:cs typeface="Times New Roman" pitchFamily="18" charset="0"/>
+              </a:rPr>
+              <a:t>() </a:t>
+            </a:r>
+            <a:r>
+              <a:rPr lang="ru-RU" dirty="0" smtClean="0">
+                <a:latin typeface="Times New Roman" pitchFamily="18" charset="0"/>
+                <a:cs typeface="Times New Roman" pitchFamily="18" charset="0"/>
+              </a:rPr>
+              <a:t>выводил «Мяу!».</a:t>
+            </a:r>
+            <a:endParaRPr lang="en-US" dirty="0" smtClean="0">
               <a:latin typeface="Times New Roman" pitchFamily="18" charset="0"/>
               <a:cs typeface="Times New Roman" pitchFamily="18" charset="0"/>
             </a:endParaRPr>
           </a:p>
           <a:p>
+            <a:pPr algn="just">
+              <a:buFont typeface="Arial" pitchFamily="34" charset="0"/>
+              <a:buChar char="•"/>
+            </a:pPr>
+            <a:r>
+              <a:rPr lang="ru-RU" dirty="0" smtClean="0">
+                <a:latin typeface="Times New Roman" pitchFamily="18" charset="0"/>
+                <a:cs typeface="Times New Roman" pitchFamily="18" charset="0"/>
+              </a:rPr>
+              <a:t>Добавьте в </a:t>
+            </a:r>
+            <a:r>
+              <a:rPr lang="ru-RU" dirty="0" err="1" smtClean="0">
+                <a:latin typeface="Times New Roman" pitchFamily="18" charset="0"/>
+                <a:cs typeface="Times New Roman" pitchFamily="18" charset="0"/>
+              </a:rPr>
+              <a:t>Animal</a:t>
+            </a:r>
+            <a:r>
+              <a:rPr lang="ru-RU" dirty="0" smtClean="0">
+                <a:latin typeface="Times New Roman" pitchFamily="18" charset="0"/>
+                <a:cs typeface="Times New Roman" pitchFamily="18" charset="0"/>
+              </a:rPr>
+              <a:t> поле </a:t>
+            </a:r>
+            <a:r>
+              <a:rPr lang="ru-RU" dirty="0" err="1" smtClean="0">
+                <a:latin typeface="Times New Roman" pitchFamily="18" charset="0"/>
+                <a:cs typeface="Times New Roman" pitchFamily="18" charset="0"/>
+              </a:rPr>
+              <a:t>Name</a:t>
+            </a:r>
+            <a:r>
+              <a:rPr lang="ru-RU" dirty="0" smtClean="0">
+                <a:latin typeface="Times New Roman" pitchFamily="18" charset="0"/>
+                <a:cs typeface="Times New Roman" pitchFamily="18" charset="0"/>
+              </a:rPr>
+              <a:t> и конструктор, принимающий имя. В классах </a:t>
+            </a:r>
+            <a:r>
+              <a:rPr lang="ru-RU" dirty="0" err="1" smtClean="0">
+                <a:latin typeface="Times New Roman" pitchFamily="18" charset="0"/>
+                <a:cs typeface="Times New Roman" pitchFamily="18" charset="0"/>
+              </a:rPr>
+              <a:t>Dog</a:t>
+            </a:r>
+            <a:r>
+              <a:rPr lang="ru-RU" dirty="0" smtClean="0">
+                <a:latin typeface="Times New Roman" pitchFamily="18" charset="0"/>
+                <a:cs typeface="Times New Roman" pitchFamily="18" charset="0"/>
+              </a:rPr>
+              <a:t> и </a:t>
+            </a:r>
+            <a:r>
+              <a:rPr lang="ru-RU" dirty="0" err="1" smtClean="0">
+                <a:latin typeface="Times New Roman" pitchFamily="18" charset="0"/>
+                <a:cs typeface="Times New Roman" pitchFamily="18" charset="0"/>
+              </a:rPr>
+              <a:t>Cat</a:t>
+            </a:r>
+            <a:r>
+              <a:rPr lang="ru-RU" dirty="0" smtClean="0">
+                <a:latin typeface="Times New Roman" pitchFamily="18" charset="0"/>
+                <a:cs typeface="Times New Roman" pitchFamily="18" charset="0"/>
+              </a:rPr>
+              <a:t> передайте имя в базовый конструктор. Метод </a:t>
+            </a:r>
+            <a:r>
+              <a:rPr lang="ru-RU" dirty="0" err="1" smtClean="0">
+                <a:latin typeface="Times New Roman" pitchFamily="18" charset="0"/>
+                <a:cs typeface="Times New Roman" pitchFamily="18" charset="0"/>
+              </a:rPr>
+              <a:t>Speak</a:t>
+            </a:r>
+            <a:r>
+              <a:rPr lang="ru-RU" dirty="0" smtClean="0">
+                <a:latin typeface="Times New Roman" pitchFamily="18" charset="0"/>
+                <a:cs typeface="Times New Roman" pitchFamily="18" charset="0"/>
+              </a:rPr>
+              <a:t>() должен выводить:</a:t>
+            </a:r>
+          </a:p>
+          <a:p>
             <a:pPr algn="just"/>
             <a:r>
-              <a:rPr lang="en-US" sz="2800" b="1" dirty="0" smtClean="0">
-                <a:latin typeface="Times New Roman" pitchFamily="18" charset="0"/>
-                <a:cs typeface="Times New Roman" pitchFamily="18" charset="0"/>
-                <a:hlinkClick r:id="rId2"/>
-              </a:rPr>
-              <a:t>https</a:t>
-            </a:r>
-            <a:r>
-              <a:rPr lang="en-US" sz="2800" b="1" dirty="0" smtClean="0">
-                <a:latin typeface="Times New Roman" pitchFamily="18" charset="0"/>
-                <a:cs typeface="Times New Roman" pitchFamily="18" charset="0"/>
-                <a:hlinkClick r:id="rId2"/>
-              </a:rPr>
-              <a:t>://</a:t>
-            </a:r>
-            <a:r>
-              <a:rPr lang="en-US" sz="2800" b="1" dirty="0" smtClean="0">
-                <a:latin typeface="Times New Roman" pitchFamily="18" charset="0"/>
-                <a:cs typeface="Times New Roman" pitchFamily="18" charset="0"/>
-                <a:hlinkClick r:id="rId2"/>
-              </a:rPr>
-              <a:t>disk.360.yandex.ru/i/g-O-LX-QsYG8Lw</a:t>
-            </a:r>
-            <a:endParaRPr lang="en-US" sz="2800" b="1" dirty="0" smtClean="0">
+              <a:rPr lang="ru-RU" dirty="0" smtClean="0">
+                <a:latin typeface="Times New Roman" pitchFamily="18" charset="0"/>
+                <a:cs typeface="Times New Roman" pitchFamily="18" charset="0"/>
+              </a:rPr>
+              <a:t>«Собака [имя] говорит: Гав!»;</a:t>
+            </a:r>
+          </a:p>
+          <a:p>
+            <a:pPr algn="just"/>
+            <a:r>
+              <a:rPr lang="ru-RU" dirty="0" smtClean="0">
+                <a:latin typeface="Times New Roman" pitchFamily="18" charset="0"/>
+                <a:cs typeface="Times New Roman" pitchFamily="18" charset="0"/>
+              </a:rPr>
+              <a:t>«Кошка [имя] говорит: Мяу!».</a:t>
+            </a:r>
+            <a:endParaRPr lang="en-US" dirty="0" smtClean="0">
               <a:latin typeface="Times New Roman" pitchFamily="18" charset="0"/>
               <a:cs typeface="Times New Roman" pitchFamily="18" charset="0"/>
             </a:endParaRPr>
           </a:p>
           <a:p>
-            <a:pPr algn="just"/>
-            <a:endParaRPr lang="ru-RU" sz="2800" b="1" dirty="0">
+            <a:pPr algn="just">
+              <a:buFont typeface="Arial" pitchFamily="34" charset="0"/>
+              <a:buChar char="•"/>
+            </a:pPr>
+            <a:r>
+              <a:rPr lang="ru-RU" dirty="0" smtClean="0">
+                <a:latin typeface="Times New Roman" pitchFamily="18" charset="0"/>
+                <a:cs typeface="Times New Roman" pitchFamily="18" charset="0"/>
+              </a:rPr>
+              <a:t>Сделайте метод </a:t>
+            </a:r>
+            <a:r>
+              <a:rPr lang="ru-RU" dirty="0" err="1" smtClean="0">
+                <a:latin typeface="Times New Roman" pitchFamily="18" charset="0"/>
+                <a:cs typeface="Times New Roman" pitchFamily="18" charset="0"/>
+              </a:rPr>
+              <a:t>Speak</a:t>
+            </a:r>
+            <a:r>
+              <a:rPr lang="ru-RU" dirty="0" smtClean="0">
+                <a:latin typeface="Times New Roman" pitchFamily="18" charset="0"/>
+                <a:cs typeface="Times New Roman" pitchFamily="18" charset="0"/>
+              </a:rPr>
+              <a:t>() абстрактным в </a:t>
+            </a:r>
+            <a:r>
+              <a:rPr lang="ru-RU" dirty="0" err="1" smtClean="0">
+                <a:latin typeface="Times New Roman" pitchFamily="18" charset="0"/>
+                <a:cs typeface="Times New Roman" pitchFamily="18" charset="0"/>
+              </a:rPr>
+              <a:t>Animal</a:t>
+            </a:r>
+            <a:r>
+              <a:rPr lang="ru-RU" dirty="0" smtClean="0">
+                <a:latin typeface="Times New Roman" pitchFamily="18" charset="0"/>
+                <a:cs typeface="Times New Roman" pitchFamily="18" charset="0"/>
+              </a:rPr>
+              <a:t>. Тогда все наследники обязаны его реализовать.</a:t>
+            </a:r>
+            <a:endParaRPr lang="ru-RU" dirty="0">
               <a:latin typeface="Times New Roman" pitchFamily="18" charset="0"/>
               <a:cs typeface="Times New Roman" pitchFamily="18" charset="0"/>
             </a:endParaRPr>
@@ -5181,14 +6309,14 @@
       </p:grpSpPr>
       <p:sp>
         <p:nvSpPr>
-          <p:cNvPr id="2" name="Прямоугольник 1"/>
+          <p:cNvPr id="3" name="Прямоугольник 2"/>
           <p:cNvSpPr/>
           <p:nvPr/>
         </p:nvSpPr>
         <p:spPr>
           <a:xfrm>
             <a:off x="0" y="142852"/>
-            <a:ext cx="9144000" cy="1477328"/>
+            <a:ext cx="9144000" cy="923330"/>
           </a:xfrm>
           <a:prstGeom prst="rect">
             <a:avLst/>
@@ -5206,45 +6334,21 @@
                 <a:latin typeface="Times New Roman" pitchFamily="18" charset="0"/>
                 <a:cs typeface="Times New Roman" pitchFamily="18" charset="0"/>
               </a:rPr>
-              <a:t>В памяти компьютера все данные - будь то звук, изображение или текст - получаются, хранятся и обрабатываются в виде набора </a:t>
-            </a:r>
-            <a:r>
-              <a:rPr lang="ru-RU" b="1" dirty="0">
-                <a:latin typeface="Times New Roman" pitchFamily="18" charset="0"/>
-                <a:cs typeface="Times New Roman" pitchFamily="18" charset="0"/>
-              </a:rPr>
-              <a:t>байт.</a:t>
+              <a:t>Для объявления класса в C# используется ключевое слово </a:t>
+            </a:r>
+            <a:r>
+              <a:rPr lang="ru-RU" dirty="0" err="1" smtClean="0">
+                <a:latin typeface="Times New Roman" pitchFamily="18" charset="0"/>
+                <a:cs typeface="Times New Roman" pitchFamily="18" charset="0"/>
+              </a:rPr>
+              <a:t>class</a:t>
             </a:r>
             <a:r>
               <a:rPr lang="ru-RU" dirty="0" smtClean="0">
                 <a:latin typeface="Times New Roman" pitchFamily="18" charset="0"/>
                 <a:cs typeface="Times New Roman" pitchFamily="18" charset="0"/>
               </a:rPr>
-              <a:t> Но ведь нам нужны звуки, картинки и так далее. Как быть?</a:t>
-            </a:r>
-          </a:p>
-          <a:p>
-            <a:pPr algn="just"/>
-            <a:r>
-              <a:rPr lang="ru-RU" dirty="0" smtClean="0">
-                <a:latin typeface="Times New Roman" pitchFamily="18" charset="0"/>
-                <a:cs typeface="Times New Roman" pitchFamily="18" charset="0"/>
-              </a:rPr>
-              <a:t>В таком случае вводится понятие </a:t>
-            </a:r>
-            <a:r>
-              <a:rPr lang="ru-RU" b="1" dirty="0">
-                <a:latin typeface="Times New Roman" pitchFamily="18" charset="0"/>
-                <a:cs typeface="Times New Roman" pitchFamily="18" charset="0"/>
-              </a:rPr>
-              <a:t>тип данных</a:t>
-            </a:r>
-            <a:r>
-              <a:rPr lang="ru-RU" dirty="0" smtClean="0">
-                <a:latin typeface="Times New Roman" pitchFamily="18" charset="0"/>
-                <a:cs typeface="Times New Roman" pitchFamily="18" charset="0"/>
-              </a:rPr>
-              <a:t> - то, что представляет собой последовательность байт, как её следует воспринимать.</a:t>
+              <a:t>, перед ним указываются модификаторы доступа и ряд других ключевых слов, которые определяют его свойства (статический, абстрактный и т. п.).</a:t>
             </a:r>
             <a:endParaRPr lang="ru-RU" dirty="0">
               <a:latin typeface="Times New Roman" pitchFamily="18" charset="0"/>
@@ -5255,7 +6359,7 @@
       </p:sp>
       <p:pic>
         <p:nvPicPr>
-          <p:cNvPr id="1026" name="Picture 2" descr="https://ucarecdn.stepik.net/76ee26d4-d486-40d9-94cb-feda4c21bc15/"/>
+          <p:cNvPr id="20482" name="Picture 2"/>
           <p:cNvPicPr>
             <a:picLocks noChangeAspect="1" noChangeArrowheads="1"/>
           </p:cNvPicPr>
@@ -5270,13 +6374,53 @@
         </p:blipFill>
         <p:spPr bwMode="auto">
           <a:xfrm>
-            <a:off x="571472" y="1631028"/>
-            <a:ext cx="7398404" cy="5226972"/>
+            <a:off x="142844" y="1000108"/>
+            <a:ext cx="8810625" cy="2181225"/>
           </a:xfrm>
           <a:prstGeom prst="rect">
             <a:avLst/>
           </a:prstGeom>
           <a:noFill/>
+          <a:ln w="9525">
+            <a:noFill/>
+            <a:miter lim="800000"/>
+            <a:headEnd/>
+            <a:tailEnd/>
+          </a:ln>
+          <a:effectLst/>
+        </p:spPr>
+      </p:pic>
+      <p:pic>
+        <p:nvPicPr>
+          <p:cNvPr id="20483" name="Picture 3"/>
+          <p:cNvPicPr>
+            <a:picLocks noChangeAspect="1" noChangeArrowheads="1"/>
+          </p:cNvPicPr>
+          <p:nvPr/>
+        </p:nvPicPr>
+        <p:blipFill>
+          <a:blip r:embed="rId3"/>
+          <a:srcRect/>
+          <a:stretch>
+            <a:fillRect/>
+          </a:stretch>
+        </p:blipFill>
+        <p:spPr bwMode="auto">
+          <a:xfrm>
+            <a:off x="333388" y="3214686"/>
+            <a:ext cx="8810612" cy="3643314"/>
+          </a:xfrm>
+          <a:prstGeom prst="rect">
+            <a:avLst/>
+          </a:prstGeom>
+          <a:noFill/>
+          <a:ln w="9525">
+            <a:noFill/>
+            <a:miter lim="800000"/>
+            <a:headEnd/>
+            <a:tailEnd/>
+          </a:ln>
+          <a:effectLst/>
         </p:spPr>
       </p:pic>
     </p:spTree>
@@ -5306,14 +6450,14 @@
       </p:grpSpPr>
       <p:sp>
         <p:nvSpPr>
-          <p:cNvPr id="4" name="Прямоугольник 3"/>
+          <p:cNvPr id="2" name="Прямоугольник 1"/>
           <p:cNvSpPr/>
           <p:nvPr/>
         </p:nvSpPr>
         <p:spPr>
           <a:xfrm>
-            <a:off x="0" y="117693"/>
-            <a:ext cx="9144000" cy="6740307"/>
+            <a:off x="0" y="0"/>
+            <a:ext cx="4071934" cy="5632311"/>
           </a:xfrm>
           <a:prstGeom prst="rect">
             <a:avLst/>
@@ -5331,7 +6475,7 @@
                 <a:latin typeface="Times New Roman" pitchFamily="18" charset="0"/>
                 <a:cs typeface="Times New Roman" pitchFamily="18" charset="0"/>
               </a:rPr>
-              <a:t>Переменная - это область памяти, которая хранит определённый тип данных. Обращение к хранимым данным происходит по имени переменной.</a:t>
+              <a:t>Для начала хотелось бы сказать, что класс относится к более общей концепции C# - к типу, помимо класса туда входят интерфейсы, структуры.</a:t>
             </a:r>
           </a:p>
           <a:p>
@@ -5341,7 +6485,7 @@
                 <a:latin typeface="Times New Roman" pitchFamily="18" charset="0"/>
                 <a:cs typeface="Times New Roman" pitchFamily="18" charset="0"/>
               </a:rPr>
-              <a:t>Чтобы использовать переменную, её сначала надо объявить (создать), а затем инициализировать (задать значение).</a:t>
+              <a:t>В классе мы можем встретить следующие структурные элементы:</a:t>
             </a:r>
           </a:p>
           <a:p>
@@ -5351,7 +6495,7 @@
                 <a:latin typeface="Times New Roman" pitchFamily="18" charset="0"/>
                 <a:cs typeface="Times New Roman" pitchFamily="18" charset="0"/>
               </a:rPr>
-              <a:t>Создание переменной</a:t>
+              <a:t>    константы;</a:t>
             </a:r>
           </a:p>
           <a:p>
@@ -5361,7 +6505,7 @@
                 <a:latin typeface="Times New Roman" pitchFamily="18" charset="0"/>
                 <a:cs typeface="Times New Roman" pitchFamily="18" charset="0"/>
               </a:rPr>
-              <a:t>Переменные создаются следующим образом: сначала указывается её тип, затем имя, после чего ей присваивается значение.</a:t>
+              <a:t>    поля;</a:t>
             </a:r>
           </a:p>
           <a:p>
@@ -5371,38 +6515,27 @@
                 <a:latin typeface="Times New Roman" pitchFamily="18" charset="0"/>
                 <a:cs typeface="Times New Roman" pitchFamily="18" charset="0"/>
               </a:rPr>
-              <a:t>Рассмотрим на примере:</a:t>
+              <a:t>    свойства;</a:t>
             </a:r>
           </a:p>
           <a:p>
             <a:pPr algn="just"/>
             <a:r>
-              <a:rPr lang="ru-RU" dirty="0" err="1" smtClean="0">
-                <a:latin typeface="Courier New" pitchFamily="49" charset="0"/>
-                <a:cs typeface="Courier New" pitchFamily="49" charset="0"/>
-              </a:rPr>
-              <a:t>int</a:t>
-            </a:r>
-            <a:r>
               <a:rPr lang="ru-RU" dirty="0" smtClean="0">
-                <a:latin typeface="Courier New" pitchFamily="49" charset="0"/>
-                <a:cs typeface="Courier New" pitchFamily="49" charset="0"/>
-              </a:rPr>
-              <a:t> </a:t>
-            </a:r>
-            <a:r>
-              <a:rPr lang="ru-RU" dirty="0" err="1" smtClean="0">
-                <a:latin typeface="Courier New" pitchFamily="49" charset="0"/>
-                <a:cs typeface="Courier New" pitchFamily="49" charset="0"/>
-              </a:rPr>
-              <a:t>a</a:t>
-            </a:r>
+                <a:latin typeface="Times New Roman" pitchFamily="18" charset="0"/>
+                <a:cs typeface="Times New Roman" pitchFamily="18" charset="0"/>
+              </a:rPr>
+              <a:t>    методы;</a:t>
+            </a:r>
+          </a:p>
+          <a:p>
+            <a:pPr algn="just"/>
             <a:r>
               <a:rPr lang="ru-RU" dirty="0" smtClean="0">
-                <a:latin typeface="Courier New" pitchFamily="49" charset="0"/>
-                <a:cs typeface="Courier New" pitchFamily="49" charset="0"/>
-              </a:rPr>
-              <a:t> = 5;</a:t>
+                <a:latin typeface="Times New Roman" pitchFamily="18" charset="0"/>
+                <a:cs typeface="Times New Roman" pitchFamily="18" charset="0"/>
+              </a:rPr>
+              <a:t>    конструктор экземпляра;</a:t>
             </a:r>
           </a:p>
           <a:p>
@@ -5412,35 +6545,27 @@
                 <a:latin typeface="Times New Roman" pitchFamily="18" charset="0"/>
                 <a:cs typeface="Times New Roman" pitchFamily="18" charset="0"/>
               </a:rPr>
-              <a:t>Здесь </a:t>
-            </a:r>
-            <a:r>
-              <a:rPr lang="ru-RU" dirty="0" err="1" smtClean="0">
-                <a:latin typeface="Times New Roman" pitchFamily="18" charset="0"/>
-                <a:cs typeface="Times New Roman" pitchFamily="18" charset="0"/>
-              </a:rPr>
-              <a:t>int</a:t>
-            </a:r>
+              <a:t>    конструктор типа;</a:t>
+            </a:r>
+          </a:p>
+          <a:p>
+            <a:pPr algn="just"/>
             <a:r>
               <a:rPr lang="ru-RU" dirty="0" smtClean="0">
                 <a:latin typeface="Times New Roman" pitchFamily="18" charset="0"/>
                 <a:cs typeface="Times New Roman" pitchFamily="18" charset="0"/>
               </a:rPr>
-              <a:t> - тип данных, </a:t>
-            </a:r>
-            <a:r>
-              <a:rPr lang="ru-RU" dirty="0" err="1" smtClean="0">
-                <a:latin typeface="Times New Roman" pitchFamily="18" charset="0"/>
-                <a:cs typeface="Times New Roman" pitchFamily="18" charset="0"/>
-              </a:rPr>
-              <a:t>a</a:t>
-            </a:r>
+              <a:t>    перегруженные операторы;</a:t>
+            </a:r>
+          </a:p>
+          <a:p>
+            <a:pPr algn="just"/>
             <a:r>
               <a:rPr lang="ru-RU" dirty="0" smtClean="0">
                 <a:latin typeface="Times New Roman" pitchFamily="18" charset="0"/>
                 <a:cs typeface="Times New Roman" pitchFamily="18" charset="0"/>
               </a:rPr>
-              <a:t> - название (имя) переменной, а значение после знака равно - ей значение.</a:t>
+              <a:t>    операторы преобразования;</a:t>
             </a:r>
           </a:p>
           <a:p>
@@ -5450,248 +6575,115 @@
                 <a:latin typeface="Times New Roman" pitchFamily="18" charset="0"/>
                 <a:cs typeface="Times New Roman" pitchFamily="18" charset="0"/>
               </a:rPr>
-              <a:t>Важно: в имени переменной можно использовать только строчные и прописные буквы и знак подчёркивания. Также допустимы цифры, но имя не может с них начинаться</a:t>
-            </a:r>
-          </a:p>
-          <a:p>
-            <a:pPr algn="just"/>
-            <a:r>
-              <a:rPr lang="ru-RU" dirty="0" smtClean="0">
-                <a:latin typeface="Times New Roman" pitchFamily="18" charset="0"/>
-                <a:cs typeface="Times New Roman" pitchFamily="18" charset="0"/>
-              </a:rPr>
-              <a:t>Задать значения для чисел не сложно. Но как быть с другими типами, например, с дробными числами?</a:t>
-            </a:r>
-          </a:p>
-          <a:p>
-            <a:pPr algn="just"/>
-            <a:r>
-              <a:rPr lang="ru-RU" dirty="0" smtClean="0">
-                <a:latin typeface="Times New Roman" pitchFamily="18" charset="0"/>
-                <a:cs typeface="Times New Roman" pitchFamily="18" charset="0"/>
-              </a:rPr>
-              <a:t>Для дробей в качестве разделителя используется точка:</a:t>
-            </a:r>
-          </a:p>
-          <a:p>
-            <a:pPr algn="just"/>
-            <a:r>
-              <a:rPr lang="ru-RU" dirty="0" err="1">
-                <a:latin typeface="Courier New" pitchFamily="49" charset="0"/>
-                <a:cs typeface="Courier New" pitchFamily="49" charset="0"/>
-              </a:rPr>
-              <a:t>double</a:t>
-            </a:r>
-            <a:r>
-              <a:rPr lang="ru-RU" dirty="0">
-                <a:latin typeface="Courier New" pitchFamily="49" charset="0"/>
-                <a:cs typeface="Courier New" pitchFamily="49" charset="0"/>
-              </a:rPr>
-              <a:t> </a:t>
-            </a:r>
-            <a:r>
-              <a:rPr lang="ru-RU" dirty="0" err="1">
-                <a:latin typeface="Courier New" pitchFamily="49" charset="0"/>
-                <a:cs typeface="Courier New" pitchFamily="49" charset="0"/>
-              </a:rPr>
-              <a:t>pi</a:t>
-            </a:r>
-            <a:r>
-              <a:rPr lang="ru-RU" dirty="0">
-                <a:latin typeface="Courier New" pitchFamily="49" charset="0"/>
-                <a:cs typeface="Courier New" pitchFamily="49" charset="0"/>
-              </a:rPr>
-              <a:t> = 3.14;</a:t>
-            </a:r>
-          </a:p>
-          <a:p>
-            <a:pPr algn="just"/>
-            <a:r>
-              <a:rPr lang="ru-RU" dirty="0" smtClean="0">
-                <a:latin typeface="Times New Roman" pitchFamily="18" charset="0"/>
-                <a:cs typeface="Times New Roman" pitchFamily="18" charset="0"/>
-              </a:rPr>
-              <a:t>Значения строки и символа находятся между двойными и одинарными кавычками соответственно.</a:t>
-            </a:r>
-          </a:p>
-          <a:p>
-            <a:pPr algn="just"/>
-            <a:r>
-              <a:rPr lang="ru-RU" dirty="0" err="1">
-                <a:latin typeface="Courier New" pitchFamily="49" charset="0"/>
-                <a:cs typeface="Courier New" pitchFamily="49" charset="0"/>
-              </a:rPr>
-              <a:t>string</a:t>
-            </a:r>
-            <a:r>
-              <a:rPr lang="ru-RU" dirty="0">
-                <a:latin typeface="Courier New" pitchFamily="49" charset="0"/>
-                <a:cs typeface="Courier New" pitchFamily="49" charset="0"/>
-              </a:rPr>
-              <a:t> </a:t>
-            </a:r>
-            <a:r>
-              <a:rPr lang="ru-RU" dirty="0" err="1">
-                <a:latin typeface="Courier New" pitchFamily="49" charset="0"/>
-                <a:cs typeface="Courier New" pitchFamily="49" charset="0"/>
-              </a:rPr>
-              <a:t>str</a:t>
-            </a:r>
-            <a:r>
-              <a:rPr lang="ru-RU" dirty="0">
-                <a:latin typeface="Courier New" pitchFamily="49" charset="0"/>
-                <a:cs typeface="Courier New" pitchFamily="49" charset="0"/>
-              </a:rPr>
-              <a:t> = "</a:t>
-            </a:r>
-            <a:r>
-              <a:rPr lang="ru-RU" dirty="0" err="1">
-                <a:latin typeface="Courier New" pitchFamily="49" charset="0"/>
-                <a:cs typeface="Courier New" pitchFamily="49" charset="0"/>
-              </a:rPr>
-              <a:t>name</a:t>
-            </a:r>
-            <a:r>
-              <a:rPr lang="ru-RU" dirty="0">
-                <a:latin typeface="Courier New" pitchFamily="49" charset="0"/>
-                <a:cs typeface="Courier New" pitchFamily="49" charset="0"/>
-              </a:rPr>
-              <a:t>";</a:t>
-            </a:r>
-          </a:p>
-          <a:p>
-            <a:pPr algn="just"/>
-            <a:r>
-              <a:rPr lang="ru-RU" dirty="0" err="1">
-                <a:latin typeface="Courier New" pitchFamily="49" charset="0"/>
-                <a:cs typeface="Courier New" pitchFamily="49" charset="0"/>
-              </a:rPr>
-              <a:t>char</a:t>
-            </a:r>
-            <a:r>
-              <a:rPr lang="ru-RU" dirty="0">
-                <a:latin typeface="Courier New" pitchFamily="49" charset="0"/>
-                <a:cs typeface="Courier New" pitchFamily="49" charset="0"/>
-              </a:rPr>
-              <a:t> </a:t>
-            </a:r>
-            <a:r>
-              <a:rPr lang="ru-RU" dirty="0" err="1">
-                <a:latin typeface="Courier New" pitchFamily="49" charset="0"/>
-                <a:cs typeface="Courier New" pitchFamily="49" charset="0"/>
-              </a:rPr>
-              <a:t>ch</a:t>
-            </a:r>
-            <a:r>
-              <a:rPr lang="ru-RU" dirty="0">
-                <a:latin typeface="Courier New" pitchFamily="49" charset="0"/>
-                <a:cs typeface="Courier New" pitchFamily="49" charset="0"/>
-              </a:rPr>
-              <a:t> = 'D';</a:t>
-            </a:r>
-          </a:p>
-          <a:p>
-            <a:pPr algn="just"/>
-            <a:r>
-              <a:rPr lang="ru-RU" dirty="0" smtClean="0">
-                <a:latin typeface="Times New Roman" pitchFamily="18" charset="0"/>
-                <a:cs typeface="Times New Roman" pitchFamily="18" charset="0"/>
-              </a:rPr>
-              <a:t>Логический тип может принимать только два значения:</a:t>
-            </a:r>
-          </a:p>
-          <a:p>
-            <a:pPr algn="just"/>
-            <a:r>
-              <a:rPr lang="ru-RU" dirty="0" err="1">
-                <a:latin typeface="Courier New" pitchFamily="49" charset="0"/>
-                <a:cs typeface="Courier New" pitchFamily="49" charset="0"/>
-              </a:rPr>
-              <a:t>bool</a:t>
-            </a:r>
-            <a:r>
-              <a:rPr lang="ru-RU" dirty="0">
-                <a:latin typeface="Courier New" pitchFamily="49" charset="0"/>
-                <a:cs typeface="Courier New" pitchFamily="49" charset="0"/>
-              </a:rPr>
-              <a:t> </a:t>
-            </a:r>
-            <a:r>
-              <a:rPr lang="ru-RU" dirty="0" err="1">
-                <a:latin typeface="Courier New" pitchFamily="49" charset="0"/>
-                <a:cs typeface="Courier New" pitchFamily="49" charset="0"/>
-              </a:rPr>
-              <a:t>yes</a:t>
-            </a:r>
-            <a:r>
-              <a:rPr lang="ru-RU" dirty="0">
-                <a:latin typeface="Courier New" pitchFamily="49" charset="0"/>
-                <a:cs typeface="Courier New" pitchFamily="49" charset="0"/>
-              </a:rPr>
-              <a:t> = </a:t>
-            </a:r>
-            <a:r>
-              <a:rPr lang="ru-RU" dirty="0" err="1">
-                <a:latin typeface="Courier New" pitchFamily="49" charset="0"/>
-                <a:cs typeface="Courier New" pitchFamily="49" charset="0"/>
-              </a:rPr>
-              <a:t>true</a:t>
-            </a:r>
-            <a:r>
-              <a:rPr lang="ru-RU" dirty="0">
-                <a:latin typeface="Courier New" pitchFamily="49" charset="0"/>
-                <a:cs typeface="Courier New" pitchFamily="49" charset="0"/>
-              </a:rPr>
-              <a:t>; //Истина</a:t>
-            </a:r>
-          </a:p>
-          <a:p>
-            <a:pPr algn="just"/>
-            <a:r>
-              <a:rPr lang="ru-RU" dirty="0" err="1">
-                <a:latin typeface="Courier New" pitchFamily="49" charset="0"/>
-                <a:cs typeface="Courier New" pitchFamily="49" charset="0"/>
-              </a:rPr>
-              <a:t>bool</a:t>
-            </a:r>
-            <a:r>
-              <a:rPr lang="ru-RU" dirty="0">
-                <a:latin typeface="Courier New" pitchFamily="49" charset="0"/>
-                <a:cs typeface="Courier New" pitchFamily="49" charset="0"/>
-              </a:rPr>
-              <a:t> </a:t>
-            </a:r>
-            <a:r>
-              <a:rPr lang="ru-RU" dirty="0" err="1">
-                <a:latin typeface="Courier New" pitchFamily="49" charset="0"/>
-                <a:cs typeface="Courier New" pitchFamily="49" charset="0"/>
-              </a:rPr>
-              <a:t>no</a:t>
-            </a:r>
-            <a:r>
-              <a:rPr lang="ru-RU" dirty="0">
-                <a:latin typeface="Courier New" pitchFamily="49" charset="0"/>
-                <a:cs typeface="Courier New" pitchFamily="49" charset="0"/>
-              </a:rPr>
-              <a:t> = </a:t>
-            </a:r>
-            <a:r>
-              <a:rPr lang="ru-RU" dirty="0" err="1">
-                <a:latin typeface="Courier New" pitchFamily="49" charset="0"/>
-                <a:cs typeface="Courier New" pitchFamily="49" charset="0"/>
-              </a:rPr>
-              <a:t>false</a:t>
-            </a:r>
-            <a:r>
-              <a:rPr lang="ru-RU" dirty="0">
-                <a:latin typeface="Courier New" pitchFamily="49" charset="0"/>
-                <a:cs typeface="Courier New" pitchFamily="49" charset="0"/>
-              </a:rPr>
-              <a:t>; //Ложь</a:t>
-            </a:r>
-          </a:p>
-        </p:txBody>
-      </p:sp>
+              <a:t>У каждого из этих структурных элементов могут быть разные наборы модификаторов, которые изменяют область видимости, принадлежность к экземпляру или типу, изменяемость и т.п.</a:t>
+            </a:r>
+            <a:endParaRPr lang="ru-RU" dirty="0">
+              <a:latin typeface="Times New Roman" pitchFamily="18" charset="0"/>
+              <a:cs typeface="Times New Roman" pitchFamily="18" charset="0"/>
+            </a:endParaRPr>
+          </a:p>
+        </p:txBody>
+      </p:sp>
+      <p:grpSp>
+        <p:nvGrpSpPr>
+          <p:cNvPr id="7" name="Группа 6"/>
+          <p:cNvGrpSpPr/>
+          <p:nvPr/>
+        </p:nvGrpSpPr>
+        <p:grpSpPr>
+          <a:xfrm>
+            <a:off x="4048125" y="0"/>
+            <a:ext cx="5095875" cy="6772275"/>
+            <a:chOff x="4048125" y="0"/>
+            <a:chExt cx="5095875" cy="6772275"/>
+          </a:xfrm>
+        </p:grpSpPr>
+        <p:pic>
+          <p:nvPicPr>
+            <p:cNvPr id="22530" name="Picture 2"/>
+            <p:cNvPicPr>
+              <a:picLocks noChangeAspect="1" noChangeArrowheads="1"/>
+            </p:cNvPicPr>
+            <p:nvPr/>
+          </p:nvPicPr>
+          <p:blipFill>
+            <a:blip r:embed="rId2"/>
+            <a:srcRect/>
+            <a:stretch>
+              <a:fillRect/>
+            </a:stretch>
+          </p:blipFill>
+          <p:spPr bwMode="auto">
+            <a:xfrm>
+              <a:off x="4048125" y="0"/>
+              <a:ext cx="5095875" cy="6772275"/>
+            </a:xfrm>
+            <a:prstGeom prst="rect">
+              <a:avLst/>
+            </a:prstGeom>
+            <a:solidFill>
+              <a:schemeClr val="bg2"/>
+            </a:solidFill>
+            <a:ln w="9525">
+              <a:solidFill>
+                <a:schemeClr val="accent1">
+                  <a:shade val="50000"/>
+                </a:schemeClr>
+              </a:solidFill>
+              <a:miter lim="800000"/>
+              <a:headEnd/>
+              <a:tailEnd/>
+            </a:ln>
+            <a:effectLst/>
+          </p:spPr>
+        </p:pic>
+        <p:sp>
+          <p:nvSpPr>
+            <p:cNvPr id="6" name="Прямоугольник 5"/>
+            <p:cNvSpPr/>
+            <p:nvPr/>
+          </p:nvSpPr>
+          <p:spPr>
+            <a:xfrm>
+              <a:off x="4500562" y="6000768"/>
+              <a:ext cx="2643206" cy="428628"/>
+            </a:xfrm>
+            <a:prstGeom prst="rect">
+              <a:avLst/>
+            </a:prstGeom>
+            <a:solidFill>
+              <a:srgbClr val="F6F5EE"/>
+            </a:solidFill>
+            <a:ln>
+              <a:noFill/>
+            </a:ln>
+          </p:spPr>
+          <p:style>
+            <a:lnRef idx="2">
+              <a:schemeClr val="accent1">
+                <a:shade val="50000"/>
+              </a:schemeClr>
+            </a:lnRef>
+            <a:fillRef idx="1">
+              <a:schemeClr val="accent1"/>
+            </a:fillRef>
+            <a:effectRef idx="0">
+              <a:schemeClr val="accent1"/>
+            </a:effectRef>
+            <a:fontRef idx="minor">
+              <a:schemeClr val="lt1"/>
+            </a:fontRef>
+          </p:style>
+          <p:txBody>
+            <a:bodyPr rtlCol="0" anchor="ctr"/>
+            <a:lstStyle/>
+            <a:p>
+              <a:pPr algn="ctr"/>
+              <a:endParaRPr lang="ru-RU"/>
+            </a:p>
+          </p:txBody>
+        </p:sp>
+      </p:grpSp>
     </p:spTree>
   </p:cSld>
   <p:clrMapOvr>
@@ -5701,6 +6693,237 @@
 </file>
 
 <file path=ppt/slides/slide5.xml><?xml version="1.0" encoding="utf-8"?>
+<p:sld xmlns:a="http://schemas.openxmlformats.org/drawingml/2006/main" xmlns:r="http://schemas.openxmlformats.org/officeDocument/2006/relationships" xmlns:p="http://schemas.openxmlformats.org/presentationml/2006/main">
+  <p:cSld>
+    <p:spTree>
+      <p:nvGrpSpPr>
+        <p:cNvPr id="1" name=""/>
+        <p:cNvGrpSpPr/>
+        <p:nvPr/>
+      </p:nvGrpSpPr>
+      <p:grpSpPr>
+        <a:xfrm>
+          <a:off x="0" y="0"/>
+          <a:ext cx="0" cy="0"/>
+          <a:chOff x="0" y="0"/>
+          <a:chExt cx="0" cy="0"/>
+        </a:xfrm>
+      </p:grpSpPr>
+      <p:sp>
+        <p:nvSpPr>
+          <p:cNvPr id="2" name="Прямоугольник 1"/>
+          <p:cNvSpPr/>
+          <p:nvPr/>
+        </p:nvSpPr>
+        <p:spPr>
+          <a:xfrm>
+            <a:off x="0" y="0"/>
+            <a:ext cx="9144000" cy="2031325"/>
+          </a:xfrm>
+          <a:prstGeom prst="rect">
+            <a:avLst/>
+          </a:prstGeom>
+        </p:spPr>
+        <p:txBody>
+          <a:bodyPr wrap="square">
+            <a:spAutoFit/>
+          </a:bodyPr>
+          <a:lstStyle/>
+          <a:p>
+            <a:pPr algn="just"/>
+            <a:r>
+              <a:rPr lang="ru-RU" dirty="0" smtClean="0">
+                <a:latin typeface="Times New Roman" pitchFamily="18" charset="0"/>
+                <a:cs typeface="Times New Roman" pitchFamily="18" charset="0"/>
+              </a:rPr>
+              <a:t>При выполнении оператора </a:t>
+            </a:r>
+            <a:r>
+              <a:rPr lang="ru-RU" dirty="0" err="1" smtClean="0">
+                <a:latin typeface="Times New Roman" pitchFamily="18" charset="0"/>
+                <a:cs typeface="Times New Roman" pitchFamily="18" charset="0"/>
+              </a:rPr>
+              <a:t>new</a:t>
+            </a:r>
+            <a:r>
+              <a:rPr lang="ru-RU" dirty="0" smtClean="0">
+                <a:latin typeface="Times New Roman" pitchFamily="18" charset="0"/>
+                <a:cs typeface="Times New Roman" pitchFamily="18" charset="0"/>
+              </a:rPr>
+              <a:t>:</a:t>
+            </a:r>
+          </a:p>
+          <a:p>
+            <a:pPr algn="just"/>
+            <a:r>
+              <a:rPr lang="ru-RU" dirty="0" smtClean="0">
+                <a:latin typeface="Times New Roman" pitchFamily="18" charset="0"/>
+                <a:cs typeface="Times New Roman" pitchFamily="18" charset="0"/>
+              </a:rPr>
+              <a:t>    Сначала определяется необходимый набор байт для хранения объекта типа (включая дополнительные специальные поля, если данные будут храниться в куче).</a:t>
+            </a:r>
+          </a:p>
+          <a:p>
+            <a:pPr algn="just"/>
+            <a:r>
+              <a:rPr lang="ru-RU" dirty="0" smtClean="0">
+                <a:latin typeface="Times New Roman" pitchFamily="18" charset="0"/>
+                <a:cs typeface="Times New Roman" pitchFamily="18" charset="0"/>
+              </a:rPr>
+              <a:t>    Выделяется соответствующая память, и все байты зарезервированного пространства обнуляются.</a:t>
+            </a:r>
+          </a:p>
+          <a:p>
+            <a:pPr algn="just"/>
+            <a:r>
+              <a:rPr lang="ru-RU" dirty="0" smtClean="0">
+                <a:latin typeface="Times New Roman" pitchFamily="18" charset="0"/>
+                <a:cs typeface="Times New Roman" pitchFamily="18" charset="0"/>
+              </a:rPr>
+              <a:t>    Инициализируются дополнительные специальные поля (если объект хранится в куче).</a:t>
+            </a:r>
+          </a:p>
+          <a:p>
+            <a:pPr algn="just"/>
+            <a:r>
+              <a:rPr lang="ru-RU" dirty="0" smtClean="0">
+                <a:latin typeface="Times New Roman" pitchFamily="18" charset="0"/>
+                <a:cs typeface="Times New Roman" pitchFamily="18" charset="0"/>
+              </a:rPr>
+              <a:t>    Вызывается конструктор типа с указанными параметрами.</a:t>
+            </a:r>
+            <a:endParaRPr lang="ru-RU" dirty="0">
+              <a:latin typeface="Times New Roman" pitchFamily="18" charset="0"/>
+              <a:cs typeface="Times New Roman" pitchFamily="18" charset="0"/>
+            </a:endParaRPr>
+          </a:p>
+        </p:txBody>
+      </p:sp>
+      <p:pic>
+        <p:nvPicPr>
+          <p:cNvPr id="21506" name="Picture 2" descr="https://ucarecdn.stepik.net/4bb2a83c-cd6c-45b5-84fd-730041a4e753/"/>
+          <p:cNvPicPr>
+            <a:picLocks noChangeAspect="1" noChangeArrowheads="1"/>
+          </p:cNvPicPr>
+          <p:nvPr/>
+        </p:nvPicPr>
+        <p:blipFill>
+          <a:blip r:embed="rId2"/>
+          <a:srcRect/>
+          <a:stretch>
+            <a:fillRect/>
+          </a:stretch>
+        </p:blipFill>
+        <p:spPr bwMode="auto">
+          <a:xfrm>
+            <a:off x="0" y="2143116"/>
+            <a:ext cx="9144000" cy="4357694"/>
+          </a:xfrm>
+          <a:prstGeom prst="rect">
+            <a:avLst/>
+          </a:prstGeom>
+          <a:noFill/>
+        </p:spPr>
+      </p:pic>
+    </p:spTree>
+  </p:cSld>
+  <p:clrMapOvr>
+    <a:masterClrMapping/>
+  </p:clrMapOvr>
+</p:sld>
+</file>
+
+<file path=ppt/slides/slide6.xml><?xml version="1.0" encoding="utf-8"?>
+<p:sld xmlns:a="http://schemas.openxmlformats.org/drawingml/2006/main" xmlns:r="http://schemas.openxmlformats.org/officeDocument/2006/relationships" xmlns:p="http://schemas.openxmlformats.org/presentationml/2006/main">
+  <p:cSld>
+    <p:spTree>
+      <p:nvGrpSpPr>
+        <p:cNvPr id="1" name=""/>
+        <p:cNvGrpSpPr/>
+        <p:nvPr/>
+      </p:nvGrpSpPr>
+      <p:grpSpPr>
+        <a:xfrm>
+          <a:off x="0" y="0"/>
+          <a:ext cx="0" cy="0"/>
+          <a:chOff x="0" y="0"/>
+          <a:chExt cx="0" cy="0"/>
+        </a:xfrm>
+      </p:grpSpPr>
+      <p:pic>
+        <p:nvPicPr>
+          <p:cNvPr id="3074" name="Picture 2"/>
+          <p:cNvPicPr>
+            <a:picLocks noChangeAspect="1" noChangeArrowheads="1"/>
+          </p:cNvPicPr>
+          <p:nvPr/>
+        </p:nvPicPr>
+        <p:blipFill>
+          <a:blip r:embed="rId2"/>
+          <a:srcRect/>
+          <a:stretch>
+            <a:fillRect/>
+          </a:stretch>
+        </p:blipFill>
+        <p:spPr bwMode="auto">
+          <a:xfrm>
+            <a:off x="85725" y="571480"/>
+            <a:ext cx="9058275" cy="5572125"/>
+          </a:xfrm>
+          <a:prstGeom prst="rect">
+            <a:avLst/>
+          </a:prstGeom>
+          <a:noFill/>
+          <a:ln w="9525">
+            <a:noFill/>
+            <a:miter lim="800000"/>
+            <a:headEnd/>
+            <a:tailEnd/>
+          </a:ln>
+          <a:effectLst/>
+        </p:spPr>
+      </p:pic>
+      <p:sp>
+        <p:nvSpPr>
+          <p:cNvPr id="3" name="Прямоугольник 2"/>
+          <p:cNvSpPr/>
+          <p:nvPr/>
+        </p:nvSpPr>
+        <p:spPr>
+          <a:xfrm>
+            <a:off x="2714612" y="0"/>
+            <a:ext cx="4208011" cy="646331"/>
+          </a:xfrm>
+          <a:prstGeom prst="rect">
+            <a:avLst/>
+          </a:prstGeom>
+        </p:spPr>
+        <p:txBody>
+          <a:bodyPr wrap="none">
+            <a:spAutoFit/>
+          </a:bodyPr>
+          <a:lstStyle/>
+          <a:p>
+            <a:r>
+              <a:rPr lang="ru-RU" sz="3600" b="1" dirty="0" smtClean="0">
+                <a:latin typeface="Times New Roman" pitchFamily="18" charset="0"/>
+                <a:cs typeface="Times New Roman" pitchFamily="18" charset="0"/>
+              </a:rPr>
+              <a:t>КОНСТРУКТОРЫ</a:t>
+            </a:r>
+            <a:endParaRPr lang="ru-RU" sz="3600" b="1" dirty="0"/>
+          </a:p>
+        </p:txBody>
+      </p:sp>
+    </p:spTree>
+  </p:cSld>
+  <p:clrMapOvr>
+    <a:masterClrMapping/>
+  </p:clrMapOvr>
+</p:sld>
+</file>
+
+<file path=ppt/slides/slide7.xml><?xml version="1.0" encoding="utf-8"?>
 <p:sld xmlns:a="http://schemas.openxmlformats.org/drawingml/2006/main" xmlns:r="http://schemas.openxmlformats.org/officeDocument/2006/relationships" xmlns:p="http://schemas.openxmlformats.org/presentationml/2006/main">
   <p:cSld>
     <p:spTree>
@@ -5734,8 +6957,8 @@
         </p:blipFill>
         <p:spPr bwMode="auto">
           <a:xfrm>
-            <a:off x="1928794" y="2990000"/>
-            <a:ext cx="4924364" cy="3868000"/>
+            <a:off x="0" y="571480"/>
+            <a:ext cx="3771900" cy="3514725"/>
           </a:xfrm>
           <a:prstGeom prst="rect">
             <a:avLst/>
@@ -5758,8 +6981,8 @@
         </p:nvSpPr>
         <p:spPr>
           <a:xfrm>
-            <a:off x="0" y="-79653"/>
-            <a:ext cx="9144000" cy="3046988"/>
+            <a:off x="3857620" y="571480"/>
+            <a:ext cx="5286380" cy="1938992"/>
           </a:xfrm>
           <a:prstGeom prst="rect">
             <a:avLst/>
@@ -5773,967 +6996,43 @@
           <a:p>
             <a:pPr algn="just"/>
             <a:r>
-              <a:rPr lang="ru-RU" sz="1600" dirty="0" smtClean="0">
-                <a:latin typeface="Times New Roman" pitchFamily="18" charset="0"/>
-                <a:cs typeface="Times New Roman" pitchFamily="18" charset="0"/>
-              </a:rPr>
-              <a:t>Стек в контексте управления памятью — это специальная область оперативной памяти, выделяемая для каждого потока выполнения в программе. Он работает по принципу LIFO (</a:t>
-            </a:r>
-            <a:r>
-              <a:rPr lang="ru-RU" sz="1600" dirty="0" err="1" smtClean="0">
-                <a:latin typeface="Times New Roman" pitchFamily="18" charset="0"/>
-                <a:cs typeface="Times New Roman" pitchFamily="18" charset="0"/>
-              </a:rPr>
-              <a:t>Last</a:t>
-            </a:r>
-            <a:r>
-              <a:rPr lang="ru-RU" sz="1600" dirty="0" smtClean="0">
-                <a:latin typeface="Times New Roman" pitchFamily="18" charset="0"/>
-                <a:cs typeface="Times New Roman" pitchFamily="18" charset="0"/>
-              </a:rPr>
-              <a:t> </a:t>
-            </a:r>
-            <a:r>
-              <a:rPr lang="ru-RU" sz="1600" dirty="0" err="1" smtClean="0">
-                <a:latin typeface="Times New Roman" pitchFamily="18" charset="0"/>
-                <a:cs typeface="Times New Roman" pitchFamily="18" charset="0"/>
-              </a:rPr>
-              <a:t>In</a:t>
-            </a:r>
-            <a:r>
-              <a:rPr lang="ru-RU" sz="1600" dirty="0" smtClean="0">
-                <a:latin typeface="Times New Roman" pitchFamily="18" charset="0"/>
-                <a:cs typeface="Times New Roman" pitchFamily="18" charset="0"/>
-              </a:rPr>
-              <a:t>, </a:t>
-            </a:r>
-            <a:r>
-              <a:rPr lang="ru-RU" sz="1600" dirty="0" err="1" smtClean="0">
-                <a:latin typeface="Times New Roman" pitchFamily="18" charset="0"/>
-                <a:cs typeface="Times New Roman" pitchFamily="18" charset="0"/>
-              </a:rPr>
-              <a:t>First</a:t>
-            </a:r>
-            <a:r>
-              <a:rPr lang="ru-RU" sz="1600" dirty="0" smtClean="0">
-                <a:latin typeface="Times New Roman" pitchFamily="18" charset="0"/>
-                <a:cs typeface="Times New Roman" pitchFamily="18" charset="0"/>
-              </a:rPr>
-              <a:t> </a:t>
-            </a:r>
-            <a:r>
-              <a:rPr lang="ru-RU" sz="1600" dirty="0" err="1" smtClean="0">
-                <a:latin typeface="Times New Roman" pitchFamily="18" charset="0"/>
-                <a:cs typeface="Times New Roman" pitchFamily="18" charset="0"/>
-              </a:rPr>
-              <a:t>Out</a:t>
-            </a:r>
-            <a:r>
-              <a:rPr lang="ru-RU" sz="1600" dirty="0" smtClean="0">
-                <a:latin typeface="Times New Roman" pitchFamily="18" charset="0"/>
-                <a:cs typeface="Times New Roman" pitchFamily="18" charset="0"/>
-              </a:rPr>
-              <a:t> — «последним пришёл, первым ушёл»).</a:t>
-            </a:r>
-          </a:p>
-          <a:p>
-            <a:pPr algn="just"/>
-            <a:r>
-              <a:rPr lang="ru-RU" sz="1600" dirty="0" smtClean="0">
-                <a:latin typeface="Times New Roman" pitchFamily="18" charset="0"/>
-                <a:cs typeface="Times New Roman" pitchFamily="18" charset="0"/>
-              </a:rPr>
-              <a:t>Ключевые характеристики стека</a:t>
-            </a:r>
-          </a:p>
-          <a:p>
-            <a:pPr algn="just"/>
-            <a:r>
-              <a:rPr lang="ru-RU" sz="1600" dirty="0" smtClean="0">
-                <a:latin typeface="Times New Roman" pitchFamily="18" charset="0"/>
-                <a:cs typeface="Times New Roman" pitchFamily="18" charset="0"/>
-              </a:rPr>
-              <a:t>    Фиксированный размер</a:t>
-            </a:r>
-          </a:p>
-          <a:p>
-            <a:pPr algn="just"/>
-            <a:r>
-              <a:rPr lang="ru-RU" sz="1600" dirty="0" smtClean="0">
-                <a:latin typeface="Times New Roman" pitchFamily="18" charset="0"/>
-                <a:cs typeface="Times New Roman" pitchFamily="18" charset="0"/>
-              </a:rPr>
-              <a:t>    Выделяется при создании потока. Превышение лимита приводит к переполнению стека</a:t>
-            </a:r>
-            <a:r>
-              <a:rPr lang="en-US" sz="1600" dirty="0" smtClean="0">
-                <a:latin typeface="Times New Roman" pitchFamily="18" charset="0"/>
-                <a:cs typeface="Times New Roman" pitchFamily="18" charset="0"/>
-              </a:rPr>
-              <a:t>.</a:t>
-            </a:r>
-            <a:endParaRPr lang="ru-RU" sz="1600" dirty="0" smtClean="0">
+              <a:rPr lang="ru-RU" sz="2400" dirty="0" smtClean="0">
+                <a:latin typeface="Times New Roman" pitchFamily="18" charset="0"/>
+                <a:cs typeface="Times New Roman" pitchFamily="18" charset="0"/>
+              </a:rPr>
+              <a:t>В данном примере у класса </a:t>
+            </a:r>
+            <a:r>
+              <a:rPr lang="ru-RU" sz="2400" dirty="0" err="1" smtClean="0">
+                <a:latin typeface="Times New Roman" pitchFamily="18" charset="0"/>
+                <a:cs typeface="Times New Roman" pitchFamily="18" charset="0"/>
+              </a:rPr>
+              <a:t>Person</a:t>
+            </a:r>
+            <a:r>
+              <a:rPr lang="ru-RU" sz="2400" dirty="0" smtClean="0">
+                <a:latin typeface="Times New Roman" pitchFamily="18" charset="0"/>
+                <a:cs typeface="Times New Roman" pitchFamily="18" charset="0"/>
+              </a:rPr>
+              <a:t> есть два скрытых поля и два открытых свойства, которые позволяют прочитать значения скрытых полей и изменить их.</a:t>
+            </a:r>
+            <a:endParaRPr lang="ru-RU" sz="2400" dirty="0">
               <a:latin typeface="Times New Roman" pitchFamily="18" charset="0"/>
               <a:cs typeface="Times New Roman" pitchFamily="18" charset="0"/>
             </a:endParaRPr>
           </a:p>
-          <a:p>
-            <a:pPr algn="just"/>
-            <a:r>
-              <a:rPr lang="ru-RU" sz="1600" dirty="0" smtClean="0">
-                <a:latin typeface="Times New Roman" pitchFamily="18" charset="0"/>
-                <a:cs typeface="Times New Roman" pitchFamily="18" charset="0"/>
-              </a:rPr>
-              <a:t>    Автоматическое управление</a:t>
-            </a:r>
-          </a:p>
-          <a:p>
-            <a:pPr algn="just"/>
-            <a:r>
-              <a:rPr lang="ru-RU" sz="1600" dirty="0" smtClean="0">
-                <a:latin typeface="Times New Roman" pitchFamily="18" charset="0"/>
-                <a:cs typeface="Times New Roman" pitchFamily="18" charset="0"/>
-              </a:rPr>
-              <a:t>        При входе в функцию: в стек помещаются её параметры и локальные переменные.</a:t>
-            </a:r>
-          </a:p>
-          <a:p>
-            <a:pPr algn="just"/>
-            <a:r>
-              <a:rPr lang="ru-RU" sz="1600" dirty="0" smtClean="0">
-                <a:latin typeface="Times New Roman" pitchFamily="18" charset="0"/>
-                <a:cs typeface="Times New Roman" pitchFamily="18" charset="0"/>
-              </a:rPr>
-              <a:t>        При выходе из функции: вся память автоматически освобождается.</a:t>
-            </a:r>
-          </a:p>
-          <a:p>
-            <a:pPr algn="just"/>
-            <a:r>
-              <a:rPr lang="ru-RU" sz="1600" dirty="0" smtClean="0">
-                <a:latin typeface="Times New Roman" pitchFamily="18" charset="0"/>
-                <a:cs typeface="Times New Roman" pitchFamily="18" charset="0"/>
-              </a:rPr>
-              <a:t>Благодаря простой логике LIFO и близости к </a:t>
-            </a:r>
-            <a:r>
-              <a:rPr lang="ru-RU" sz="1600" dirty="0" err="1" smtClean="0">
-                <a:latin typeface="Times New Roman" pitchFamily="18" charset="0"/>
-                <a:cs typeface="Times New Roman" pitchFamily="18" charset="0"/>
-              </a:rPr>
-              <a:t>кэшу</a:t>
-            </a:r>
-            <a:r>
-              <a:rPr lang="ru-RU" sz="1600" dirty="0" smtClean="0">
-                <a:latin typeface="Times New Roman" pitchFamily="18" charset="0"/>
-                <a:cs typeface="Times New Roman" pitchFamily="18" charset="0"/>
-              </a:rPr>
-              <a:t> процессора операции со стеком выполняются очень быстро.</a:t>
-            </a:r>
-          </a:p>
-          <a:p>
-            <a:pPr algn="just"/>
-            <a:r>
-              <a:rPr lang="ru-RU" sz="1600" dirty="0" smtClean="0">
-                <a:latin typeface="Times New Roman" pitchFamily="18" charset="0"/>
-                <a:cs typeface="Times New Roman" pitchFamily="18" charset="0"/>
-              </a:rPr>
-              <a:t>Все переменные в стеке — локальные (доступны только в рамках текущей функции/метода).</a:t>
-            </a:r>
-            <a:endParaRPr lang="ru-RU" sz="1600" dirty="0">
-              <a:latin typeface="Times New Roman" pitchFamily="18" charset="0"/>
-              <a:cs typeface="Times New Roman" pitchFamily="18" charset="0"/>
-            </a:endParaRPr>
-          </a:p>
-        </p:txBody>
-      </p:sp>
-    </p:spTree>
-  </p:cSld>
-  <p:clrMapOvr>
-    <a:masterClrMapping/>
-  </p:clrMapOvr>
-</p:sld>
-</file>
-
-<file path=ppt/slides/slide6.xml><?xml version="1.0" encoding="utf-8"?>
-<p:sld xmlns:a="http://schemas.openxmlformats.org/drawingml/2006/main" xmlns:r="http://schemas.openxmlformats.org/officeDocument/2006/relationships" xmlns:p="http://schemas.openxmlformats.org/presentationml/2006/main">
-  <p:cSld>
-    <p:spTree>
-      <p:nvGrpSpPr>
-        <p:cNvPr id="1" name=""/>
-        <p:cNvGrpSpPr/>
-        <p:nvPr/>
-      </p:nvGrpSpPr>
-      <p:grpSpPr>
-        <a:xfrm>
-          <a:off x="0" y="0"/>
-          <a:ext cx="0" cy="0"/>
-          <a:chOff x="0" y="0"/>
-          <a:chExt cx="0" cy="0"/>
-        </a:xfrm>
-      </p:grpSpPr>
-      <p:sp>
-        <p:nvSpPr>
-          <p:cNvPr id="2" name="Прямоугольник 1"/>
-          <p:cNvSpPr/>
-          <p:nvPr/>
-        </p:nvSpPr>
-        <p:spPr>
-          <a:xfrm>
-            <a:off x="0" y="0"/>
-            <a:ext cx="9144000" cy="3693319"/>
-          </a:xfrm>
-          <a:prstGeom prst="rect">
-            <a:avLst/>
-          </a:prstGeom>
-        </p:spPr>
-        <p:txBody>
-          <a:bodyPr wrap="square">
-            <a:spAutoFit/>
-          </a:bodyPr>
-          <a:lstStyle/>
-          <a:p>
-            <a:pPr algn="just"/>
-            <a:r>
-              <a:rPr lang="ru-RU" dirty="0" smtClean="0">
-                <a:latin typeface="Times New Roman" pitchFamily="18" charset="0"/>
-                <a:cs typeface="Times New Roman" pitchFamily="18" charset="0"/>
-              </a:rPr>
-              <a:t>Конвертация данных — преобразование данных из одного формата в другой.</a:t>
-            </a:r>
-          </a:p>
-          <a:p>
-            <a:pPr algn="just"/>
-            <a:r>
-              <a:rPr lang="ru-RU" dirty="0" smtClean="0">
-                <a:latin typeface="Times New Roman" pitchFamily="18" charset="0"/>
-                <a:cs typeface="Times New Roman" pitchFamily="18" charset="0"/>
-              </a:rPr>
-              <a:t>Но зачем конвертировать данные в C#? </a:t>
-            </a:r>
-          </a:p>
-          <a:p>
-            <a:pPr algn="just"/>
-            <a:r>
-              <a:rPr lang="ru-RU" dirty="0" smtClean="0">
-                <a:latin typeface="Times New Roman" pitchFamily="18" charset="0"/>
-                <a:cs typeface="Times New Roman" pitchFamily="18" charset="0"/>
-              </a:rPr>
-              <a:t>При вводе данных в консоль они представлены типом </a:t>
-            </a:r>
-            <a:r>
-              <a:rPr lang="ru-RU" dirty="0" err="1" smtClean="0">
-                <a:latin typeface="Times New Roman" pitchFamily="18" charset="0"/>
-                <a:cs typeface="Times New Roman" pitchFamily="18" charset="0"/>
-              </a:rPr>
-              <a:t>string</a:t>
-            </a:r>
-            <a:r>
-              <a:rPr lang="ru-RU" dirty="0" smtClean="0">
-                <a:latin typeface="Times New Roman" pitchFamily="18" charset="0"/>
-                <a:cs typeface="Times New Roman" pitchFamily="18" charset="0"/>
-              </a:rPr>
-              <a:t>.</a:t>
-            </a:r>
-          </a:p>
-          <a:p>
-            <a:pPr algn="just"/>
-            <a:r>
-              <a:rPr lang="ru-RU" dirty="0" smtClean="0">
-                <a:latin typeface="Times New Roman" pitchFamily="18" charset="0"/>
-                <a:cs typeface="Times New Roman" pitchFamily="18" charset="0"/>
-              </a:rPr>
-              <a:t>Рассмотрим следующую программу:</a:t>
-            </a:r>
-          </a:p>
-          <a:p>
-            <a:pPr algn="just"/>
-            <a:r>
-              <a:rPr lang="ru-RU" dirty="0" err="1" smtClean="0">
-                <a:latin typeface="Courier New" pitchFamily="49" charset="0"/>
-                <a:cs typeface="Courier New" pitchFamily="49" charset="0"/>
-              </a:rPr>
-              <a:t>Console.WriteLine</a:t>
-            </a:r>
-            <a:r>
-              <a:rPr lang="ru-RU" dirty="0" smtClean="0">
-                <a:latin typeface="Courier New" pitchFamily="49" charset="0"/>
-                <a:cs typeface="Courier New" pitchFamily="49" charset="0"/>
-              </a:rPr>
-              <a:t>("Введите число:");</a:t>
-            </a:r>
-          </a:p>
-          <a:p>
-            <a:pPr algn="just"/>
-            <a:r>
-              <a:rPr lang="ru-RU" dirty="0" err="1" smtClean="0">
-                <a:latin typeface="Courier New" pitchFamily="49" charset="0"/>
-                <a:cs typeface="Courier New" pitchFamily="49" charset="0"/>
-              </a:rPr>
-              <a:t>string</a:t>
-            </a:r>
-            <a:r>
-              <a:rPr lang="ru-RU" dirty="0" smtClean="0">
-                <a:latin typeface="Courier New" pitchFamily="49" charset="0"/>
-                <a:cs typeface="Courier New" pitchFamily="49" charset="0"/>
-              </a:rPr>
-              <a:t> </a:t>
-            </a:r>
-            <a:r>
-              <a:rPr lang="ru-RU" dirty="0" err="1" smtClean="0">
-                <a:latin typeface="Courier New" pitchFamily="49" charset="0"/>
-                <a:cs typeface="Courier New" pitchFamily="49" charset="0"/>
-              </a:rPr>
-              <a:t>number</a:t>
-            </a:r>
-            <a:r>
-              <a:rPr lang="ru-RU" dirty="0" smtClean="0">
-                <a:latin typeface="Courier New" pitchFamily="49" charset="0"/>
-                <a:cs typeface="Courier New" pitchFamily="49" charset="0"/>
-              </a:rPr>
-              <a:t> = </a:t>
-            </a:r>
-            <a:r>
-              <a:rPr lang="ru-RU" dirty="0" err="1" smtClean="0">
-                <a:latin typeface="Courier New" pitchFamily="49" charset="0"/>
-                <a:cs typeface="Courier New" pitchFamily="49" charset="0"/>
-              </a:rPr>
-              <a:t>Console.ReadLine</a:t>
-            </a:r>
-            <a:r>
-              <a:rPr lang="ru-RU" dirty="0" smtClean="0">
-                <a:latin typeface="Courier New" pitchFamily="49" charset="0"/>
-                <a:cs typeface="Courier New" pitchFamily="49" charset="0"/>
-              </a:rPr>
-              <a:t>();</a:t>
-            </a:r>
-          </a:p>
-          <a:p>
-            <a:pPr algn="just"/>
-            <a:r>
-              <a:rPr lang="ru-RU" dirty="0" smtClean="0">
-                <a:latin typeface="Times New Roman" pitchFamily="18" charset="0"/>
-                <a:cs typeface="Times New Roman" pitchFamily="18" charset="0"/>
-              </a:rPr>
-              <a:t>Переменная </a:t>
-            </a:r>
-            <a:r>
-              <a:rPr lang="ru-RU" dirty="0" err="1" smtClean="0">
-                <a:latin typeface="Times New Roman" pitchFamily="18" charset="0"/>
-                <a:cs typeface="Times New Roman" pitchFamily="18" charset="0"/>
-              </a:rPr>
-              <a:t>number</a:t>
-            </a:r>
-            <a:r>
-              <a:rPr lang="ru-RU" dirty="0" smtClean="0">
-                <a:latin typeface="Times New Roman" pitchFamily="18" charset="0"/>
-                <a:cs typeface="Times New Roman" pitchFamily="18" charset="0"/>
-              </a:rPr>
-              <a:t> будет иметь тип данных </a:t>
-            </a:r>
-            <a:r>
-              <a:rPr lang="ru-RU" dirty="0" err="1" smtClean="0">
-                <a:latin typeface="Times New Roman" pitchFamily="18" charset="0"/>
-                <a:cs typeface="Times New Roman" pitchFamily="18" charset="0"/>
-              </a:rPr>
-              <a:t>string</a:t>
-            </a:r>
-            <a:r>
-              <a:rPr lang="ru-RU" dirty="0" smtClean="0">
-                <a:latin typeface="Times New Roman" pitchFamily="18" charset="0"/>
-                <a:cs typeface="Times New Roman" pitchFamily="18" charset="0"/>
-              </a:rPr>
-              <a:t>, несмотря на то что в консоль мы введем число.</a:t>
-            </a:r>
-          </a:p>
-          <a:p>
-            <a:pPr algn="just"/>
-            <a:r>
-              <a:rPr lang="ru-RU" dirty="0" smtClean="0">
-                <a:latin typeface="Times New Roman" pitchFamily="18" charset="0"/>
-                <a:cs typeface="Times New Roman" pitchFamily="18" charset="0"/>
-              </a:rPr>
-              <a:t>Это будет выглядеть похожим образом:</a:t>
-            </a:r>
-          </a:p>
-          <a:p>
-            <a:pPr algn="just"/>
-            <a:r>
-              <a:rPr lang="ru-RU" dirty="0" err="1">
-                <a:latin typeface="Courier New" pitchFamily="49" charset="0"/>
-                <a:cs typeface="Courier New" pitchFamily="49" charset="0"/>
-              </a:rPr>
-              <a:t>string</a:t>
-            </a:r>
-            <a:r>
-              <a:rPr lang="ru-RU" dirty="0">
-                <a:latin typeface="Courier New" pitchFamily="49" charset="0"/>
-                <a:cs typeface="Courier New" pitchFamily="49" charset="0"/>
-              </a:rPr>
-              <a:t> </a:t>
-            </a:r>
-            <a:r>
-              <a:rPr lang="ru-RU" dirty="0" err="1">
-                <a:latin typeface="Courier New" pitchFamily="49" charset="0"/>
-                <a:cs typeface="Courier New" pitchFamily="49" charset="0"/>
-              </a:rPr>
-              <a:t>number</a:t>
-            </a:r>
-            <a:r>
-              <a:rPr lang="ru-RU" dirty="0">
-                <a:latin typeface="Courier New" pitchFamily="49" charset="0"/>
-                <a:cs typeface="Courier New" pitchFamily="49" charset="0"/>
-              </a:rPr>
-              <a:t> = "34";</a:t>
-            </a:r>
-          </a:p>
-          <a:p>
-            <a:pPr algn="just"/>
-            <a:r>
-              <a:rPr lang="ru-RU" dirty="0" smtClean="0">
-                <a:latin typeface="Times New Roman" pitchFamily="18" charset="0"/>
-                <a:cs typeface="Times New Roman" pitchFamily="18" charset="0"/>
-              </a:rPr>
-              <a:t>Представим, что нам нужно использовать число 34, например, для сложения, для этого нам надо переменную </a:t>
-            </a:r>
-            <a:r>
-              <a:rPr lang="ru-RU" dirty="0" err="1" smtClean="0">
-                <a:latin typeface="Times New Roman" pitchFamily="18" charset="0"/>
-                <a:cs typeface="Times New Roman" pitchFamily="18" charset="0"/>
-              </a:rPr>
-              <a:t>number</a:t>
-            </a:r>
-            <a:r>
-              <a:rPr lang="ru-RU" dirty="0" smtClean="0">
-                <a:latin typeface="Times New Roman" pitchFamily="18" charset="0"/>
-                <a:cs typeface="Times New Roman" pitchFamily="18" charset="0"/>
-              </a:rPr>
-              <a:t> с типом </a:t>
-            </a:r>
-            <a:r>
-              <a:rPr lang="ru-RU" dirty="0" err="1" smtClean="0">
-                <a:latin typeface="Times New Roman" pitchFamily="18" charset="0"/>
-                <a:cs typeface="Times New Roman" pitchFamily="18" charset="0"/>
-              </a:rPr>
-              <a:t>string</a:t>
-            </a:r>
-            <a:r>
-              <a:rPr lang="ru-RU" dirty="0" smtClean="0">
-                <a:latin typeface="Times New Roman" pitchFamily="18" charset="0"/>
-                <a:cs typeface="Times New Roman" pitchFamily="18" charset="0"/>
-              </a:rPr>
-              <a:t> конвертировать в числовой тип данных. Чтобы совершить данную операцию, существуют специальные методы.</a:t>
-            </a:r>
-            <a:endParaRPr lang="ru-RU" dirty="0">
-              <a:latin typeface="Times New Roman" pitchFamily="18" charset="0"/>
-              <a:cs typeface="Times New Roman" pitchFamily="18" charset="0"/>
-            </a:endParaRPr>
-          </a:p>
-        </p:txBody>
-      </p:sp>
-      <p:sp>
-        <p:nvSpPr>
-          <p:cNvPr id="3" name="Прямоугольник 2"/>
-          <p:cNvSpPr/>
-          <p:nvPr/>
-        </p:nvSpPr>
-        <p:spPr>
-          <a:xfrm>
-            <a:off x="0" y="3714752"/>
-            <a:ext cx="9144000" cy="3139321"/>
-          </a:xfrm>
-          <a:prstGeom prst="rect">
-            <a:avLst/>
-          </a:prstGeom>
-        </p:spPr>
-        <p:txBody>
-          <a:bodyPr wrap="square">
-            <a:spAutoFit/>
-          </a:bodyPr>
-          <a:lstStyle/>
-          <a:p>
-            <a:r>
-              <a:rPr lang="ru-RU" dirty="0" smtClean="0">
-                <a:latin typeface="Times New Roman" pitchFamily="18" charset="0"/>
-                <a:cs typeface="Times New Roman" pitchFamily="18" charset="0"/>
-              </a:rPr>
-              <a:t>Для конвертации данных из строки можно использовать метод </a:t>
-            </a:r>
-            <a:r>
-              <a:rPr lang="ru-RU" dirty="0" err="1" smtClean="0">
-                <a:latin typeface="Times New Roman" pitchFamily="18" charset="0"/>
-                <a:cs typeface="Times New Roman" pitchFamily="18" charset="0"/>
-              </a:rPr>
-              <a:t>Parse</a:t>
-            </a:r>
-            <a:endParaRPr lang="ru-RU" dirty="0" smtClean="0">
-              <a:latin typeface="Times New Roman" pitchFamily="18" charset="0"/>
-              <a:cs typeface="Times New Roman" pitchFamily="18" charset="0"/>
-            </a:endParaRPr>
-          </a:p>
-          <a:p>
-            <a:r>
-              <a:rPr lang="ru-RU" dirty="0" err="1" smtClean="0">
-                <a:latin typeface="Courier New" pitchFamily="49" charset="0"/>
-                <a:cs typeface="Courier New" pitchFamily="49" charset="0"/>
-              </a:rPr>
-              <a:t>int.Parse</a:t>
-            </a:r>
-            <a:r>
-              <a:rPr lang="ru-RU" dirty="0" smtClean="0">
-                <a:latin typeface="Courier New" pitchFamily="49" charset="0"/>
-                <a:cs typeface="Courier New" pitchFamily="49" charset="0"/>
-              </a:rPr>
-              <a:t>("34");</a:t>
-            </a:r>
-          </a:p>
-          <a:p>
-            <a:r>
-              <a:rPr lang="ru-RU" dirty="0" smtClean="0">
-                <a:latin typeface="Times New Roman" pitchFamily="18" charset="0"/>
-                <a:cs typeface="Times New Roman" pitchFamily="18" charset="0"/>
-              </a:rPr>
-              <a:t>Здесь </a:t>
-            </a:r>
-            <a:r>
-              <a:rPr lang="ru-RU" dirty="0" err="1" smtClean="0">
-                <a:latin typeface="Times New Roman" pitchFamily="18" charset="0"/>
-                <a:cs typeface="Times New Roman" pitchFamily="18" charset="0"/>
-              </a:rPr>
-              <a:t>int</a:t>
-            </a:r>
-            <a:r>
-              <a:rPr lang="ru-RU" dirty="0" smtClean="0">
-                <a:latin typeface="Times New Roman" pitchFamily="18" charset="0"/>
-                <a:cs typeface="Times New Roman" pitchFamily="18" charset="0"/>
-              </a:rPr>
-              <a:t> - тип, в который мы хотим преобразовать, а "34" - строковое значение числа.</a:t>
-            </a:r>
-          </a:p>
-          <a:p>
-            <a:r>
-              <a:rPr lang="ru-RU" dirty="0" smtClean="0">
-                <a:latin typeface="Times New Roman" pitchFamily="18" charset="0"/>
-                <a:cs typeface="Times New Roman" pitchFamily="18" charset="0"/>
-              </a:rPr>
-              <a:t>Если мы захотим преобразовать в другой тип, надо использовать его метод </a:t>
-            </a:r>
-            <a:r>
-              <a:rPr lang="ru-RU" dirty="0" err="1" smtClean="0">
-                <a:latin typeface="Times New Roman" pitchFamily="18" charset="0"/>
-                <a:cs typeface="Times New Roman" pitchFamily="18" charset="0"/>
-              </a:rPr>
-              <a:t>Parse</a:t>
-            </a:r>
-            <a:r>
-              <a:rPr lang="ru-RU" dirty="0" smtClean="0">
-                <a:latin typeface="Times New Roman" pitchFamily="18" charset="0"/>
-                <a:cs typeface="Times New Roman" pitchFamily="18" charset="0"/>
-              </a:rPr>
-              <a:t>()</a:t>
-            </a:r>
-          </a:p>
-          <a:p>
-            <a:r>
-              <a:rPr lang="ru-RU" dirty="0" err="1">
-                <a:latin typeface="Courier New" pitchFamily="49" charset="0"/>
-                <a:cs typeface="Courier New" pitchFamily="49" charset="0"/>
-              </a:rPr>
-              <a:t>double.Parse</a:t>
-            </a:r>
-            <a:r>
-              <a:rPr lang="ru-RU" dirty="0">
-                <a:latin typeface="Courier New" pitchFamily="49" charset="0"/>
-                <a:cs typeface="Courier New" pitchFamily="49" charset="0"/>
-              </a:rPr>
-              <a:t>("3.14");</a:t>
-            </a:r>
-          </a:p>
-          <a:p>
-            <a:r>
-              <a:rPr lang="ru-RU" dirty="0" err="1">
-                <a:latin typeface="Courier New" pitchFamily="49" charset="0"/>
-                <a:cs typeface="Courier New" pitchFamily="49" charset="0"/>
-              </a:rPr>
-              <a:t>byte.Parse</a:t>
-            </a:r>
-            <a:r>
-              <a:rPr lang="ru-RU" dirty="0">
-                <a:latin typeface="Courier New" pitchFamily="49" charset="0"/>
-                <a:cs typeface="Courier New" pitchFamily="49" charset="0"/>
-              </a:rPr>
-              <a:t>("128");</a:t>
-            </a:r>
-          </a:p>
-          <a:p>
-            <a:r>
-              <a:rPr lang="ru-RU" dirty="0" smtClean="0">
-                <a:latin typeface="Times New Roman" pitchFamily="18" charset="0"/>
-                <a:cs typeface="Times New Roman" pitchFamily="18" charset="0"/>
-              </a:rPr>
-              <a:t>Для использования результата конвертации его лучше сохранить в переменную:</a:t>
-            </a:r>
-          </a:p>
-          <a:p>
-            <a:r>
-              <a:rPr lang="ru-RU" dirty="0" err="1">
-                <a:latin typeface="Courier New" pitchFamily="49" charset="0"/>
-                <a:cs typeface="Courier New" pitchFamily="49" charset="0"/>
-              </a:rPr>
-              <a:t>int</a:t>
-            </a:r>
-            <a:r>
-              <a:rPr lang="ru-RU" dirty="0">
-                <a:latin typeface="Courier New" pitchFamily="49" charset="0"/>
-                <a:cs typeface="Courier New" pitchFamily="49" charset="0"/>
-              </a:rPr>
-              <a:t> </a:t>
-            </a:r>
-            <a:r>
-              <a:rPr lang="ru-RU" dirty="0" err="1">
-                <a:latin typeface="Courier New" pitchFamily="49" charset="0"/>
-                <a:cs typeface="Courier New" pitchFamily="49" charset="0"/>
-              </a:rPr>
-              <a:t>a</a:t>
-            </a:r>
-            <a:r>
-              <a:rPr lang="ru-RU" dirty="0">
-                <a:latin typeface="Courier New" pitchFamily="49" charset="0"/>
-                <a:cs typeface="Courier New" pitchFamily="49" charset="0"/>
-              </a:rPr>
-              <a:t> = </a:t>
-            </a:r>
-            <a:r>
-              <a:rPr lang="ru-RU" dirty="0" err="1">
-                <a:latin typeface="Courier New" pitchFamily="49" charset="0"/>
-                <a:cs typeface="Courier New" pitchFamily="49" charset="0"/>
-              </a:rPr>
-              <a:t>int.Parse</a:t>
-            </a:r>
-            <a:r>
-              <a:rPr lang="ru-RU" dirty="0">
-                <a:latin typeface="Courier New" pitchFamily="49" charset="0"/>
-                <a:cs typeface="Courier New" pitchFamily="49" charset="0"/>
-              </a:rPr>
-              <a:t>("34");</a:t>
-            </a:r>
-          </a:p>
-          <a:p>
-            <a:r>
-              <a:rPr lang="ru-RU" dirty="0" smtClean="0">
-                <a:latin typeface="Times New Roman" pitchFamily="18" charset="0"/>
-                <a:cs typeface="Times New Roman" pitchFamily="18" charset="0"/>
-              </a:rPr>
-              <a:t>Таким образом при помощи метода </a:t>
-            </a:r>
-            <a:r>
-              <a:rPr lang="ru-RU" dirty="0" err="1" smtClean="0">
-                <a:latin typeface="Times New Roman" pitchFamily="18" charset="0"/>
-                <a:cs typeface="Times New Roman" pitchFamily="18" charset="0"/>
-              </a:rPr>
-              <a:t>Parse</a:t>
-            </a:r>
-            <a:r>
-              <a:rPr lang="ru-RU" dirty="0" smtClean="0">
-                <a:latin typeface="Times New Roman" pitchFamily="18" charset="0"/>
-                <a:cs typeface="Times New Roman" pitchFamily="18" charset="0"/>
-              </a:rPr>
-              <a:t> мы можем преобразовывать строку в соответствующий тип. </a:t>
-            </a:r>
-            <a:endParaRPr lang="en-US" dirty="0" smtClean="0">
-              <a:latin typeface="Times New Roman" pitchFamily="18" charset="0"/>
-              <a:cs typeface="Times New Roman" pitchFamily="18" charset="0"/>
-            </a:endParaRPr>
-          </a:p>
-          <a:p>
-            <a:r>
-              <a:rPr lang="en-US" dirty="0" err="1">
-                <a:latin typeface="Courier New" pitchFamily="49" charset="0"/>
-                <a:cs typeface="Courier New" pitchFamily="49" charset="0"/>
-              </a:rPr>
-              <a:t>int</a:t>
-            </a:r>
-            <a:r>
-              <a:rPr lang="en-US" dirty="0">
-                <a:latin typeface="Courier New" pitchFamily="49" charset="0"/>
-                <a:cs typeface="Courier New" pitchFamily="49" charset="0"/>
-              </a:rPr>
-              <a:t> a = </a:t>
-            </a:r>
-            <a:r>
-              <a:rPr lang="en-US" dirty="0" err="1">
-                <a:latin typeface="Courier New" pitchFamily="49" charset="0"/>
-                <a:cs typeface="Courier New" pitchFamily="49" charset="0"/>
-              </a:rPr>
-              <a:t>int.Parse</a:t>
-            </a:r>
-            <a:r>
-              <a:rPr lang="en-US" dirty="0">
-                <a:latin typeface="Courier New" pitchFamily="49" charset="0"/>
-                <a:cs typeface="Courier New" pitchFamily="49" charset="0"/>
-              </a:rPr>
-              <a:t>(</a:t>
-            </a:r>
-            <a:r>
-              <a:rPr lang="en-US" dirty="0" err="1">
-                <a:latin typeface="Courier New" pitchFamily="49" charset="0"/>
-                <a:cs typeface="Courier New" pitchFamily="49" charset="0"/>
-              </a:rPr>
-              <a:t>Console.ReadLine</a:t>
-            </a:r>
-            <a:r>
-              <a:rPr lang="en-US" dirty="0">
-                <a:latin typeface="Courier New" pitchFamily="49" charset="0"/>
-                <a:cs typeface="Courier New" pitchFamily="49" charset="0"/>
-              </a:rPr>
-              <a:t>());</a:t>
-            </a:r>
-            <a:endParaRPr lang="ru-RU" dirty="0">
-              <a:latin typeface="Courier New" pitchFamily="49" charset="0"/>
-              <a:cs typeface="Courier New" pitchFamily="49" charset="0"/>
-            </a:endParaRPr>
-          </a:p>
-        </p:txBody>
-      </p:sp>
-    </p:spTree>
-  </p:cSld>
-  <p:clrMapOvr>
-    <a:masterClrMapping/>
-  </p:clrMapOvr>
-</p:sld>
-</file>
-
-<file path=ppt/slides/slide7.xml><?xml version="1.0" encoding="utf-8"?>
-<p:sld xmlns:a="http://schemas.openxmlformats.org/drawingml/2006/main" xmlns:r="http://schemas.openxmlformats.org/officeDocument/2006/relationships" xmlns:p="http://schemas.openxmlformats.org/presentationml/2006/main">
-  <p:cSld>
-    <p:spTree>
-      <p:nvGrpSpPr>
-        <p:cNvPr id="1" name=""/>
-        <p:cNvGrpSpPr/>
-        <p:nvPr/>
-      </p:nvGrpSpPr>
-      <p:grpSpPr>
-        <a:xfrm>
-          <a:off x="0" y="0"/>
-          <a:ext cx="0" cy="0"/>
-          <a:chOff x="0" y="0"/>
-          <a:chExt cx="0" cy="0"/>
-        </a:xfrm>
-      </p:grpSpPr>
-      <p:sp>
-        <p:nvSpPr>
-          <p:cNvPr id="3" name="Прямоугольник 2"/>
-          <p:cNvSpPr/>
-          <p:nvPr/>
-        </p:nvSpPr>
-        <p:spPr>
-          <a:xfrm>
-            <a:off x="0" y="0"/>
-            <a:ext cx="9144000" cy="3416320"/>
-          </a:xfrm>
-          <a:prstGeom prst="rect">
-            <a:avLst/>
-          </a:prstGeom>
-        </p:spPr>
-        <p:txBody>
-          <a:bodyPr wrap="square">
-            <a:spAutoFit/>
-          </a:bodyPr>
-          <a:lstStyle/>
-          <a:p>
-            <a:pPr algn="just"/>
-            <a:r>
-              <a:rPr lang="ru-RU" dirty="0" smtClean="0">
-                <a:latin typeface="Times New Roman" pitchFamily="18" charset="0"/>
-                <a:cs typeface="Times New Roman" pitchFamily="18" charset="0"/>
-              </a:rPr>
-              <a:t>Для конвертации данных из любого типа в любой можно использовать класс </a:t>
-            </a:r>
-            <a:r>
-              <a:rPr lang="ru-RU" dirty="0" err="1" smtClean="0">
-                <a:latin typeface="Times New Roman" pitchFamily="18" charset="0"/>
-                <a:cs typeface="Times New Roman" pitchFamily="18" charset="0"/>
-              </a:rPr>
-              <a:t>Convert</a:t>
-            </a:r>
-            <a:endParaRPr lang="ru-RU" dirty="0" smtClean="0">
-              <a:latin typeface="Times New Roman" pitchFamily="18" charset="0"/>
-              <a:cs typeface="Times New Roman" pitchFamily="18" charset="0"/>
-            </a:endParaRPr>
-          </a:p>
-          <a:p>
-            <a:pPr algn="just"/>
-            <a:r>
-              <a:rPr lang="ru-RU" dirty="0" smtClean="0">
-                <a:latin typeface="Courier New" pitchFamily="49" charset="0"/>
-                <a:cs typeface="Courier New" pitchFamily="49" charset="0"/>
-              </a:rPr>
-              <a:t>Convert.ToInt32("34");</a:t>
-            </a:r>
-          </a:p>
-          <a:p>
-            <a:pPr algn="just"/>
-            <a:r>
-              <a:rPr lang="ru-RU" dirty="0" smtClean="0">
-                <a:latin typeface="Times New Roman" pitchFamily="18" charset="0"/>
-                <a:cs typeface="Times New Roman" pitchFamily="18" charset="0"/>
-              </a:rPr>
-              <a:t>Здесь Int32 - название типа в библиотеке .NET (согласно таблице), в который мы хотим преобразовать, а "34" - строковое значение числа.</a:t>
-            </a:r>
-          </a:p>
-          <a:p>
-            <a:pPr algn="just"/>
-            <a:r>
-              <a:rPr lang="ru-RU" dirty="0" smtClean="0">
-                <a:latin typeface="Times New Roman" pitchFamily="18" charset="0"/>
-                <a:cs typeface="Times New Roman" pitchFamily="18" charset="0"/>
-              </a:rPr>
-              <a:t>Если мы захотим преобразовать в другой тип, надо использовать его название в библиотеке .NET.</a:t>
-            </a:r>
-          </a:p>
-          <a:p>
-            <a:pPr algn="just"/>
-            <a:r>
-              <a:rPr lang="ru-RU" dirty="0" err="1">
-                <a:latin typeface="Courier New" pitchFamily="49" charset="0"/>
-                <a:cs typeface="Courier New" pitchFamily="49" charset="0"/>
-              </a:rPr>
-              <a:t>Convert.ToChar</a:t>
-            </a:r>
-            <a:r>
-              <a:rPr lang="ru-RU" dirty="0">
-                <a:latin typeface="Courier New" pitchFamily="49" charset="0"/>
-                <a:cs typeface="Courier New" pitchFamily="49" charset="0"/>
-              </a:rPr>
-              <a:t>("!");</a:t>
-            </a:r>
-          </a:p>
-          <a:p>
-            <a:pPr algn="just"/>
-            <a:r>
-              <a:rPr lang="ru-RU" dirty="0" err="1">
-                <a:latin typeface="Courier New" pitchFamily="49" charset="0"/>
-                <a:cs typeface="Courier New" pitchFamily="49" charset="0"/>
-              </a:rPr>
-              <a:t>Convert.ToBoolean</a:t>
-            </a:r>
-            <a:r>
-              <a:rPr lang="ru-RU" dirty="0">
-                <a:latin typeface="Courier New" pitchFamily="49" charset="0"/>
-                <a:cs typeface="Courier New" pitchFamily="49" charset="0"/>
-              </a:rPr>
-              <a:t>("</a:t>
-            </a:r>
-            <a:r>
-              <a:rPr lang="ru-RU" dirty="0" err="1">
-                <a:latin typeface="Courier New" pitchFamily="49" charset="0"/>
-                <a:cs typeface="Courier New" pitchFamily="49" charset="0"/>
-              </a:rPr>
-              <a:t>True</a:t>
-            </a:r>
-            <a:r>
-              <a:rPr lang="ru-RU" dirty="0">
-                <a:latin typeface="Courier New" pitchFamily="49" charset="0"/>
-                <a:cs typeface="Courier New" pitchFamily="49" charset="0"/>
-              </a:rPr>
-              <a:t>");</a:t>
-            </a:r>
-          </a:p>
-          <a:p>
-            <a:pPr algn="just"/>
-            <a:r>
-              <a:rPr lang="ru-RU" dirty="0" smtClean="0">
-                <a:latin typeface="Times New Roman" pitchFamily="18" charset="0"/>
-                <a:cs typeface="Times New Roman" pitchFamily="18" charset="0"/>
-              </a:rPr>
-              <a:t>Для использования результата конвертации его лучше сохранить в переменную:</a:t>
-            </a:r>
-          </a:p>
-          <a:p>
-            <a:pPr algn="just"/>
-            <a:r>
-              <a:rPr lang="ru-RU" dirty="0" err="1">
-                <a:latin typeface="Courier New" pitchFamily="49" charset="0"/>
-                <a:cs typeface="Courier New" pitchFamily="49" charset="0"/>
-              </a:rPr>
-              <a:t>string</a:t>
-            </a:r>
-            <a:r>
-              <a:rPr lang="ru-RU" dirty="0">
-                <a:latin typeface="Courier New" pitchFamily="49" charset="0"/>
-                <a:cs typeface="Courier New" pitchFamily="49" charset="0"/>
-              </a:rPr>
-              <a:t> </a:t>
-            </a:r>
-            <a:r>
-              <a:rPr lang="ru-RU" dirty="0" err="1">
-                <a:latin typeface="Courier New" pitchFamily="49" charset="0"/>
-                <a:cs typeface="Courier New" pitchFamily="49" charset="0"/>
-              </a:rPr>
-              <a:t>a</a:t>
-            </a:r>
-            <a:r>
-              <a:rPr lang="ru-RU" dirty="0">
-                <a:latin typeface="Courier New" pitchFamily="49" charset="0"/>
-                <a:cs typeface="Courier New" pitchFamily="49" charset="0"/>
-              </a:rPr>
-              <a:t> = </a:t>
-            </a:r>
-            <a:r>
-              <a:rPr lang="ru-RU" dirty="0" err="1">
-                <a:latin typeface="Courier New" pitchFamily="49" charset="0"/>
-                <a:cs typeface="Courier New" pitchFamily="49" charset="0"/>
-              </a:rPr>
-              <a:t>Convert.ToString</a:t>
-            </a:r>
-            <a:r>
-              <a:rPr lang="ru-RU" dirty="0">
-                <a:latin typeface="Courier New" pitchFamily="49" charset="0"/>
-                <a:cs typeface="Courier New" pitchFamily="49" charset="0"/>
-              </a:rPr>
-              <a:t>('!');</a:t>
-            </a:r>
-          </a:p>
-          <a:p>
-            <a:pPr algn="just"/>
-            <a:r>
-              <a:rPr lang="ru-RU" dirty="0" smtClean="0">
-                <a:latin typeface="Times New Roman" pitchFamily="18" charset="0"/>
-                <a:cs typeface="Times New Roman" pitchFamily="18" charset="0"/>
-              </a:rPr>
-              <a:t>Таким образом при помощи класса </a:t>
-            </a:r>
-            <a:r>
-              <a:rPr lang="ru-RU" dirty="0" err="1" smtClean="0">
-                <a:latin typeface="Times New Roman" pitchFamily="18" charset="0"/>
-                <a:cs typeface="Times New Roman" pitchFamily="18" charset="0"/>
-              </a:rPr>
-              <a:t>Convert</a:t>
-            </a:r>
-            <a:r>
-              <a:rPr lang="ru-RU" dirty="0" smtClean="0">
-                <a:latin typeface="Times New Roman" pitchFamily="18" charset="0"/>
-                <a:cs typeface="Times New Roman" pitchFamily="18" charset="0"/>
-              </a:rPr>
-              <a:t> мы можем преобразовывать любые типы данных. </a:t>
-            </a:r>
-            <a:endParaRPr lang="ru-RU" dirty="0">
-              <a:latin typeface="Times New Roman" pitchFamily="18" charset="0"/>
-              <a:cs typeface="Times New Roman" pitchFamily="18" charset="0"/>
-            </a:endParaRPr>
-          </a:p>
         </p:txBody>
       </p:sp>
       <p:pic>
         <p:nvPicPr>
-          <p:cNvPr id="16386" name="Picture 2"/>
+          <p:cNvPr id="5121" name="Picture 1"/>
           <p:cNvPicPr>
             <a:picLocks noChangeAspect="1" noChangeArrowheads="1"/>
           </p:cNvPicPr>
           <p:nvPr/>
         </p:nvPicPr>
         <p:blipFill>
-          <a:blip r:embed="rId2"/>
+          <a:blip r:embed="rId3"/>
           <a:srcRect/>
           <a:stretch>
             <a:fillRect/>
@@ -6741,8 +7040,8 @@
         </p:blipFill>
         <p:spPr bwMode="auto">
           <a:xfrm>
-            <a:off x="1785918" y="3714752"/>
-            <a:ext cx="5201366" cy="1571636"/>
+            <a:off x="4857752" y="2500282"/>
+            <a:ext cx="3514725" cy="1133475"/>
           </a:xfrm>
           <a:prstGeom prst="rect">
             <a:avLst/>
@@ -6765,8 +7064,8 @@
         </p:nvSpPr>
         <p:spPr>
           <a:xfrm>
-            <a:off x="2857488" y="5357826"/>
-            <a:ext cx="2848665" cy="369332"/>
+            <a:off x="5214942" y="3643314"/>
+            <a:ext cx="2735749" cy="369332"/>
           </a:xfrm>
           <a:prstGeom prst="rect">
             <a:avLst/>
@@ -6779,10 +7078,85 @@
           <a:lstStyle/>
           <a:p>
             <a:r>
-              <a:rPr lang="ru-RU" b="1" dirty="0" smtClean="0"/>
-              <a:t>Чему равны переменные?</a:t>
-            </a:r>
-            <a:endParaRPr lang="ru-RU" b="1" dirty="0"/>
+              <a:rPr lang="ru-RU" b="1" dirty="0" smtClean="0">
+                <a:solidFill>
+                  <a:srgbClr val="FF0000"/>
+                </a:solidFill>
+                <a:latin typeface="Times New Roman" pitchFamily="18" charset="0"/>
+                <a:cs typeface="Times New Roman" pitchFamily="18" charset="0"/>
+              </a:rPr>
+              <a:t>ТАК НЕЖЕЛАТЕЛЬНО</a:t>
+            </a:r>
+            <a:endParaRPr lang="ru-RU" b="1" dirty="0">
+              <a:solidFill>
+                <a:srgbClr val="FF0000"/>
+              </a:solidFill>
+            </a:endParaRPr>
+          </a:p>
+        </p:txBody>
+      </p:sp>
+      <p:pic>
+        <p:nvPicPr>
+          <p:cNvPr id="5122" name="Picture 2"/>
+          <p:cNvPicPr>
+            <a:picLocks noChangeAspect="1" noChangeArrowheads="1"/>
+          </p:cNvPicPr>
+          <p:nvPr/>
+        </p:nvPicPr>
+        <p:blipFill>
+          <a:blip r:embed="rId4"/>
+          <a:srcRect/>
+          <a:stretch>
+            <a:fillRect/>
+          </a:stretch>
+        </p:blipFill>
+        <p:spPr bwMode="auto">
+          <a:xfrm>
+            <a:off x="785786" y="4124305"/>
+            <a:ext cx="7496175" cy="2733695"/>
+          </a:xfrm>
+          <a:prstGeom prst="rect">
+            <a:avLst/>
+          </a:prstGeom>
+          <a:noFill/>
+          <a:ln w="9525">
+            <a:noFill/>
+            <a:miter lim="800000"/>
+            <a:headEnd/>
+            <a:tailEnd/>
+          </a:ln>
+          <a:effectLst/>
+        </p:spPr>
+      </p:pic>
+      <p:sp>
+        <p:nvSpPr>
+          <p:cNvPr id="8" name="Прямоугольник 7"/>
+          <p:cNvSpPr/>
+          <p:nvPr/>
+        </p:nvSpPr>
+        <p:spPr>
+          <a:xfrm>
+            <a:off x="2571736" y="0"/>
+            <a:ext cx="4253216" cy="646331"/>
+          </a:xfrm>
+          <a:prstGeom prst="rect">
+            <a:avLst/>
+          </a:prstGeom>
+        </p:spPr>
+        <p:txBody>
+          <a:bodyPr wrap="none">
+            <a:spAutoFit/>
+          </a:bodyPr>
+          <a:lstStyle/>
+          <a:p>
+            <a:r>
+              <a:rPr lang="ru-RU" sz="3600" b="1" dirty="0" smtClean="0">
+                <a:latin typeface="Times New Roman" pitchFamily="18" charset="0"/>
+                <a:cs typeface="Times New Roman" pitchFamily="18" charset="0"/>
+              </a:rPr>
+              <a:t>ИНКАПСУЛЯЦИЯ</a:t>
+            </a:r>
+            <a:endParaRPr lang="ru-RU" sz="3600" b="1" dirty="0"/>
           </a:p>
         </p:txBody>
       </p:sp>
@@ -6820,7 +7194,7 @@
         <p:spPr>
           <a:xfrm>
             <a:off x="0" y="0"/>
-            <a:ext cx="9144000" cy="1200329"/>
+            <a:ext cx="9144000" cy="1754326"/>
           </a:xfrm>
           <a:prstGeom prst="rect">
             <a:avLst/>
@@ -6834,53 +7208,18 @@
           <a:p>
             <a:pPr algn="just"/>
             <a:r>
+              <a:rPr lang="ru-RU" b="1" dirty="0" smtClean="0">
+                <a:latin typeface="Times New Roman" pitchFamily="18" charset="0"/>
+                <a:cs typeface="Times New Roman" pitchFamily="18" charset="0"/>
+              </a:rPr>
+              <a:t>Модификаторы доступа </a:t>
+            </a:r>
+            <a:r>
               <a:rPr lang="ru-RU" dirty="0" smtClean="0">
                 <a:latin typeface="Times New Roman" pitchFamily="18" charset="0"/>
                 <a:cs typeface="Times New Roman" pitchFamily="18" charset="0"/>
               </a:rPr>
-              <a:t>Нередко бывает удобно, чтобы переменная/параметр значимого типа могли принимать значение </a:t>
-            </a:r>
-            <a:r>
-              <a:rPr lang="ru-RU" dirty="0" err="1" smtClean="0">
-                <a:latin typeface="Times New Roman" pitchFamily="18" charset="0"/>
-                <a:cs typeface="Times New Roman" pitchFamily="18" charset="0"/>
-              </a:rPr>
-              <a:t>null</a:t>
-            </a:r>
-            <a:r>
-              <a:rPr lang="ru-RU" dirty="0" smtClean="0">
-                <a:latin typeface="Times New Roman" pitchFamily="18" charset="0"/>
-                <a:cs typeface="Times New Roman" pitchFamily="18" charset="0"/>
-              </a:rPr>
-              <a:t>, Например, получаем числовое значение из базы данных, которое в </a:t>
-            </a:r>
-            <a:r>
-              <a:rPr lang="ru-RU" dirty="0" err="1" smtClean="0">
-                <a:latin typeface="Times New Roman" pitchFamily="18" charset="0"/>
-                <a:cs typeface="Times New Roman" pitchFamily="18" charset="0"/>
-              </a:rPr>
-              <a:t>бд</a:t>
-            </a:r>
-            <a:r>
-              <a:rPr lang="ru-RU" dirty="0" smtClean="0">
-                <a:latin typeface="Times New Roman" pitchFamily="18" charset="0"/>
-                <a:cs typeface="Times New Roman" pitchFamily="18" charset="0"/>
-              </a:rPr>
-              <a:t> может отсутствовать. То есть, если значение в базе данных есть - получим число, если нет - то </a:t>
-            </a:r>
-            <a:r>
-              <a:rPr lang="ru-RU" dirty="0" err="1" smtClean="0">
-                <a:latin typeface="Times New Roman" pitchFamily="18" charset="0"/>
-                <a:cs typeface="Times New Roman" pitchFamily="18" charset="0"/>
-              </a:rPr>
-              <a:t>null</a:t>
-            </a:r>
-            <a:r>
-              <a:rPr lang="ru-RU" dirty="0" smtClean="0">
-                <a:latin typeface="Times New Roman" pitchFamily="18" charset="0"/>
-                <a:cs typeface="Times New Roman" pitchFamily="18" charset="0"/>
-              </a:rPr>
-              <a:t>.</a:t>
+              <a:t>используются для того, чтобы ограничить видимость элементов типов и непосредственно самих типов. Видимость, в смысле того, можете ли вы обратиться к элементу типа или самому типу (например, создать объект класса) снаружи. Модификаторы доступа - это один из основных инструментов реализации принципа инкапсуляции - сокрытия деталей реализации. С помощью них вы можете управлять уровнем доступа к элементам класса.</a:t>
             </a:r>
             <a:endParaRPr lang="ru-RU" dirty="0">
               <a:latin typeface="Times New Roman" pitchFamily="18" charset="0"/>
@@ -6891,7 +7230,7 @@
       </p:sp>
       <p:pic>
         <p:nvPicPr>
-          <p:cNvPr id="2050" name="Picture 2"/>
+          <p:cNvPr id="23554" name="Picture 2"/>
           <p:cNvPicPr>
             <a:picLocks noChangeAspect="1" noChangeArrowheads="1"/>
           </p:cNvPicPr>
@@ -6906,8 +7245,8 @@
         </p:blipFill>
         <p:spPr bwMode="auto">
           <a:xfrm>
-            <a:off x="0" y="1185881"/>
-            <a:ext cx="9144000" cy="4171945"/>
+            <a:off x="0" y="1643050"/>
+            <a:ext cx="4257675" cy="2771775"/>
           </a:xfrm>
           <a:prstGeom prst="rect">
             <a:avLst/>
@@ -6924,7 +7263,7 @@
       </p:pic>
       <p:pic>
         <p:nvPicPr>
-          <p:cNvPr id="2051" name="Picture 3"/>
+          <p:cNvPr id="23556" name="Picture 4"/>
           <p:cNvPicPr>
             <a:picLocks noChangeAspect="1" noChangeArrowheads="1"/>
           </p:cNvPicPr>
@@ -6939,8 +7278,91 @@
         </p:blipFill>
         <p:spPr bwMode="auto">
           <a:xfrm>
-            <a:off x="0" y="5429264"/>
-            <a:ext cx="9144000" cy="1428736"/>
+            <a:off x="5724525" y="1928802"/>
+            <a:ext cx="3419475" cy="2047875"/>
+          </a:xfrm>
+          <a:prstGeom prst="rect">
+            <a:avLst/>
+          </a:prstGeom>
+          <a:noFill/>
+          <a:ln w="9525">
+            <a:noFill/>
+            <a:miter lim="800000"/>
+            <a:headEnd/>
+            <a:tailEnd/>
+          </a:ln>
+          <a:effectLst/>
+        </p:spPr>
+      </p:pic>
+      <p:sp>
+        <p:nvSpPr>
+          <p:cNvPr id="7" name="Прямоугольник 6"/>
+          <p:cNvSpPr/>
+          <p:nvPr/>
+        </p:nvSpPr>
+        <p:spPr>
+          <a:xfrm>
+            <a:off x="0" y="4429132"/>
+            <a:ext cx="9144000" cy="1200329"/>
+          </a:xfrm>
+          <a:prstGeom prst="rect">
+            <a:avLst/>
+          </a:prstGeom>
+        </p:spPr>
+        <p:txBody>
+          <a:bodyPr wrap="square">
+            <a:spAutoFit/>
+          </a:bodyPr>
+          <a:lstStyle/>
+          <a:p>
+            <a:pPr algn="just"/>
+            <a:r>
+              <a:rPr lang="ru-RU" dirty="0" smtClean="0">
+                <a:latin typeface="Times New Roman" pitchFamily="18" charset="0"/>
+                <a:cs typeface="Times New Roman" pitchFamily="18" charset="0"/>
+              </a:rPr>
+              <a:t>Константы - это неизменяемые сущности, которые объявляются на уровне типа. Значение константы должно быть известно на этапе компиляции. Для объявления константы используется ключевое слово </a:t>
+            </a:r>
+            <a:r>
+              <a:rPr lang="ru-RU" dirty="0" err="1" smtClean="0">
+                <a:latin typeface="Times New Roman" pitchFamily="18" charset="0"/>
+                <a:cs typeface="Times New Roman" pitchFamily="18" charset="0"/>
+              </a:rPr>
+              <a:t>const</a:t>
+            </a:r>
+            <a:r>
+              <a:rPr lang="ru-RU" dirty="0" smtClean="0">
+                <a:latin typeface="Times New Roman" pitchFamily="18" charset="0"/>
+                <a:cs typeface="Times New Roman" pitchFamily="18" charset="0"/>
+              </a:rPr>
+              <a:t>, которое ставится после модификатора доступа (если он указывается) и перед именем типа.</a:t>
+            </a:r>
+            <a:endParaRPr lang="ru-RU" dirty="0">
+              <a:latin typeface="Times New Roman" pitchFamily="18" charset="0"/>
+              <a:cs typeface="Times New Roman" pitchFamily="18" charset="0"/>
+            </a:endParaRPr>
+          </a:p>
+        </p:txBody>
+      </p:sp>
+      <p:pic>
+        <p:nvPicPr>
+          <p:cNvPr id="23557" name="Picture 5"/>
+          <p:cNvPicPr>
+            <a:picLocks noChangeAspect="1" noChangeArrowheads="1"/>
+          </p:cNvPicPr>
+          <p:nvPr/>
+        </p:nvPicPr>
+        <p:blipFill>
+          <a:blip r:embed="rId4"/>
+          <a:srcRect/>
+          <a:stretch>
+            <a:fillRect/>
+          </a:stretch>
+        </p:blipFill>
+        <p:spPr bwMode="auto">
+          <a:xfrm>
+            <a:off x="2285984" y="5591175"/>
+            <a:ext cx="4638675" cy="1266825"/>
           </a:xfrm>
           <a:prstGeom prst="rect">
             <a:avLst/>
@@ -6982,7 +7404,7 @@
       </p:grpSpPr>
       <p:pic>
         <p:nvPicPr>
-          <p:cNvPr id="18434" name="Picture 2"/>
+          <p:cNvPr id="24578" name="Picture 2"/>
           <p:cNvPicPr>
             <a:picLocks noChangeAspect="1" noChangeArrowheads="1"/>
           </p:cNvPicPr>
@@ -6990,15 +7412,15 @@
         </p:nvPicPr>
         <p:blipFill>
           <a:blip r:embed="rId2"/>
-          <a:srcRect t="5556"/>
+          <a:srcRect/>
           <a:stretch>
             <a:fillRect/>
           </a:stretch>
         </p:blipFill>
         <p:spPr bwMode="auto">
           <a:xfrm>
-            <a:off x="0" y="764704"/>
-            <a:ext cx="4305300" cy="1214437"/>
+            <a:off x="0" y="1785926"/>
+            <a:ext cx="9144000" cy="4774912"/>
           </a:xfrm>
           <a:prstGeom prst="rect">
             <a:avLst/>
@@ -7021,206 +7443,94 @@
         </p:nvSpPr>
         <p:spPr>
           <a:xfrm>
-            <a:off x="285720" y="1979548"/>
-            <a:ext cx="2493055" cy="369332"/>
+            <a:off x="0" y="0"/>
+            <a:ext cx="9144000" cy="1631216"/>
           </a:xfrm>
           <a:prstGeom prst="rect">
             <a:avLst/>
           </a:prstGeom>
         </p:spPr>
         <p:txBody>
-          <a:bodyPr wrap="none">
+          <a:bodyPr wrap="square">
             <a:spAutoFit/>
           </a:bodyPr>
           <a:lstStyle/>
           <a:p>
-            <a:r>
-              <a:rPr lang="ru-RU" dirty="0"/>
-              <a:t>Локальная переменная</a:t>
-            </a:r>
-          </a:p>
-        </p:txBody>
-      </p:sp>
-      <p:pic>
-        <p:nvPicPr>
-          <p:cNvPr id="18435" name="Picture 3"/>
-          <p:cNvPicPr>
-            <a:picLocks noChangeAspect="1" noChangeArrowheads="1"/>
-          </p:cNvPicPr>
-          <p:nvPr/>
-        </p:nvPicPr>
-        <p:blipFill>
-          <a:blip r:embed="rId3"/>
-          <a:srcRect/>
-          <a:stretch>
-            <a:fillRect/>
-          </a:stretch>
-        </p:blipFill>
-        <p:spPr bwMode="auto">
-          <a:xfrm>
-            <a:off x="4357686" y="328439"/>
-            <a:ext cx="4786314" cy="1876425"/>
-          </a:xfrm>
-          <a:prstGeom prst="rect">
-            <a:avLst/>
-          </a:prstGeom>
-          <a:noFill/>
-          <a:ln w="9525">
-            <a:noFill/>
-            <a:miter lim="800000"/>
-            <a:headEnd/>
-            <a:tailEnd/>
-          </a:ln>
-          <a:effectLst/>
-        </p:spPr>
-      </p:pic>
-      <p:sp>
-        <p:nvSpPr>
-          <p:cNvPr id="5" name="Прямоугольник 4"/>
-          <p:cNvSpPr/>
-          <p:nvPr/>
-        </p:nvSpPr>
-        <p:spPr>
-          <a:xfrm>
-            <a:off x="5286380" y="2123564"/>
-            <a:ext cx="2854308" cy="369332"/>
-          </a:xfrm>
-          <a:prstGeom prst="rect">
-            <a:avLst/>
-          </a:prstGeom>
-        </p:spPr>
-        <p:txBody>
-          <a:bodyPr wrap="none">
-            <a:spAutoFit/>
-          </a:bodyPr>
-          <a:lstStyle/>
-          <a:p>
-            <a:r>
-              <a:rPr lang="ru-RU" dirty="0"/>
-              <a:t>Переменная уровня класса</a:t>
-            </a:r>
-          </a:p>
-        </p:txBody>
-      </p:sp>
-      <p:pic>
-        <p:nvPicPr>
-          <p:cNvPr id="18436" name="Picture 4"/>
-          <p:cNvPicPr>
-            <a:picLocks noChangeAspect="1" noChangeArrowheads="1"/>
-          </p:cNvPicPr>
-          <p:nvPr/>
-        </p:nvPicPr>
-        <p:blipFill>
-          <a:blip r:embed="rId4"/>
-          <a:srcRect/>
-          <a:stretch>
-            <a:fillRect/>
-          </a:stretch>
-        </p:blipFill>
-        <p:spPr bwMode="auto">
-          <a:xfrm>
-            <a:off x="2062779" y="2688048"/>
-            <a:ext cx="4686300" cy="1076325"/>
-          </a:xfrm>
-          <a:prstGeom prst="rect">
-            <a:avLst/>
-          </a:prstGeom>
-          <a:noFill/>
-          <a:ln w="9525">
-            <a:noFill/>
-            <a:miter lim="800000"/>
-            <a:headEnd/>
-            <a:tailEnd/>
-          </a:ln>
-          <a:effectLst/>
-        </p:spPr>
-      </p:pic>
-      <p:sp>
-        <p:nvSpPr>
-          <p:cNvPr id="7" name="Прямоугольник 6"/>
-          <p:cNvSpPr/>
-          <p:nvPr/>
-        </p:nvSpPr>
-        <p:spPr>
-          <a:xfrm>
-            <a:off x="3332686" y="3845346"/>
-            <a:ext cx="2146485" cy="369332"/>
-          </a:xfrm>
-          <a:prstGeom prst="rect">
-            <a:avLst/>
-          </a:prstGeom>
-        </p:spPr>
-        <p:txBody>
-          <a:bodyPr wrap="none">
-            <a:spAutoFit/>
-          </a:bodyPr>
-          <a:lstStyle/>
-          <a:p>
-            <a:r>
-              <a:rPr lang="ru-RU" dirty="0"/>
-              <a:t>Блок внутри метода</a:t>
-            </a:r>
-          </a:p>
-        </p:txBody>
-      </p:sp>
-      <p:pic>
-        <p:nvPicPr>
-          <p:cNvPr id="18437" name="Picture 5"/>
-          <p:cNvPicPr>
-            <a:picLocks noChangeAspect="1" noChangeArrowheads="1"/>
-          </p:cNvPicPr>
-          <p:nvPr/>
-        </p:nvPicPr>
-        <p:blipFill>
-          <a:blip r:embed="rId5"/>
-          <a:srcRect/>
-          <a:stretch>
-            <a:fillRect/>
-          </a:stretch>
-        </p:blipFill>
-        <p:spPr bwMode="auto">
-          <a:xfrm>
-            <a:off x="2047875" y="4869160"/>
-            <a:ext cx="5276850" cy="1419225"/>
-          </a:xfrm>
-          <a:prstGeom prst="rect">
-            <a:avLst/>
-          </a:prstGeom>
-          <a:noFill/>
-          <a:ln w="9525">
-            <a:noFill/>
-            <a:miter lim="800000"/>
-            <a:headEnd/>
-            <a:tailEnd/>
-          </a:ln>
-          <a:effectLst/>
-        </p:spPr>
-      </p:pic>
-      <p:sp>
-        <p:nvSpPr>
-          <p:cNvPr id="9" name="Прямоугольник 8"/>
-          <p:cNvSpPr/>
-          <p:nvPr/>
-        </p:nvSpPr>
-        <p:spPr>
-          <a:xfrm>
-            <a:off x="3401486" y="6288385"/>
-            <a:ext cx="2008883" cy="369332"/>
-          </a:xfrm>
-          <a:prstGeom prst="rect">
-            <a:avLst/>
-          </a:prstGeom>
-        </p:spPr>
-        <p:txBody>
-          <a:bodyPr wrap="none">
-            <a:spAutoFit/>
-          </a:bodyPr>
-          <a:lstStyle/>
-          <a:p>
-            <a:r>
-              <a:rPr lang="ru-RU" dirty="0"/>
-              <a:t>Перекрытие имён</a:t>
-            </a:r>
+            <a:pPr algn="just"/>
+            <a:r>
+              <a:rPr lang="ru-RU" sz="2000" b="1" dirty="0" smtClean="0">
+                <a:latin typeface="Times New Roman" pitchFamily="18" charset="0"/>
+                <a:cs typeface="Times New Roman" pitchFamily="18" charset="0"/>
+              </a:rPr>
+              <a:t>Поля</a:t>
+            </a:r>
+            <a:r>
+              <a:rPr lang="ru-RU" sz="2000" dirty="0" smtClean="0">
+                <a:latin typeface="Times New Roman" pitchFamily="18" charset="0"/>
+                <a:cs typeface="Times New Roman" pitchFamily="18" charset="0"/>
+              </a:rPr>
+              <a:t> - это переменные, которые располагаются в типе (классе или структуре). Если вы поставите модификатор доступа </a:t>
+            </a:r>
+            <a:r>
+              <a:rPr lang="ru-RU" sz="2000" dirty="0" err="1" smtClean="0">
+                <a:latin typeface="Times New Roman" pitchFamily="18" charset="0"/>
+                <a:cs typeface="Times New Roman" pitchFamily="18" charset="0"/>
+              </a:rPr>
+              <a:t>public</a:t>
+            </a:r>
+            <a:r>
+              <a:rPr lang="ru-RU" sz="2000" dirty="0" smtClean="0">
+                <a:latin typeface="Times New Roman" pitchFamily="18" charset="0"/>
+                <a:cs typeface="Times New Roman" pitchFamily="18" charset="0"/>
+              </a:rPr>
+              <a:t> или </a:t>
+            </a:r>
+            <a:r>
+              <a:rPr lang="ru-RU" sz="2000" dirty="0" err="1" smtClean="0">
+                <a:latin typeface="Times New Roman" pitchFamily="18" charset="0"/>
+                <a:cs typeface="Times New Roman" pitchFamily="18" charset="0"/>
+              </a:rPr>
+              <a:t>internal</a:t>
+            </a:r>
+            <a:r>
+              <a:rPr lang="ru-RU" sz="2000" dirty="0" smtClean="0">
+                <a:latin typeface="Times New Roman" pitchFamily="18" charset="0"/>
+                <a:cs typeface="Times New Roman" pitchFamily="18" charset="0"/>
+              </a:rPr>
+              <a:t>, то к этим полям можно будет получить доступ снаружи. Если вы поставите модификатор доступа </a:t>
+            </a:r>
+            <a:r>
+              <a:rPr lang="ru-RU" sz="2000" dirty="0" err="1" smtClean="0">
+                <a:latin typeface="Times New Roman" pitchFamily="18" charset="0"/>
+                <a:cs typeface="Times New Roman" pitchFamily="18" charset="0"/>
+              </a:rPr>
+              <a:t>private</a:t>
+            </a:r>
+            <a:r>
+              <a:rPr lang="ru-RU" sz="2000" dirty="0" smtClean="0">
+                <a:latin typeface="Times New Roman" pitchFamily="18" charset="0"/>
+                <a:cs typeface="Times New Roman" pitchFamily="18" charset="0"/>
+              </a:rPr>
+              <a:t>, то с таким полем можно будет работать только внутри класса. Если </a:t>
+            </a:r>
+            <a:r>
+              <a:rPr lang="ru-RU" sz="2000" dirty="0" err="1" smtClean="0">
+                <a:latin typeface="Times New Roman" pitchFamily="18" charset="0"/>
+                <a:cs typeface="Times New Roman" pitchFamily="18" charset="0"/>
+              </a:rPr>
+              <a:t>protected</a:t>
+            </a:r>
+            <a:r>
+              <a:rPr lang="ru-RU" sz="2000" dirty="0" smtClean="0">
+                <a:latin typeface="Times New Roman" pitchFamily="18" charset="0"/>
+                <a:cs typeface="Times New Roman" pitchFamily="18" charset="0"/>
+              </a:rPr>
+              <a:t>, то внутри класса и в его наследниках.</a:t>
+            </a:r>
+            <a:endParaRPr lang="ru-RU" sz="2000" dirty="0">
+              <a:latin typeface="Times New Roman" pitchFamily="18" charset="0"/>
+              <a:cs typeface="Times New Roman" pitchFamily="18" charset="0"/>
+            </a:endParaRPr>
           </a:p>
         </p:txBody>
       </p:sp>
